--- a/figures/Oughton_Avilash_Angirekula_2026ASSIP_Poster.pptx
+++ b/figures/Oughton_Avilash_Angirekula_2026ASSIP_Poster.pptx
@@ -5355,7 +5355,7 @@
         <p:spPr>
           <a:xfrm>
             <a:off x="457200" y="5486400"/>
-            <a:ext cx="10332720" cy="5669280"/>
+            <a:ext cx="10332720" cy="5474207"/>
           </a:xfrm>
           <a:prstGeom prst="rect">
             <a:avLst/>
@@ -5559,7 +5559,7 @@
         <p:spPr>
           <a:xfrm>
             <a:off x="457200" y="12710159"/>
-            <a:ext cx="10332720" cy="2880360"/>
+            <a:ext cx="10332720" cy="2855468"/>
           </a:xfrm>
           <a:prstGeom prst="rect">
             <a:avLst/>
@@ -5638,7 +5638,7 @@
         </p:nvSpPr>
         <p:spPr>
           <a:xfrm>
-            <a:off x="548640" y="15499080"/>
+            <a:off x="548640" y="15565627"/>
             <a:ext cx="10149840" cy="713232"/>
           </a:xfrm>
           <a:prstGeom prst="rect">
@@ -5684,7 +5684,7 @@
         </p:nvSpPr>
         <p:spPr>
           <a:xfrm>
-            <a:off x="685800" y="15553943"/>
+            <a:off x="685800" y="15620491"/>
             <a:ext cx="3017520" cy="603504"/>
           </a:xfrm>
           <a:prstGeom prst="rect">
@@ -5726,7 +5726,7 @@
         </p:nvSpPr>
         <p:spPr>
           <a:xfrm>
-            <a:off x="3703320" y="15553943"/>
+            <a:off x="3703320" y="15620491"/>
             <a:ext cx="6812280" cy="603504"/>
           </a:xfrm>
           <a:prstGeom prst="rect">
@@ -5768,7 +5768,7 @@
         </p:nvSpPr>
         <p:spPr>
           <a:xfrm>
-            <a:off x="548640" y="16322039"/>
+            <a:off x="548640" y="16388587"/>
             <a:ext cx="10149840" cy="713232"/>
           </a:xfrm>
           <a:prstGeom prst="rect">
@@ -5814,7 +5814,7 @@
         </p:nvSpPr>
         <p:spPr>
           <a:xfrm>
-            <a:off x="685800" y="16376903"/>
+            <a:off x="685800" y="16443451"/>
             <a:ext cx="3017520" cy="603504"/>
           </a:xfrm>
           <a:prstGeom prst="rect">
@@ -5856,7 +5856,7 @@
         </p:nvSpPr>
         <p:spPr>
           <a:xfrm>
-            <a:off x="3703320" y="16376903"/>
+            <a:off x="3703320" y="16443451"/>
             <a:ext cx="6812280" cy="603504"/>
           </a:xfrm>
           <a:prstGeom prst="rect">
@@ -5898,7 +5898,7 @@
         </p:nvSpPr>
         <p:spPr>
           <a:xfrm>
-            <a:off x="548640" y="17144999"/>
+            <a:off x="548640" y="17211547"/>
             <a:ext cx="10149840" cy="713232"/>
           </a:xfrm>
           <a:prstGeom prst="rect">
@@ -5944,7 +5944,7 @@
         </p:nvSpPr>
         <p:spPr>
           <a:xfrm>
-            <a:off x="685800" y="17199863"/>
+            <a:off x="685800" y="17266411"/>
             <a:ext cx="3017520" cy="603504"/>
           </a:xfrm>
           <a:prstGeom prst="rect">
@@ -5986,7 +5986,7 @@
         </p:nvSpPr>
         <p:spPr>
           <a:xfrm>
-            <a:off x="3703320" y="17199863"/>
+            <a:off x="3703320" y="17266411"/>
             <a:ext cx="6812280" cy="603504"/>
           </a:xfrm>
           <a:prstGeom prst="rect">
@@ -6028,7 +6028,7 @@
         </p:nvSpPr>
         <p:spPr>
           <a:xfrm>
-            <a:off x="548640" y="17967959"/>
+            <a:off x="548640" y="18034507"/>
             <a:ext cx="10149840" cy="713232"/>
           </a:xfrm>
           <a:prstGeom prst="rect">
@@ -6074,7 +6074,7 @@
         </p:nvSpPr>
         <p:spPr>
           <a:xfrm>
-            <a:off x="685800" y="18022823"/>
+            <a:off x="685800" y="18089371"/>
             <a:ext cx="3017520" cy="603504"/>
           </a:xfrm>
           <a:prstGeom prst="rect">
@@ -6116,7 +6116,7 @@
         </p:nvSpPr>
         <p:spPr>
           <a:xfrm>
-            <a:off x="3703320" y="18022823"/>
+            <a:off x="3703320" y="18089371"/>
             <a:ext cx="6812280" cy="603504"/>
           </a:xfrm>
           <a:prstGeom prst="rect">
@@ -6158,8 +6158,8 @@
         </p:nvSpPr>
         <p:spPr>
           <a:xfrm>
-            <a:off x="457200" y="18882359"/>
-            <a:ext cx="10332720" cy="3108960"/>
+            <a:off x="457200" y="18948907"/>
+            <a:ext cx="10332720" cy="1925827"/>
           </a:xfrm>
           <a:prstGeom prst="rect">
             <a:avLst/>
@@ -6200,8 +6200,8 @@
         </p:nvSpPr>
         <p:spPr>
           <a:xfrm>
-            <a:off x="457200" y="22128479"/>
-            <a:ext cx="10332720" cy="2103120"/>
+            <a:off x="457200" y="21103335"/>
+            <a:ext cx="10332720" cy="2434844"/>
           </a:xfrm>
           <a:prstGeom prst="rect">
             <a:avLst/>
@@ -6246,8 +6246,8 @@
         </p:nvSpPr>
         <p:spPr>
           <a:xfrm>
-            <a:off x="457200" y="22128479"/>
-            <a:ext cx="128016" cy="2103120"/>
+            <a:off x="457200" y="21103335"/>
+            <a:ext cx="128016" cy="2434844"/>
           </a:xfrm>
           <a:prstGeom prst="rect">
             <a:avLst/>
@@ -6290,8 +6290,8 @@
         </p:nvSpPr>
         <p:spPr>
           <a:xfrm>
-            <a:off x="685800" y="22183343"/>
-            <a:ext cx="9921240" cy="1993392"/>
+            <a:off x="685800" y="21158199"/>
+            <a:ext cx="9921240" cy="2306828"/>
           </a:xfrm>
           <a:prstGeom prst="rect">
             <a:avLst/>
@@ -6811,8 +6811,8 @@
         </p:nvSpPr>
         <p:spPr>
           <a:xfrm>
-            <a:off x="11292840" y="7040880"/>
-            <a:ext cx="10332720" cy="1097280"/>
+            <a:off x="11292840" y="6931152"/>
+            <a:ext cx="10332720" cy="1358773"/>
           </a:xfrm>
           <a:prstGeom prst="rect">
             <a:avLst/>
@@ -6861,7 +6861,7 @@
         </p:blipFill>
         <p:spPr>
           <a:xfrm>
-            <a:off x="11292840" y="8229600"/>
+            <a:off x="11292840" y="8399653"/>
             <a:ext cx="10332720" cy="4307742"/>
           </a:xfrm>
           <a:prstGeom prst="rect">
@@ -6877,8 +6877,8 @@
         </p:nvSpPr>
         <p:spPr>
           <a:xfrm>
-            <a:off x="11292840" y="12673584"/>
-            <a:ext cx="10332720" cy="960120"/>
+            <a:off x="11292840" y="12844555"/>
+            <a:ext cx="10332720" cy="815847"/>
           </a:xfrm>
           <a:prstGeom prst="rect">
             <a:avLst/>
@@ -6919,8 +6919,8 @@
         </p:nvSpPr>
         <p:spPr>
           <a:xfrm>
-            <a:off x="11292840" y="13679424"/>
-            <a:ext cx="10332720" cy="3840480"/>
+            <a:off x="11292840" y="13751843"/>
+            <a:ext cx="10332720" cy="4460748"/>
           </a:xfrm>
           <a:prstGeom prst="rect">
             <a:avLst/>
@@ -6948,7 +6948,7 @@
                 </a:solidFill>
                 <a:latin typeface="Arial"/>
               </a:rPr>
-              <a:t>Of 2,696 facilities, 1,742 face no mapped hazard and 205 face two or more. Eighteen states holding half the national fleet sit below 10% exposed, while ten states holding a third sit above 60%. Almost nothing falls in between.</a:t>
+              <a:t>Of 2,696 facilities, 1,742 face no mapped hazard and 205 face two or more. Eighteen states holding half the fleet sit below 10% exposed. Ten states holding a third sit above 60%.</a:t>
             </a:r>
           </a:p>
           <a:p>
@@ -6986,7 +6986,7 @@
                 </a:solidFill>
                 <a:latin typeface="Arial"/>
               </a:rPr>
-              <a:t>Virginia, the largest concentration on Earth with 409 facilities, is 0.7% exposed. California and New Jersey are 100%.</a:t>
+              <a:t>Virginia, the largest concentration on Earth, is 0.7% exposed. California and New Jersey are 100%.</a:t>
             </a:r>
           </a:p>
           <a:p>
@@ -7024,7 +7024,7 @@
                 </a:solidFill>
                 <a:latin typeface="Arial"/>
               </a:rPr>
-              <a:t>Water stress is the exception that does reach Virginia: 952 facilities nationally sit in high or extremely-high stress basins, a binding constraint for evaporative cooling.</a:t>
+              <a:t>Water stress is the exception that reaches Virginia. 952 facilities nationally sit in high or extremely-high stress basins.</a:t>
             </a:r>
           </a:p>
         </p:txBody>
@@ -7045,8 +7045,8 @@
         </p:blipFill>
         <p:spPr>
           <a:xfrm>
-            <a:off x="11292840" y="17611344"/>
-            <a:ext cx="10332720" cy="5491236"/>
+            <a:off x="11292840" y="18322319"/>
+            <a:ext cx="10332720" cy="4874805"/>
           </a:xfrm>
           <a:prstGeom prst="rect">
             <a:avLst/>
@@ -7061,8 +7061,8 @@
         </p:nvSpPr>
         <p:spPr>
           <a:xfrm>
-            <a:off x="11292840" y="23244048"/>
-            <a:ext cx="10332720" cy="868680"/>
+            <a:off x="11292840" y="23334283"/>
+            <a:ext cx="10332720" cy="815847"/>
           </a:xfrm>
           <a:prstGeom prst="rect">
             <a:avLst/>
@@ -7190,7 +7190,7 @@
         <p:spPr>
           <a:xfrm>
             <a:off x="22128480" y="5486400"/>
-            <a:ext cx="10332720" cy="3977639"/>
+            <a:ext cx="10332720" cy="4582033"/>
           </a:xfrm>
           <a:prstGeom prst="rect">
             <a:avLst/>
@@ -7345,8 +7345,8 @@
         </p:nvSpPr>
         <p:spPr>
           <a:xfrm>
-            <a:off x="22128480" y="9555480"/>
-            <a:ext cx="10332720" cy="2240280"/>
+            <a:off x="22128480" y="10178161"/>
+            <a:ext cx="10332720" cy="2175002"/>
           </a:xfrm>
           <a:prstGeom prst="rect">
             <a:avLst/>
@@ -7391,8 +7391,8 @@
         </p:nvSpPr>
         <p:spPr>
           <a:xfrm>
-            <a:off x="22128480" y="9555480"/>
-            <a:ext cx="128016" cy="2240280"/>
+            <a:off x="22128480" y="10178161"/>
+            <a:ext cx="128016" cy="2175002"/>
           </a:xfrm>
           <a:prstGeom prst="rect">
             <a:avLst/>
@@ -7435,8 +7435,8 @@
         </p:nvSpPr>
         <p:spPr>
           <a:xfrm>
-            <a:off x="22357080" y="9628632"/>
-            <a:ext cx="9921240" cy="2093976"/>
+            <a:off x="22357080" y="10251313"/>
+            <a:ext cx="9921240" cy="2028698"/>
           </a:xfrm>
           <a:prstGeom prst="rect">
             <a:avLst/>
@@ -7504,7 +7504,7 @@
         </p:blipFill>
         <p:spPr>
           <a:xfrm>
-            <a:off x="22128480" y="11932919"/>
+            <a:off x="22128480" y="12481179"/>
             <a:ext cx="10332720" cy="3880657"/>
           </a:xfrm>
           <a:prstGeom prst="rect">
@@ -7520,8 +7520,8 @@
         </p:nvSpPr>
         <p:spPr>
           <a:xfrm>
-            <a:off x="22128480" y="15919704"/>
-            <a:ext cx="10332720" cy="960120"/>
+            <a:off x="22128480" y="16471563"/>
+            <a:ext cx="10332720" cy="815847"/>
           </a:xfrm>
           <a:prstGeom prst="rect">
             <a:avLst/>
@@ -7562,7 +7562,7 @@
         </p:nvSpPr>
         <p:spPr>
           <a:xfrm>
-            <a:off x="22128480" y="16971264"/>
+            <a:off x="22128480" y="16471563"/>
             <a:ext cx="10332720" cy="868680"/>
           </a:xfrm>
           <a:prstGeom prst="rect">
@@ -7606,7 +7606,7 @@
         </p:nvSpPr>
         <p:spPr>
           <a:xfrm>
-            <a:off x="22311360" y="17026127"/>
+            <a:off x="22311360" y="16526427"/>
             <a:ext cx="10058400" cy="777240"/>
           </a:xfrm>
           <a:prstGeom prst="rect">
@@ -7648,8 +7648,8 @@
         </p:nvSpPr>
         <p:spPr>
           <a:xfrm>
-            <a:off x="22128480" y="17931384"/>
-            <a:ext cx="10332720" cy="2331720"/>
+            <a:off x="22128480" y="17431683"/>
+            <a:ext cx="10332720" cy="2699258"/>
           </a:xfrm>
           <a:prstGeom prst="rect">
             <a:avLst/>
@@ -7766,7 +7766,7 @@
         </p:nvSpPr>
         <p:spPr>
           <a:xfrm>
-            <a:off x="22128480" y="20327112"/>
+            <a:off x="22128480" y="20240669"/>
             <a:ext cx="10332720" cy="868680"/>
           </a:xfrm>
           <a:prstGeom prst="rect">
@@ -7810,7 +7810,7 @@
         </p:nvSpPr>
         <p:spPr>
           <a:xfrm>
-            <a:off x="22311360" y="20381976"/>
+            <a:off x="22311360" y="20295533"/>
             <a:ext cx="10058400" cy="777240"/>
           </a:xfrm>
           <a:prstGeom prst="rect">
@@ -7852,8 +7852,8 @@
         </p:nvSpPr>
         <p:spPr>
           <a:xfrm>
-            <a:off x="22128480" y="21287232"/>
-            <a:ext cx="10332720" cy="1691640"/>
+            <a:off x="22128480" y="21200789"/>
+            <a:ext cx="10332720" cy="1757552"/>
           </a:xfrm>
           <a:prstGeom prst="rect">
             <a:avLst/>

--- a/figures/Oughton_Avilash_Angirekula_2026ASSIP_Poster.pptx
+++ b/figures/Oughton_Avilash_Angirekula_2026ASSIP_Poster.pptx
@@ -5004,8 +5004,8 @@
         </p:blipFill>
         <p:spPr>
           <a:xfrm>
-            <a:off x="274320" y="320040"/>
-            <a:ext cx="3246120" cy="3657600"/>
+            <a:off x="16448774" y="10597775"/>
+            <a:ext cx="232029" cy="14859"/>
           </a:xfrm>
           <a:prstGeom prst="rect">
             <a:avLst/>
@@ -5016,6 +5016,1445 @@
           </a:ln>
         </p:spPr>
       </p:pic>
+      <p:sp>
+        <p:nvSpPr>
+          <p:cNvPr id="108" name="Google Shape;108;p13"/>
+          <p:cNvSpPr txBox="1"/>
+          <p:nvPr/>
+        </p:nvSpPr>
+        <p:spPr>
+          <a:xfrm>
+            <a:off x="11411573" y="13922756"/>
+            <a:ext cx="115443" cy="290322"/>
+          </a:xfrm>
+          <a:prstGeom prst="rect">
+            <a:avLst/>
+          </a:prstGeom>
+          <a:noFill/>
+          <a:ln>
+            <a:noFill/>
+          </a:ln>
+        </p:spPr>
+        <p:txBody>
+          <a:bodyPr spcFirstLastPara="1" wrap="square" lIns="57240" tIns="28620" rIns="57240" bIns="28620" anchor="t" anchorCtr="0">
+            <a:noAutofit/>
+          </a:bodyPr>
+          <a:lstStyle/>
+          <a:p>
+            <a:pPr>
+              <a:buClr>
+                <a:schemeClr val="dk1"/>
+              </a:buClr>
+              <a:buSzPts val="2100"/>
+            </a:pPr>
+            <a:endParaRPr sz="1512">
+              <a:solidFill>
+                <a:schemeClr val="dk1"/>
+              </a:solidFill>
+              <a:latin typeface="Times New Roman"/>
+              <a:ea typeface="Times New Roman"/>
+              <a:cs typeface="Times New Roman"/>
+              <a:sym typeface="Times New Roman"/>
+            </a:endParaRPr>
+          </a:p>
+        </p:txBody>
+      </p:sp>
+      <p:sp>
+        <p:nvSpPr>
+          <p:cNvPr id="110" name="Google Shape;110;p13"/>
+          <p:cNvSpPr txBox="1"/>
+          <p:nvPr/>
+        </p:nvSpPr>
+        <p:spPr>
+          <a:xfrm>
+            <a:off x="17388319" y="14471396"/>
+            <a:ext cx="115443" cy="290322"/>
+          </a:xfrm>
+          <a:prstGeom prst="rect">
+            <a:avLst/>
+          </a:prstGeom>
+          <a:noFill/>
+          <a:ln>
+            <a:noFill/>
+          </a:ln>
+        </p:spPr>
+        <p:txBody>
+          <a:bodyPr spcFirstLastPara="1" wrap="square" lIns="57240" tIns="28620" rIns="57240" bIns="28620" anchor="t" anchorCtr="0">
+            <a:noAutofit/>
+          </a:bodyPr>
+          <a:lstStyle/>
+          <a:p>
+            <a:pPr>
+              <a:buClr>
+                <a:schemeClr val="dk1"/>
+              </a:buClr>
+              <a:buSzPts val="2100"/>
+            </a:pPr>
+            <a:endParaRPr sz="1512">
+              <a:solidFill>
+                <a:schemeClr val="dk1"/>
+              </a:solidFill>
+              <a:latin typeface="Times New Roman"/>
+              <a:ea typeface="Times New Roman"/>
+              <a:cs typeface="Times New Roman"/>
+              <a:sym typeface="Times New Roman"/>
+            </a:endParaRPr>
+          </a:p>
+        </p:txBody>
+      </p:sp>
+      <p:sp>
+        <p:nvSpPr>
+          <p:cNvPr id="111" name="Google Shape;111;p13"/>
+          <p:cNvSpPr txBox="1"/>
+          <p:nvPr/>
+        </p:nvSpPr>
+        <p:spPr>
+          <a:xfrm>
+            <a:off x="21747721" y="5601716"/>
+            <a:ext cx="115443" cy="290322"/>
+          </a:xfrm>
+          <a:prstGeom prst="rect">
+            <a:avLst/>
+          </a:prstGeom>
+          <a:noFill/>
+          <a:ln>
+            <a:noFill/>
+          </a:ln>
+        </p:spPr>
+        <p:txBody>
+          <a:bodyPr spcFirstLastPara="1" wrap="square" lIns="57240" tIns="28620" rIns="57240" bIns="28620" anchor="t" anchorCtr="0">
+            <a:noAutofit/>
+          </a:bodyPr>
+          <a:lstStyle/>
+          <a:p>
+            <a:pPr>
+              <a:buClr>
+                <a:schemeClr val="dk1"/>
+              </a:buClr>
+              <a:buSzPts val="2100"/>
+            </a:pPr>
+            <a:endParaRPr sz="1512">
+              <a:solidFill>
+                <a:schemeClr val="dk1"/>
+              </a:solidFill>
+              <a:latin typeface="Times New Roman"/>
+              <a:ea typeface="Times New Roman"/>
+              <a:cs typeface="Times New Roman"/>
+              <a:sym typeface="Times New Roman"/>
+            </a:endParaRPr>
+          </a:p>
+        </p:txBody>
+      </p:sp>
+      <p:sp>
+        <p:nvSpPr>
+          <p:cNvPr id="112" name="Google Shape;112;p13"/>
+          <p:cNvSpPr txBox="1"/>
+          <p:nvPr/>
+        </p:nvSpPr>
+        <p:spPr>
+          <a:xfrm>
+            <a:off x="21503119" y="5235956"/>
+            <a:ext cx="115443" cy="290322"/>
+          </a:xfrm>
+          <a:prstGeom prst="rect">
+            <a:avLst/>
+          </a:prstGeom>
+          <a:noFill/>
+          <a:ln>
+            <a:noFill/>
+          </a:ln>
+        </p:spPr>
+        <p:txBody>
+          <a:bodyPr spcFirstLastPara="1" wrap="square" lIns="57240" tIns="28620" rIns="57240" bIns="28620" anchor="t" anchorCtr="0">
+            <a:noAutofit/>
+          </a:bodyPr>
+          <a:lstStyle/>
+          <a:p>
+            <a:pPr>
+              <a:buClr>
+                <a:schemeClr val="dk1"/>
+              </a:buClr>
+              <a:buSzPts val="2100"/>
+            </a:pPr>
+            <a:endParaRPr sz="1512">
+              <a:solidFill>
+                <a:schemeClr val="dk1"/>
+              </a:solidFill>
+              <a:latin typeface="Times New Roman"/>
+              <a:ea typeface="Times New Roman"/>
+              <a:cs typeface="Times New Roman"/>
+              <a:sym typeface="Times New Roman"/>
+            </a:endParaRPr>
+          </a:p>
+        </p:txBody>
+      </p:sp>
+      <p:sp>
+        <p:nvSpPr>
+          <p:cNvPr id="113" name="Google Shape;113;p13"/>
+          <p:cNvSpPr txBox="1"/>
+          <p:nvPr/>
+        </p:nvSpPr>
+        <p:spPr>
+          <a:xfrm>
+            <a:off x="21404821" y="5510276"/>
+            <a:ext cx="115443" cy="290322"/>
+          </a:xfrm>
+          <a:prstGeom prst="rect">
+            <a:avLst/>
+          </a:prstGeom>
+          <a:noFill/>
+          <a:ln>
+            <a:noFill/>
+          </a:ln>
+        </p:spPr>
+        <p:txBody>
+          <a:bodyPr spcFirstLastPara="1" wrap="square" lIns="57240" tIns="28620" rIns="57240" bIns="28620" anchor="t" anchorCtr="0">
+            <a:noAutofit/>
+          </a:bodyPr>
+          <a:lstStyle/>
+          <a:p>
+            <a:pPr>
+              <a:buClr>
+                <a:schemeClr val="dk1"/>
+              </a:buClr>
+              <a:buSzPts val="2100"/>
+            </a:pPr>
+            <a:endParaRPr sz="1512">
+              <a:solidFill>
+                <a:schemeClr val="dk1"/>
+              </a:solidFill>
+              <a:latin typeface="Times New Roman"/>
+              <a:ea typeface="Times New Roman"/>
+              <a:cs typeface="Times New Roman"/>
+              <a:sym typeface="Times New Roman"/>
+            </a:endParaRPr>
+          </a:p>
+        </p:txBody>
+      </p:sp>
+      <p:sp>
+        <p:nvSpPr>
+          <p:cNvPr id="131" name="Google Shape;131;p13"/>
+          <p:cNvSpPr txBox="1"/>
+          <p:nvPr/>
+        </p:nvSpPr>
+        <p:spPr>
+          <a:xfrm>
+            <a:off x="376700" y="5251774"/>
+            <a:ext cx="10282778" cy="3645916"/>
+          </a:xfrm>
+          <a:prstGeom prst="rect">
+            <a:avLst/>
+          </a:prstGeom>
+          <a:solidFill>
+            <a:schemeClr val="bg1"/>
+          </a:solidFill>
+          <a:ln>
+            <a:noFill/>
+          </a:ln>
+        </p:spPr>
+        <p:txBody>
+          <a:bodyPr spcFirstLastPara="1" wrap="square" lIns="164592" tIns="164592" rIns="164592" bIns="164592" anchor="t" anchorCtr="0"/>
+          <a:lstStyle/>
+          <a:p>
+            <a:pPr algn="just">
+              <a:lnSpc>
+                <a:spcPct val="95000"/>
+              </a:lnSpc>
+              <a:spcAft>
+                <a:spcPts val="1000"/>
+              </a:spcAft>
+              <a:buClr>
+                <a:schemeClr val="dk1"/>
+              </a:buClr>
+              <a:buSzPts val="1100"/>
+            </a:pPr>
+            <a:r>
+              <a:rPr sz="2600" b="0">
+                <a:solidFill>
+                  <a:srgbClr val="000000"/>
+                </a:solidFill>
+                <a:latin typeface="Arial"/>
+              </a:rPr>
+              <a:t>AI and cloud computing have concentrated enormous computing capacity into a small number of US locations. Those buildings face earthquakes, wildfire and flooding, but no open dataset records where they physically stand.</a:t>
+            </a:r>
+            <a:endParaRPr sz="2600" dirty="0">
+              <a:latin typeface="Palatino"/>
+              <a:ea typeface="Palatino"/>
+              <a:cs typeface="Palatino"/>
+              <a:sym typeface="Palatino"/>
+            </a:endParaRPr>
+          </a:p>
+          <a:p>
+            <a:pPr>
+              <a:lnSpc>
+                <a:spcPct val="95000"/>
+              </a:lnSpc>
+              <a:spcAft>
+                <a:spcPts val="1000"/>
+              </a:spcAft>
+            </a:pPr>
+            <a:r>
+              <a:rPr sz="2600" b="0">
+                <a:solidFill>
+                  <a:srgbClr val="000000"/>
+                </a:solidFill>
+                <a:latin typeface="Arial"/>
+              </a:rPr>
+              <a:t>Existing sources are proprietary, aggregated above the building level, or unverified. Without building-level locations, no one can measure what US computing infrastructure is exposed to.</a:t>
+            </a:r>
+          </a:p>
+          <a:p>
+            <a:pPr>
+              <a:lnSpc>
+                <a:spcPct val="95000"/>
+              </a:lnSpc>
+              <a:spcAft>
+                <a:spcPts val="1000"/>
+              </a:spcAft>
+            </a:pPr>
+            <a:r>
+              <a:rPr sz="2600" b="0">
+                <a:solidFill>
+                  <a:srgbClr val="000000"/>
+                </a:solidFill>
+                <a:latin typeface="Arial"/>
+              </a:rPr>
+              <a:t>These are EXPOSURE values, not risk. No vulnerability term is applied, so nothing here is a damage or loss estimate.</a:t>
+            </a:r>
+          </a:p>
+        </p:txBody>
+      </p:sp>
+      <p:sp>
+        <p:nvSpPr>
+          <p:cNvPr id="106" name="Google Shape;106;p13"/>
+          <p:cNvSpPr txBox="1"/>
+          <p:nvPr/>
+        </p:nvSpPr>
+        <p:spPr>
+          <a:xfrm>
+            <a:off x="27127967" y="2631186"/>
+            <a:ext cx="115443" cy="290322"/>
+          </a:xfrm>
+          <a:prstGeom prst="rect">
+            <a:avLst/>
+          </a:prstGeom>
+          <a:noFill/>
+          <a:ln>
+            <a:noFill/>
+          </a:ln>
+        </p:spPr>
+        <p:txBody>
+          <a:bodyPr spcFirstLastPara="1" wrap="square" lIns="57240" tIns="28620" rIns="57240" bIns="28620" anchor="t" anchorCtr="0">
+            <a:noAutofit/>
+          </a:bodyPr>
+          <a:lstStyle/>
+          <a:p>
+            <a:pPr>
+              <a:buClr>
+                <a:schemeClr val="dk1"/>
+              </a:buClr>
+              <a:buSzPts val="2100"/>
+            </a:pPr>
+            <a:endParaRPr sz="1512">
+              <a:solidFill>
+                <a:schemeClr val="dk1"/>
+              </a:solidFill>
+              <a:latin typeface="Times New Roman"/>
+              <a:ea typeface="Times New Roman"/>
+              <a:cs typeface="Times New Roman"/>
+              <a:sym typeface="Times New Roman"/>
+            </a:endParaRPr>
+          </a:p>
+        </p:txBody>
+      </p:sp>
+      <p:sp>
+        <p:nvSpPr>
+          <p:cNvPr id="107" name="Google Shape;107;p13"/>
+          <p:cNvSpPr txBox="1"/>
+          <p:nvPr/>
+        </p:nvSpPr>
+        <p:spPr>
+          <a:xfrm>
+            <a:off x="10774921" y="14014196"/>
+            <a:ext cx="115443" cy="290322"/>
+          </a:xfrm>
+          <a:prstGeom prst="rect">
+            <a:avLst/>
+          </a:prstGeom>
+          <a:noFill/>
+          <a:ln>
+            <a:noFill/>
+          </a:ln>
+        </p:spPr>
+        <p:txBody>
+          <a:bodyPr spcFirstLastPara="1" wrap="square" lIns="57240" tIns="28620" rIns="57240" bIns="28620" anchor="t" anchorCtr="0">
+            <a:noAutofit/>
+          </a:bodyPr>
+          <a:lstStyle/>
+          <a:p>
+            <a:pPr>
+              <a:buClr>
+                <a:schemeClr val="dk1"/>
+              </a:buClr>
+              <a:buSzPts val="2100"/>
+            </a:pPr>
+            <a:endParaRPr sz="1512">
+              <a:solidFill>
+                <a:schemeClr val="dk1"/>
+              </a:solidFill>
+              <a:latin typeface="Times New Roman"/>
+              <a:ea typeface="Times New Roman"/>
+              <a:cs typeface="Times New Roman"/>
+              <a:sym typeface="Times New Roman"/>
+            </a:endParaRPr>
+          </a:p>
+        </p:txBody>
+      </p:sp>
+      <p:sp>
+        <p:nvSpPr>
+          <p:cNvPr id="109" name="Google Shape;109;p13"/>
+          <p:cNvSpPr txBox="1"/>
+          <p:nvPr/>
+        </p:nvSpPr>
+        <p:spPr>
+          <a:xfrm>
+            <a:off x="11265269" y="13968476"/>
+            <a:ext cx="115443" cy="290322"/>
+          </a:xfrm>
+          <a:prstGeom prst="rect">
+            <a:avLst/>
+          </a:prstGeom>
+          <a:noFill/>
+          <a:ln>
+            <a:noFill/>
+          </a:ln>
+        </p:spPr>
+        <p:txBody>
+          <a:bodyPr spcFirstLastPara="1" wrap="square" lIns="57240" tIns="28620" rIns="57240" bIns="28620" anchor="t" anchorCtr="0">
+            <a:noAutofit/>
+          </a:bodyPr>
+          <a:lstStyle/>
+          <a:p>
+            <a:pPr>
+              <a:buClr>
+                <a:schemeClr val="dk1"/>
+              </a:buClr>
+              <a:buSzPts val="2100"/>
+            </a:pPr>
+            <a:endParaRPr sz="1512">
+              <a:solidFill>
+                <a:schemeClr val="dk1"/>
+              </a:solidFill>
+              <a:latin typeface="Times New Roman"/>
+              <a:ea typeface="Times New Roman"/>
+              <a:cs typeface="Times New Roman"/>
+              <a:sym typeface="Times New Roman"/>
+            </a:endParaRPr>
+          </a:p>
+        </p:txBody>
+      </p:sp>
+      <p:sp>
+        <p:nvSpPr>
+          <p:cNvPr id="114" name="Google Shape;114;p13"/>
+          <p:cNvSpPr txBox="1"/>
+          <p:nvPr/>
+        </p:nvSpPr>
+        <p:spPr>
+          <a:xfrm>
+            <a:off x="3826040" y="2264134"/>
+            <a:ext cx="25266317" cy="1192930"/>
+          </a:xfrm>
+          <a:prstGeom prst="rect">
+            <a:avLst/>
+          </a:prstGeom>
+          <a:solidFill>
+            <a:schemeClr val="lt1"/>
+          </a:solidFill>
+          <a:ln>
+            <a:noFill/>
+          </a:ln>
+        </p:spPr>
+        <p:txBody>
+          <a:bodyPr spcFirstLastPara="1" wrap="square" lIns="65826" tIns="32904" rIns="65826" bIns="32904" anchor="t" anchorCtr="0"/>
+          <a:lstStyle/>
+          <a:p>
+            <a:pPr algn="ctr">
+              <a:lnSpc>
+                <a:spcPct val="95000"/>
+              </a:lnSpc>
+              <a:spcAft>
+                <a:spcPts val="1000"/>
+              </a:spcAft>
+            </a:pPr>
+            <a:r>
+              <a:rPr sz="3800" b="1">
+                <a:solidFill>
+                  <a:srgbClr val="000000"/>
+                </a:solidFill>
+                <a:latin typeface="Arial"/>
+              </a:rPr>
+              <a:t>Avilash Angirekula¹, Dennies Bor¹, Edward J. Oughton¹</a:t>
+            </a:r>
+            <a:endParaRPr sz="3600" baseline="30000" dirty="0">
+              <a:solidFill>
+                <a:schemeClr val="dk1"/>
+              </a:solidFill>
+              <a:latin typeface="Arial" panose="020B0604020202020204" pitchFamily="34" charset="0"/>
+              <a:ea typeface="Helvetica Neue"/>
+              <a:cs typeface="Arial" panose="020B0604020202020204" pitchFamily="34" charset="0"/>
+              <a:sym typeface="Helvetica Neue"/>
+            </a:endParaRPr>
+          </a:p>
+        </p:txBody>
+      </p:sp>
+      <p:sp>
+        <p:nvSpPr>
+          <p:cNvPr id="119" name="Google Shape;119;p13"/>
+          <p:cNvSpPr txBox="1"/>
+          <p:nvPr/>
+        </p:nvSpPr>
+        <p:spPr>
+          <a:xfrm>
+            <a:off x="29357053" y="435681"/>
+            <a:ext cx="3130666" cy="3656905"/>
+          </a:xfrm>
+          <a:prstGeom prst="rect">
+            <a:avLst/>
+          </a:prstGeom>
+          <a:solidFill>
+            <a:srgbClr val="FFCC00">
+              <a:alpha val="84314"/>
+            </a:srgbClr>
+          </a:solidFill>
+          <a:ln w="76200" cap="flat" cmpd="thickThin">
+            <a:solidFill>
+              <a:schemeClr val="lt1"/>
+            </a:solidFill>
+            <a:prstDash val="solid"/>
+            <a:round/>
+            <a:headEnd type="none" w="sm" len="sm"/>
+            <a:tailEnd type="none" w="sm" len="sm"/>
+          </a:ln>
+        </p:spPr>
+        <p:txBody>
+          <a:bodyPr spcFirstLastPara="1" wrap="square" lIns="65826" tIns="32904" rIns="65826" bIns="32904" anchor="ctr" anchorCtr="0">
+            <a:noAutofit/>
+          </a:bodyPr>
+          <a:lstStyle/>
+          <a:p>
+            <a:pPr algn="ctr"/>
+            <a:r>
+              <a:rPr lang="en-US" sz="3240" b="1" dirty="0">
+                <a:solidFill>
+                  <a:srgbClr val="006600"/>
+                </a:solidFill>
+                <a:latin typeface="Arial" panose="020B0604020202020204" pitchFamily="34" charset="0"/>
+                <a:cs typeface="Arial" panose="020B0604020202020204" pitchFamily="34" charset="0"/>
+              </a:rPr>
+              <a:t>Aspiring Scientists Summer Internship Program </a:t>
+            </a:r>
+          </a:p>
+          <a:p>
+            <a:pPr algn="ctr"/>
+            <a:r>
+              <a:rPr lang="en-US" sz="3240" b="1" dirty="0">
+                <a:solidFill>
+                  <a:srgbClr val="006600"/>
+                </a:solidFill>
+                <a:latin typeface="Arial" panose="020B0604020202020204" pitchFamily="34" charset="0"/>
+                <a:cs typeface="Arial" panose="020B0604020202020204" pitchFamily="34" charset="0"/>
+              </a:rPr>
+              <a:t>2026</a:t>
+            </a:r>
+            <a:endParaRPr sz="3240" b="1" dirty="0">
+              <a:solidFill>
+                <a:srgbClr val="006600"/>
+              </a:solidFill>
+              <a:latin typeface="Arial" panose="020B0604020202020204" pitchFamily="34" charset="0"/>
+              <a:cs typeface="Arial" panose="020B0604020202020204" pitchFamily="34" charset="0"/>
+            </a:endParaRPr>
+          </a:p>
+        </p:txBody>
+      </p:sp>
+      <p:sp>
+        <p:nvSpPr>
+          <p:cNvPr id="73" name="Google Shape;113;p13">
+            <a:extLst>
+              <a:ext uri="{FF2B5EF4-FFF2-40B4-BE49-F238E27FC236}">
+                <a16:creationId xmlns:a16="http://schemas.microsoft.com/office/drawing/2014/main" id="{B7028C15-A27E-415D-88A6-B08B48F45D43}"/>
+              </a:ext>
+            </a:extLst>
+          </p:cNvPr>
+          <p:cNvSpPr txBox="1"/>
+          <p:nvPr/>
+        </p:nvSpPr>
+        <p:spPr>
+          <a:xfrm>
+            <a:off x="3826040" y="3431258"/>
+            <a:ext cx="25266317" cy="703207"/>
+          </a:xfrm>
+          <a:prstGeom prst="rect">
+            <a:avLst/>
+          </a:prstGeom>
+          <a:solidFill>
+            <a:schemeClr val="lt1"/>
+          </a:solidFill>
+          <a:ln>
+            <a:noFill/>
+          </a:ln>
+        </p:spPr>
+        <p:txBody>
+          <a:bodyPr spcFirstLastPara="1" wrap="square" lIns="65826" tIns="32904" rIns="65826" bIns="32904" anchor="t" anchorCtr="0"/>
+          <a:lstStyle/>
+          <a:p>
+            <a:pPr algn="ctr">
+              <a:lnSpc>
+                <a:spcPct val="95000"/>
+              </a:lnSpc>
+              <a:spcAft>
+                <a:spcPts val="1000"/>
+              </a:spcAft>
+            </a:pPr>
+            <a:r>
+              <a:rPr sz="2600" b="0">
+                <a:solidFill>
+                  <a:srgbClr val="333333"/>
+                </a:solidFill>
+                <a:latin typeface="Arial"/>
+              </a:rPr>
+              <a:t>¹Department of Geography and Geoinformation Sciences, College of Science, George Mason University</a:t>
+            </a:r>
+            <a:endParaRPr sz="2880" dirty="0">
+              <a:solidFill>
+                <a:schemeClr val="dk1"/>
+              </a:solidFill>
+              <a:latin typeface="Arial" panose="020B0604020202020204" pitchFamily="34" charset="0"/>
+              <a:ea typeface="Times New Roman"/>
+              <a:cs typeface="Arial" panose="020B0604020202020204" pitchFamily="34" charset="0"/>
+              <a:sym typeface="Times New Roman"/>
+            </a:endParaRPr>
+          </a:p>
+        </p:txBody>
+      </p:sp>
+      <p:sp>
+        <p:nvSpPr>
+          <p:cNvPr id="3" name="Rectangle 2">
+            <a:extLst>
+              <a:ext uri="{FF2B5EF4-FFF2-40B4-BE49-F238E27FC236}">
+                <a16:creationId xmlns:a16="http://schemas.microsoft.com/office/drawing/2014/main" id="{5414C21D-6153-426C-A648-2F7D91B0A3F2}"/>
+              </a:ext>
+            </a:extLst>
+          </p:cNvPr>
+          <p:cNvSpPr/>
+          <p:nvPr/>
+        </p:nvSpPr>
+        <p:spPr>
+          <a:xfrm>
+            <a:off x="430679" y="4389682"/>
+            <a:ext cx="10228799" cy="842214"/>
+          </a:xfrm>
+          <a:prstGeom prst="rect">
+            <a:avLst/>
+          </a:prstGeom>
+          <a:solidFill>
+            <a:srgbClr val="006600"/>
+          </a:solidFill>
+        </p:spPr>
+        <p:style>
+          <a:lnRef idx="1">
+            <a:schemeClr val="accent5"/>
+          </a:lnRef>
+          <a:fillRef idx="3">
+            <a:schemeClr val="accent5"/>
+          </a:fillRef>
+          <a:effectRef idx="2">
+            <a:schemeClr val="accent5"/>
+          </a:effectRef>
+          <a:fontRef idx="minor">
+            <a:schemeClr val="lt1"/>
+          </a:fontRef>
+        </p:style>
+        <p:txBody>
+          <a:bodyPr rtlCol="0" anchor="ctr"/>
+          <a:lstStyle/>
+          <a:p>
+            <a:pPr algn="ctr"/>
+            <a:r>
+              <a:rPr lang="en-US" sz="3600" b="1" dirty="0">
+                <a:latin typeface="Arial" panose="020B0604020202020204" pitchFamily="34" charset="0"/>
+                <a:cs typeface="Arial" panose="020B0604020202020204" pitchFamily="34" charset="0"/>
+              </a:rPr>
+              <a:t>Background</a:t>
+            </a:r>
+          </a:p>
+        </p:txBody>
+      </p:sp>
+      <p:sp>
+        <p:nvSpPr>
+          <p:cNvPr id="6" name="Rectangle 5">
+            <a:extLst>
+              <a:ext uri="{FF2B5EF4-FFF2-40B4-BE49-F238E27FC236}">
+                <a16:creationId xmlns:a16="http://schemas.microsoft.com/office/drawing/2014/main" id="{8BB275A5-62F7-1742-4380-8AB1A17FAF66}"/>
+              </a:ext>
+            </a:extLst>
+          </p:cNvPr>
+          <p:cNvSpPr/>
+          <p:nvPr/>
+        </p:nvSpPr>
+        <p:spPr>
+          <a:xfrm>
+            <a:off x="10965973" y="4386008"/>
+            <a:ext cx="10781748" cy="857529"/>
+          </a:xfrm>
+          <a:prstGeom prst="rect">
+            <a:avLst/>
+          </a:prstGeom>
+          <a:solidFill>
+            <a:srgbClr val="006600"/>
+          </a:solidFill>
+        </p:spPr>
+        <p:style>
+          <a:lnRef idx="1">
+            <a:schemeClr val="accent5"/>
+          </a:lnRef>
+          <a:fillRef idx="3">
+            <a:schemeClr val="accent5"/>
+          </a:fillRef>
+          <a:effectRef idx="2">
+            <a:schemeClr val="accent5"/>
+          </a:effectRef>
+          <a:fontRef idx="minor">
+            <a:schemeClr val="lt1"/>
+          </a:fontRef>
+        </p:style>
+        <p:txBody>
+          <a:bodyPr rtlCol="0" anchor="ctr"/>
+          <a:lstStyle/>
+          <a:p>
+            <a:pPr algn="ctr"/>
+            <a:r>
+              <a:rPr lang="en-US" sz="3600" b="1" dirty="0">
+                <a:latin typeface="Arial" panose="020B0604020202020204" pitchFamily="34" charset="0"/>
+                <a:cs typeface="Arial" panose="020B0604020202020204" pitchFamily="34" charset="0"/>
+              </a:rPr>
+              <a:t>Results</a:t>
+            </a:r>
+          </a:p>
+        </p:txBody>
+      </p:sp>
+      <p:sp>
+        <p:nvSpPr>
+          <p:cNvPr id="7" name="Rectangle 6">
+            <a:extLst>
+              <a:ext uri="{FF2B5EF4-FFF2-40B4-BE49-F238E27FC236}">
+                <a16:creationId xmlns:a16="http://schemas.microsoft.com/office/drawing/2014/main" id="{822515BF-9734-0282-2B15-A32512AD598B}"/>
+              </a:ext>
+            </a:extLst>
+          </p:cNvPr>
+          <p:cNvSpPr/>
+          <p:nvPr/>
+        </p:nvSpPr>
+        <p:spPr>
+          <a:xfrm>
+            <a:off x="22090619" y="4386009"/>
+            <a:ext cx="10397100" cy="809607"/>
+          </a:xfrm>
+          <a:prstGeom prst="rect">
+            <a:avLst/>
+          </a:prstGeom>
+          <a:solidFill>
+            <a:srgbClr val="006600"/>
+          </a:solidFill>
+        </p:spPr>
+        <p:style>
+          <a:lnRef idx="1">
+            <a:schemeClr val="accent5"/>
+          </a:lnRef>
+          <a:fillRef idx="3">
+            <a:schemeClr val="accent5"/>
+          </a:fillRef>
+          <a:effectRef idx="2">
+            <a:schemeClr val="accent5"/>
+          </a:effectRef>
+          <a:fontRef idx="minor">
+            <a:schemeClr val="lt1"/>
+          </a:fontRef>
+        </p:style>
+        <p:txBody>
+          <a:bodyPr rtlCol="0" anchor="ctr"/>
+          <a:lstStyle/>
+          <a:p>
+            <a:pPr algn="ctr"/>
+            <a:r>
+              <a:rPr lang="en-US" sz="3600" b="1" dirty="0">
+                <a:latin typeface="Arial" panose="020B0604020202020204" pitchFamily="34" charset="0"/>
+                <a:cs typeface="Arial" panose="020B0604020202020204" pitchFamily="34" charset="0"/>
+              </a:rPr>
+              <a:t>Conclusions</a:t>
+            </a:r>
+          </a:p>
+        </p:txBody>
+      </p:sp>
+      <p:sp>
+        <p:nvSpPr>
+          <p:cNvPr id="8" name="Rectangle 7">
+            <a:extLst>
+              <a:ext uri="{FF2B5EF4-FFF2-40B4-BE49-F238E27FC236}">
+                <a16:creationId xmlns:a16="http://schemas.microsoft.com/office/drawing/2014/main" id="{D4731E14-0938-740A-787A-D2B6693BCB6C}"/>
+              </a:ext>
+            </a:extLst>
+          </p:cNvPr>
+          <p:cNvSpPr/>
+          <p:nvPr/>
+        </p:nvSpPr>
+        <p:spPr>
+          <a:xfrm>
+            <a:off x="430679" y="14378013"/>
+            <a:ext cx="10228799" cy="827489"/>
+          </a:xfrm>
+          <a:prstGeom prst="rect">
+            <a:avLst/>
+          </a:prstGeom>
+          <a:solidFill>
+            <a:srgbClr val="006600"/>
+          </a:solidFill>
+        </p:spPr>
+        <p:style>
+          <a:lnRef idx="1">
+            <a:schemeClr val="accent5"/>
+          </a:lnRef>
+          <a:fillRef idx="3">
+            <a:schemeClr val="accent5"/>
+          </a:fillRef>
+          <a:effectRef idx="2">
+            <a:schemeClr val="accent5"/>
+          </a:effectRef>
+          <a:fontRef idx="minor">
+            <a:schemeClr val="lt1"/>
+          </a:fontRef>
+        </p:style>
+        <p:txBody>
+          <a:bodyPr rtlCol="0" anchor="ctr"/>
+          <a:lstStyle/>
+          <a:p>
+            <a:pPr algn="ctr"/>
+            <a:r>
+              <a:rPr lang="en-US" sz="3600" b="1" dirty="0">
+                <a:latin typeface="Arial" panose="020B0604020202020204" pitchFamily="34" charset="0"/>
+                <a:cs typeface="Arial" panose="020B0604020202020204" pitchFamily="34" charset="0"/>
+              </a:rPr>
+              <a:t>Materials and Methods</a:t>
+            </a:r>
+          </a:p>
+        </p:txBody>
+      </p:sp>
+      <p:sp>
+        <p:nvSpPr>
+          <p:cNvPr id="9" name="Rectangle 8">
+            <a:extLst>
+              <a:ext uri="{FF2B5EF4-FFF2-40B4-BE49-F238E27FC236}">
+                <a16:creationId xmlns:a16="http://schemas.microsoft.com/office/drawing/2014/main" id="{2AEA7A76-8036-99F5-636B-AB0CDCB6D5FE}"/>
+              </a:ext>
+            </a:extLst>
+          </p:cNvPr>
+          <p:cNvSpPr/>
+          <p:nvPr/>
+        </p:nvSpPr>
+        <p:spPr>
+          <a:xfrm>
+            <a:off x="22090621" y="15371883"/>
+            <a:ext cx="10451076" cy="842214"/>
+          </a:xfrm>
+          <a:prstGeom prst="rect">
+            <a:avLst/>
+          </a:prstGeom>
+          <a:solidFill>
+            <a:srgbClr val="006600"/>
+          </a:solidFill>
+        </p:spPr>
+        <p:style>
+          <a:lnRef idx="1">
+            <a:schemeClr val="accent5"/>
+          </a:lnRef>
+          <a:fillRef idx="3">
+            <a:schemeClr val="accent5"/>
+          </a:fillRef>
+          <a:effectRef idx="2">
+            <a:schemeClr val="accent5"/>
+          </a:effectRef>
+          <a:fontRef idx="minor">
+            <a:schemeClr val="lt1"/>
+          </a:fontRef>
+        </p:style>
+        <p:txBody>
+          <a:bodyPr rtlCol="0" anchor="ctr"/>
+          <a:lstStyle/>
+          <a:p>
+            <a:pPr algn="ctr"/>
+            <a:r>
+              <a:rPr lang="en-US" sz="3600" b="1" dirty="0">
+                <a:latin typeface="Arial" panose="020B0604020202020204" pitchFamily="34" charset="0"/>
+                <a:cs typeface="Arial" panose="020B0604020202020204" pitchFamily="34" charset="0"/>
+              </a:rPr>
+              <a:t>Major Citations</a:t>
+            </a:r>
+          </a:p>
+        </p:txBody>
+      </p:sp>
+      <p:sp>
+        <p:nvSpPr>
+          <p:cNvPr id="10" name="Rectangle 9">
+            <a:extLst>
+              <a:ext uri="{FF2B5EF4-FFF2-40B4-BE49-F238E27FC236}">
+                <a16:creationId xmlns:a16="http://schemas.microsoft.com/office/drawing/2014/main" id="{51247692-30D3-AF09-61BE-4D4CC0F1B37F}"/>
+              </a:ext>
+            </a:extLst>
+          </p:cNvPr>
+          <p:cNvSpPr/>
+          <p:nvPr/>
+        </p:nvSpPr>
+        <p:spPr>
+          <a:xfrm>
+            <a:off x="22061034" y="20737925"/>
+            <a:ext cx="10480664" cy="842214"/>
+          </a:xfrm>
+          <a:prstGeom prst="rect">
+            <a:avLst/>
+          </a:prstGeom>
+          <a:solidFill>
+            <a:srgbClr val="006600"/>
+          </a:solidFill>
+        </p:spPr>
+        <p:style>
+          <a:lnRef idx="1">
+            <a:schemeClr val="accent5"/>
+          </a:lnRef>
+          <a:fillRef idx="3">
+            <a:schemeClr val="accent5"/>
+          </a:fillRef>
+          <a:effectRef idx="2">
+            <a:schemeClr val="accent5"/>
+          </a:effectRef>
+          <a:fontRef idx="minor">
+            <a:schemeClr val="lt1"/>
+          </a:fontRef>
+        </p:style>
+        <p:txBody>
+          <a:bodyPr rtlCol="0" anchor="ctr"/>
+          <a:lstStyle/>
+          <a:p>
+            <a:pPr algn="ctr"/>
+            <a:r>
+              <a:rPr lang="en-US" sz="3600" b="1" dirty="0">
+                <a:latin typeface="Arial" panose="020B0604020202020204" pitchFamily="34" charset="0"/>
+                <a:cs typeface="Arial" panose="020B0604020202020204" pitchFamily="34" charset="0"/>
+              </a:rPr>
+              <a:t>Acknowledgements</a:t>
+            </a:r>
+          </a:p>
+        </p:txBody>
+      </p:sp>
+      <p:sp>
+        <p:nvSpPr>
+          <p:cNvPr id="11" name="Google Shape;131;p13">
+            <a:extLst>
+              <a:ext uri="{FF2B5EF4-FFF2-40B4-BE49-F238E27FC236}">
+                <a16:creationId xmlns:a16="http://schemas.microsoft.com/office/drawing/2014/main" id="{47302C31-0708-183B-7F10-E19B6238F926}"/>
+              </a:ext>
+            </a:extLst>
+          </p:cNvPr>
+          <p:cNvSpPr txBox="1"/>
+          <p:nvPr/>
+        </p:nvSpPr>
+        <p:spPr>
+          <a:xfrm>
+            <a:off x="376700" y="15205502"/>
+            <a:ext cx="10282778" cy="2264156"/>
+          </a:xfrm>
+          <a:prstGeom prst="rect">
+            <a:avLst/>
+          </a:prstGeom>
+          <a:solidFill>
+            <a:schemeClr val="bg1"/>
+          </a:solidFill>
+          <a:ln>
+            <a:noFill/>
+          </a:ln>
+        </p:spPr>
+        <p:txBody>
+          <a:bodyPr spcFirstLastPara="1" wrap="square" lIns="164592" tIns="164592" rIns="164592" bIns="164592" anchor="t" anchorCtr="0"/>
+          <a:lstStyle/>
+          <a:p>
+            <a:pPr algn="just">
+              <a:lnSpc>
+                <a:spcPct val="95000"/>
+              </a:lnSpc>
+              <a:spcAft>
+                <a:spcPts val="1000"/>
+              </a:spcAft>
+              <a:buClr>
+                <a:schemeClr val="dk1"/>
+              </a:buClr>
+              <a:buSzPts val="1100"/>
+            </a:pPr>
+            <a:r>
+              <a:rPr sz="2600" b="0">
+                <a:solidFill>
+                  <a:srgbClr val="000000"/>
+                </a:solidFill>
+                <a:latin typeface="Arial"/>
+              </a:rPr>
+              <a:t>A reproducible Python pipeline merges OpenStreetMap, PeeringDB and Wikidata, removes duplicate records, and grades every coordinate against an independent building-footprint dataset.</a:t>
+            </a:r>
+          </a:p>
+          <a:p>
+            <a:pPr>
+              <a:lnSpc>
+                <a:spcPct val="95000"/>
+              </a:lnSpc>
+              <a:spcAft>
+                <a:spcPts val="1000"/>
+              </a:spcAft>
+            </a:pPr>
+            <a:r>
+              <a:rPr sz="2600" b="0">
+                <a:solidFill>
+                  <a:srgbClr val="000000"/>
+                </a:solidFill>
+                <a:latin typeface="Arial"/>
+              </a:rPr>
+              <a:t>Hazards are then read at each facility from official sources:</a:t>
+            </a:r>
+          </a:p>
+        </p:txBody>
+      </p:sp>
+      <p:sp>
+        <p:nvSpPr>
+          <p:cNvPr id="12" name="Google Shape;131;p13">
+            <a:extLst>
+              <a:ext uri="{FF2B5EF4-FFF2-40B4-BE49-F238E27FC236}">
+                <a16:creationId xmlns:a16="http://schemas.microsoft.com/office/drawing/2014/main" id="{65A629E7-2609-D28B-DA5D-ABE9038EE679}"/>
+              </a:ext>
+            </a:extLst>
+          </p:cNvPr>
+          <p:cNvSpPr txBox="1"/>
+          <p:nvPr/>
+        </p:nvSpPr>
+        <p:spPr>
+          <a:xfrm>
+            <a:off x="10965973" y="6605086"/>
+            <a:ext cx="10781748" cy="1304671"/>
+          </a:xfrm>
+          <a:prstGeom prst="rect">
+            <a:avLst/>
+          </a:prstGeom>
+          <a:solidFill>
+            <a:schemeClr val="bg1"/>
+          </a:solidFill>
+          <a:ln>
+            <a:noFill/>
+          </a:ln>
+        </p:spPr>
+        <p:txBody>
+          <a:bodyPr spcFirstLastPara="1" wrap="square" lIns="164592" tIns="164592" rIns="164592" bIns="164592" anchor="t" anchorCtr="0"/>
+          <a:lstStyle/>
+          <a:p>
+            <a:pPr algn="just">
+              <a:lnSpc>
+                <a:spcPct val="95000"/>
+              </a:lnSpc>
+              <a:spcAft>
+                <a:spcPts val="1000"/>
+              </a:spcAft>
+              <a:buClr>
+                <a:schemeClr val="dk1"/>
+              </a:buClr>
+              <a:buSzPts val="1100"/>
+            </a:pPr>
+            <a:r>
+              <a:rPr sz="2900" b="1">
+                <a:solidFill>
+                  <a:srgbClr val="000000"/>
+                </a:solidFill>
+                <a:latin typeface="Arial"/>
+              </a:rPr>
+              <a:t>Hazard exposure is bimodal. It is decided by which cluster a facility sits in, not by anything about data centers.</a:t>
+            </a:r>
+          </a:p>
+        </p:txBody>
+      </p:sp>
+      <p:sp>
+        <p:nvSpPr>
+          <p:cNvPr id="14" name="Rectangle 13">
+            <a:extLst>
+              <a:ext uri="{FF2B5EF4-FFF2-40B4-BE49-F238E27FC236}">
+                <a16:creationId xmlns:a16="http://schemas.microsoft.com/office/drawing/2014/main" id="{161551E7-54AC-5EDA-0356-93EDDEC4719A}"/>
+              </a:ext>
+            </a:extLst>
+          </p:cNvPr>
+          <p:cNvSpPr/>
+          <p:nvPr/>
+        </p:nvSpPr>
+        <p:spPr>
+          <a:xfrm>
+            <a:off x="3826040" y="425006"/>
+            <a:ext cx="25266318" cy="1674193"/>
+          </a:xfrm>
+          <a:prstGeom prst="rect">
+            <a:avLst/>
+          </a:prstGeom>
+          <a:solidFill>
+            <a:srgbClr val="006600"/>
+          </a:solidFill>
+        </p:spPr>
+        <p:style>
+          <a:lnRef idx="1">
+            <a:schemeClr val="accent5"/>
+          </a:lnRef>
+          <a:fillRef idx="3">
+            <a:schemeClr val="accent5"/>
+          </a:fillRef>
+          <a:effectRef idx="2">
+            <a:schemeClr val="accent5"/>
+          </a:effectRef>
+          <a:fontRef idx="minor">
+            <a:schemeClr val="lt1"/>
+          </a:fontRef>
+        </p:style>
+        <p:txBody>
+          <a:bodyPr rtlCol="0" anchor="ctr" wrap="square"/>
+          <a:lstStyle/>
+          <a:p>
+            <a:pPr algn="ctr">
+              <a:lnSpc>
+                <a:spcPct val="92000"/>
+              </a:lnSpc>
+              <a:spcAft>
+                <a:spcPts val="1000"/>
+              </a:spcAft>
+            </a:pPr>
+            <a:r>
+              <a:rPr sz="8000" b="1">
+                <a:solidFill>
+                  <a:srgbClr val="000000"/>
+                </a:solidFill>
+                <a:latin typeface="Arial"/>
+              </a:rPr>
+              <a:t>Two Americas of Data Center Hazard: 2,696 US Facilities Mapped</a:t>
+            </a:r>
+          </a:p>
+        </p:txBody>
+      </p:sp>
+      <p:sp>
+        <p:nvSpPr>
+          <p:cNvPr id="15" name="Google Shape;131;p13">
+            <a:extLst>
+              <a:ext uri="{FF2B5EF4-FFF2-40B4-BE49-F238E27FC236}">
+                <a16:creationId xmlns:a16="http://schemas.microsoft.com/office/drawing/2014/main" id="{E8AE6323-EAA4-4495-A94C-00059D534A29}"/>
+              </a:ext>
+            </a:extLst>
+          </p:cNvPr>
+          <p:cNvSpPr txBox="1"/>
+          <p:nvPr/>
+        </p:nvSpPr>
+        <p:spPr>
+          <a:xfrm>
+            <a:off x="22090621" y="5251774"/>
+            <a:ext cx="10397100" cy="2391156"/>
+          </a:xfrm>
+          <a:prstGeom prst="rect">
+            <a:avLst/>
+          </a:prstGeom>
+          <a:solidFill>
+            <a:schemeClr val="bg1"/>
+          </a:solidFill>
+          <a:ln>
+            <a:noFill/>
+          </a:ln>
+        </p:spPr>
+        <p:txBody>
+          <a:bodyPr spcFirstLastPara="1" wrap="square" lIns="164592" tIns="164592" rIns="164592" bIns="164592" anchor="t" anchorCtr="0"/>
+          <a:lstStyle/>
+          <a:p>
+            <a:pPr algn="just">
+              <a:lnSpc>
+                <a:spcPct val="95000"/>
+              </a:lnSpc>
+              <a:spcAft>
+                <a:spcPts val="1000"/>
+              </a:spcAft>
+              <a:buClr>
+                <a:schemeClr val="dk1"/>
+              </a:buClr>
+              <a:buSzPts val="1100"/>
+            </a:pPr>
+            <a:r>
+              <a:rPr sz="2600" b="0">
+                <a:solidFill>
+                  <a:srgbClr val="000000"/>
+                </a:solidFill>
+                <a:latin typeface="Arial"/>
+              </a:rPr>
+              <a:t>•  A national average describes no real facility. Exposure is concentrated in a nameable minority of places.</a:t>
+            </a:r>
+          </a:p>
+          <a:p>
+            <a:pPr>
+              <a:lnSpc>
+                <a:spcPct val="95000"/>
+              </a:lnSpc>
+              <a:spcAft>
+                <a:spcPts val="1000"/>
+              </a:spcAft>
+            </a:pPr>
+            <a:r>
+              <a:rPr sz="2600" b="0">
+                <a:solidFill>
+                  <a:srgbClr val="000000"/>
+                </a:solidFill>
+                <a:latin typeface="Arial"/>
+              </a:rPr>
+              <a:t>•  The industry has clustered in the low-exposure half of the country. That is a finding about siting.</a:t>
+            </a:r>
+          </a:p>
+          <a:p>
+            <a:pPr>
+              <a:lnSpc>
+                <a:spcPct val="95000"/>
+              </a:lnSpc>
+              <a:spcAft>
+                <a:spcPts val="1000"/>
+              </a:spcAft>
+            </a:pPr>
+            <a:r>
+              <a:rPr sz="2600" b="0">
+                <a:solidFill>
+                  <a:srgbClr val="000000"/>
+                </a:solidFill>
+                <a:latin typeface="Arial"/>
+              </a:rPr>
+              <a:t>•  Next: fragility curves for server and cooling equipment, to turn exposure into estimated loss.</a:t>
+            </a:r>
+          </a:p>
+        </p:txBody>
+      </p:sp>
+      <p:sp>
+        <p:nvSpPr>
+          <p:cNvPr id="16" name="Google Shape;131;p13">
+            <a:extLst>
+              <a:ext uri="{FF2B5EF4-FFF2-40B4-BE49-F238E27FC236}">
+                <a16:creationId xmlns:a16="http://schemas.microsoft.com/office/drawing/2014/main" id="{9992E202-91ED-B6FF-C77B-9E72DD0EB5FB}"/>
+              </a:ext>
+            </a:extLst>
+          </p:cNvPr>
+          <p:cNvSpPr txBox="1"/>
+          <p:nvPr/>
+        </p:nvSpPr>
+        <p:spPr>
+          <a:xfrm>
+            <a:off x="22090621" y="16218476"/>
+            <a:ext cx="10418660" cy="2820416"/>
+          </a:xfrm>
+          <a:prstGeom prst="rect">
+            <a:avLst/>
+          </a:prstGeom>
+          <a:solidFill>
+            <a:schemeClr val="bg1"/>
+          </a:solidFill>
+          <a:ln>
+            <a:noFill/>
+          </a:ln>
+        </p:spPr>
+        <p:txBody>
+          <a:bodyPr spcFirstLastPara="1" wrap="square" lIns="164592" tIns="164592" rIns="164592" bIns="164592" anchor="t" anchorCtr="0"/>
+          <a:lstStyle/>
+          <a:p>
+            <a:pPr algn="just">
+              <a:lnSpc>
+                <a:spcPct val="90000"/>
+              </a:lnSpc>
+              <a:spcAft>
+                <a:spcPts val="1000"/>
+              </a:spcAft>
+              <a:buClr>
+                <a:schemeClr val="dk1"/>
+              </a:buClr>
+              <a:buSzPts val="1100"/>
+            </a:pPr>
+            <a:r>
+              <a:rPr sz="2000" b="0">
+                <a:solidFill>
+                  <a:srgbClr val="333333"/>
+                </a:solidFill>
+                <a:latin typeface="Arial"/>
+              </a:rPr>
+              <a:t>Dillon, G.K. (2023) Wildfire Hazard Potential for the United States, 270-m, v2023. USDA Forest Service. doi:10.2737/RDS-2015-0047-4</a:t>
+            </a:r>
+            <a:endParaRPr sz="2600" i="1" dirty="0">
+              <a:latin typeface="Arial" panose="020B0604020202020204" pitchFamily="34" charset="0"/>
+              <a:ea typeface="Palatino"/>
+              <a:cs typeface="Arial" panose="020B0604020202020204" pitchFamily="34" charset="0"/>
+              <a:sym typeface="Palatino"/>
+            </a:endParaRPr>
+          </a:p>
+          <a:p>
+            <a:pPr>
+              <a:lnSpc>
+                <a:spcPct val="90000"/>
+              </a:lnSpc>
+              <a:spcAft>
+                <a:spcPts val="1000"/>
+              </a:spcAft>
+            </a:pPr>
+            <a:r>
+              <a:rPr sz="2000" b="0">
+                <a:solidFill>
+                  <a:srgbClr val="333333"/>
+                </a:solidFill>
+                <a:latin typeface="Arial"/>
+              </a:rPr>
+              <a:t>Petersen, M.D. et al. (2023) 2023 US National Seismic Hazard Model. USGS. doi:10.5066/P9GNPCOD</a:t>
+            </a:r>
+          </a:p>
+          <a:p>
+            <a:pPr>
+              <a:lnSpc>
+                <a:spcPct val="90000"/>
+              </a:lnSpc>
+              <a:spcAft>
+                <a:spcPts val="1000"/>
+              </a:spcAft>
+            </a:pPr>
+            <a:r>
+              <a:rPr sz="2000" b="0">
+                <a:solidFill>
+                  <a:srgbClr val="333333"/>
+                </a:solidFill>
+                <a:latin typeface="Arial"/>
+              </a:rPr>
+              <a:t>FEMA (2026) National Flood Hazard Layer. hazards.fema.gov</a:t>
+            </a:r>
+          </a:p>
+          <a:p>
+            <a:pPr>
+              <a:lnSpc>
+                <a:spcPct val="90000"/>
+              </a:lnSpc>
+              <a:spcAft>
+                <a:spcPts val="1000"/>
+              </a:spcAft>
+            </a:pPr>
+            <a:r>
+              <a:rPr sz="2000" b="0">
+                <a:solidFill>
+                  <a:srgbClr val="333333"/>
+                </a:solidFill>
+                <a:latin typeface="Arial"/>
+              </a:rPr>
+              <a:t>Oughton, E.J. and Weigel, R. (2026) A Comparative Multi-Hazard Risk Assessment of the US High-Voltage Transmission Network. Zenodo. doi:10.5281/zenodo.20331026 (CC BY 4.0)</a:t>
+            </a:r>
+          </a:p>
+          <a:p>
+            <a:pPr>
+              <a:lnSpc>
+                <a:spcPct val="90000"/>
+              </a:lnSpc>
+              <a:spcAft>
+                <a:spcPts val="1000"/>
+              </a:spcAft>
+            </a:pPr>
+            <a:r>
+              <a:rPr sz="2000" b="0">
+                <a:solidFill>
+                  <a:srgbClr val="333333"/>
+                </a:solidFill>
+                <a:latin typeface="Arial"/>
+              </a:rPr>
+              <a:t>WRI (2023) Aqueduct 4.0 Water Risk Atlas.</a:t>
+            </a:r>
+          </a:p>
+        </p:txBody>
+      </p:sp>
+      <p:sp>
+        <p:nvSpPr>
+          <p:cNvPr id="17" name="Google Shape;131;p13">
+            <a:extLst>
+              <a:ext uri="{FF2B5EF4-FFF2-40B4-BE49-F238E27FC236}">
+                <a16:creationId xmlns:a16="http://schemas.microsoft.com/office/drawing/2014/main" id="{305E6470-FBE8-3798-FA5A-2630CB85C23B}"/>
+              </a:ext>
+            </a:extLst>
+          </p:cNvPr>
+          <p:cNvSpPr txBox="1"/>
+          <p:nvPr/>
+        </p:nvSpPr>
+        <p:spPr>
+          <a:xfrm>
+            <a:off x="22061036" y="21636297"/>
+            <a:ext cx="10480664" cy="1347216"/>
+          </a:xfrm>
+          <a:prstGeom prst="rect">
+            <a:avLst/>
+          </a:prstGeom>
+          <a:solidFill>
+            <a:schemeClr val="bg1"/>
+          </a:solidFill>
+          <a:ln>
+            <a:noFill/>
+          </a:ln>
+        </p:spPr>
+        <p:txBody>
+          <a:bodyPr spcFirstLastPara="1" wrap="square" lIns="164592" tIns="164592" rIns="164592" bIns="164592" anchor="t" anchorCtr="0"/>
+          <a:lstStyle/>
+          <a:p>
+            <a:pPr algn="just">
+              <a:lnSpc>
+                <a:spcPct val="95000"/>
+              </a:lnSpc>
+              <a:spcAft>
+                <a:spcPts val="1000"/>
+              </a:spcAft>
+              <a:buClr>
+                <a:schemeClr val="dk1"/>
+              </a:buClr>
+              <a:buSzPts val="1100"/>
+            </a:pPr>
+            <a:r>
+              <a:rPr sz="2000" b="0">
+                <a:solidFill>
+                  <a:srgbClr val="333333"/>
+                </a:solidFill>
+                <a:latin typeface="Arial"/>
+              </a:rPr>
+              <a:t>This research was made possible through the support of George Mason University's College of Science, which supports the ASSIP Program. Thanks to Prof. Edward Oughton for supervision and to Dennies Bor for the multi-hazard layers.</a:t>
+            </a:r>
+            <a:endParaRPr sz="2600" i="1" dirty="0">
+              <a:latin typeface="Arial" panose="020B0604020202020204" pitchFamily="34" charset="0"/>
+              <a:ea typeface="Palatino"/>
+              <a:cs typeface="Arial" panose="020B0604020202020204" pitchFamily="34" charset="0"/>
+              <a:sym typeface="Palatino"/>
+            </a:endParaRPr>
+          </a:p>
+          <a:p>
+            <a:pPr>
+              <a:lnSpc>
+                <a:spcPct val="95000"/>
+              </a:lnSpc>
+              <a:spcAft>
+                <a:spcPts val="1000"/>
+              </a:spcAft>
+            </a:pPr>
+            <a:r>
+              <a:rPr sz="2000" b="0">
+                <a:solidFill>
+                  <a:srgbClr val="333333"/>
+                </a:solidFill>
+                <a:latin typeface="Arial"/>
+              </a:rPr>
+              <a:t>Data and code: github.com/aviangirekula/datacenter-dataset</a:t>
+            </a:r>
+          </a:p>
+        </p:txBody>
+      </p:sp>
       <p:pic>
         <p:nvPicPr>
           <p:cNvPr id="4" name="Picture 3">
@@ -5048,23 +6487,25 @@
       </p:pic>
       <p:sp>
         <p:nvSpPr>
-          <p:cNvPr id="106" name="Rectangle 105"/>
+          <p:cNvPr id="132" name="Rectangle 131"/>
           <p:cNvSpPr/>
           <p:nvPr/>
         </p:nvSpPr>
         <p:spPr>
           <a:xfrm>
-            <a:off x="3931920" y="365760"/>
-            <a:ext cx="24963120" cy="2331720"/>
+            <a:off x="376700" y="9135434"/>
+            <a:ext cx="10282778" cy="2555875"/>
           </a:xfrm>
           <a:prstGeom prst="rect">
             <a:avLst/>
           </a:prstGeom>
           <a:solidFill>
-            <a:srgbClr val="006600"/>
+            <a:srgbClr val="EFEFEF"/>
           </a:solidFill>
-          <a:ln>
-            <a:noFill/>
+          <a:ln w="12700">
+            <a:solidFill>
+              <a:srgbClr val="A5A5A5"/>
+            </a:solidFill>
           </a:ln>
           <a:effectLst/>
         </p:spPr>
@@ -5092,140 +6533,14 @@
       </p:sp>
       <p:sp>
         <p:nvSpPr>
-          <p:cNvPr id="107" name="TextBox 106"/>
-          <p:cNvSpPr txBox="1"/>
-          <p:nvPr/>
-        </p:nvSpPr>
-        <p:spPr>
-          <a:xfrm>
-            <a:off x="4069080" y="457200"/>
-            <a:ext cx="24688800" cy="2148840"/>
-          </a:xfrm>
-          <a:prstGeom prst="rect">
-            <a:avLst/>
-          </a:prstGeom>
-          <a:noFill/>
-        </p:spPr>
-        <p:txBody>
-          <a:bodyPr wrap="square" anchor="ctr">
-            <a:spAutoFit/>
-          </a:bodyPr>
-          <a:lstStyle/>
-          <a:p>
-            <a:pPr algn="ctr">
-              <a:lnSpc>
-                <a:spcPct val="92000"/>
-              </a:lnSpc>
-              <a:spcAft>
-                <a:spcPts val="1000"/>
-              </a:spcAft>
-            </a:pPr>
-            <a:r>
-              <a:rPr sz="8800" b="1">
-                <a:solidFill>
-                  <a:srgbClr val="FFFFFF"/>
-                </a:solidFill>
-                <a:latin typeface="Arial"/>
-              </a:rPr>
-              <a:t>Two Americas of Data Center Hazard: 2,696 US Facilities Mapped</a:t>
-            </a:r>
-          </a:p>
-        </p:txBody>
-      </p:sp>
-      <p:sp>
-        <p:nvSpPr>
-          <p:cNvPr id="108" name="TextBox 107"/>
-          <p:cNvSpPr txBox="1"/>
-          <p:nvPr/>
-        </p:nvSpPr>
-        <p:spPr>
-          <a:xfrm>
-            <a:off x="3931920" y="2761488"/>
-            <a:ext cx="24963120" cy="868680"/>
-          </a:xfrm>
-          <a:prstGeom prst="rect">
-            <a:avLst/>
-          </a:prstGeom>
-          <a:noFill/>
-        </p:spPr>
-        <p:txBody>
-          <a:bodyPr wrap="square" anchor="ctr">
-            <a:spAutoFit/>
-          </a:bodyPr>
-          <a:lstStyle/>
-          <a:p>
-            <a:pPr algn="ctr">
-              <a:lnSpc>
-                <a:spcPct val="95000"/>
-              </a:lnSpc>
-              <a:spcAft>
-                <a:spcPts val="1000"/>
-              </a:spcAft>
-            </a:pPr>
-            <a:r>
-              <a:rPr sz="4000" b="1">
-                <a:solidFill>
-                  <a:srgbClr val="000000"/>
-                </a:solidFill>
-                <a:latin typeface="Arial"/>
-              </a:rPr>
-              <a:t>Avilash Angirekula¹, Dennies Bor¹, Edward J. Oughton¹</a:t>
-            </a:r>
-          </a:p>
-        </p:txBody>
-      </p:sp>
-      <p:sp>
-        <p:nvSpPr>
-          <p:cNvPr id="109" name="TextBox 108"/>
-          <p:cNvSpPr txBox="1"/>
-          <p:nvPr/>
-        </p:nvSpPr>
-        <p:spPr>
-          <a:xfrm>
-            <a:off x="3931920" y="3611880"/>
-            <a:ext cx="24963120" cy="658368"/>
-          </a:xfrm>
-          <a:prstGeom prst="rect">
-            <a:avLst/>
-          </a:prstGeom>
-          <a:noFill/>
-        </p:spPr>
-        <p:txBody>
-          <a:bodyPr wrap="square" anchor="ctr">
-            <a:spAutoFit/>
-          </a:bodyPr>
-          <a:lstStyle/>
-          <a:p>
-            <a:pPr algn="ctr">
-              <a:lnSpc>
-                <a:spcPct val="95000"/>
-              </a:lnSpc>
-              <a:spcAft>
-                <a:spcPts val="1000"/>
-              </a:spcAft>
-            </a:pPr>
-            <a:r>
-              <a:rPr sz="2600" b="0">
-                <a:solidFill>
-                  <a:srgbClr val="444444"/>
-                </a:solidFill>
-                <a:latin typeface="Arial"/>
-              </a:rPr>
-              <a:t>¹Department of Geography and Geoinformation Sciences, College of Science, George Mason University</a:t>
-            </a:r>
-          </a:p>
-        </p:txBody>
-      </p:sp>
-      <p:sp>
-        <p:nvSpPr>
-          <p:cNvPr id="110" name="Rectangle 109"/>
+          <p:cNvPr id="133" name="Rectangle 132"/>
           <p:cNvSpPr/>
           <p:nvPr/>
         </p:nvSpPr>
         <p:spPr>
           <a:xfrm>
-            <a:off x="457200" y="4370832"/>
-            <a:ext cx="32004000" cy="54864"/>
+            <a:off x="376700" y="9135434"/>
+            <a:ext cx="128016" cy="2555875"/>
           </a:xfrm>
           <a:prstGeom prst="rect">
             <a:avLst/>
@@ -5262,23 +6577,124 @@
       </p:sp>
       <p:sp>
         <p:nvSpPr>
-          <p:cNvPr id="111" name="Rectangle 110"/>
+          <p:cNvPr id="134" name="TextBox 133"/>
+          <p:cNvSpPr txBox="1"/>
+          <p:nvPr/>
+        </p:nvSpPr>
+        <p:spPr>
+          <a:xfrm>
+            <a:off x="614444" y="9208586"/>
+            <a:ext cx="9871298" cy="2409571"/>
+          </a:xfrm>
+          <a:prstGeom prst="rect">
+            <a:avLst/>
+          </a:prstGeom>
+          <a:noFill/>
+        </p:spPr>
+        <p:txBody>
+          <a:bodyPr wrap="square" anchor="t" tIns="36576" bIns="36576">
+            <a:spAutoFit/>
+          </a:bodyPr>
+          <a:lstStyle/>
+          <a:p>
+            <a:pPr algn="l">
+              <a:lnSpc>
+                <a:spcPct val="95000"/>
+              </a:lnSpc>
+              <a:spcAft>
+                <a:spcPts val="800"/>
+              </a:spcAft>
+            </a:pPr>
+            <a:r>
+              <a:rPr sz="2100" b="0">
+                <a:solidFill>
+                  <a:srgbClr val="000000"/>
+                </a:solidFill>
+                <a:latin typeface="Arial"/>
+              </a:rPr>
+              <a:t>Bounds on these results</a:t>
+            </a:r>
+          </a:p>
+          <a:p>
+            <a:pPr algn="l">
+              <a:lnSpc>
+                <a:spcPct val="95000"/>
+              </a:lnSpc>
+              <a:spcAft>
+                <a:spcPts val="800"/>
+              </a:spcAft>
+            </a:pPr>
+            <a:r>
+              <a:rPr sz="2100" b="0">
+                <a:solidFill>
+                  <a:srgbClr val="000000"/>
+                </a:solidFill>
+                <a:latin typeface="Arial"/>
+              </a:rPr>
+              <a:t>•  Hail and wind rates track observer density (+0.39, +0.34 within state) and are excluded from every result shown.</a:t>
+            </a:r>
+          </a:p>
+          <a:p>
+            <a:pPr algn="l">
+              <a:lnSpc>
+                <a:spcPct val="95000"/>
+              </a:lnSpc>
+              <a:spcAft>
+                <a:spcPts val="800"/>
+              </a:spcAft>
+            </a:pPr>
+            <a:r>
+              <a:rPr sz="2100" b="0">
+                <a:solidFill>
+                  <a:srgbClr val="000000"/>
+                </a:solidFill>
+                <a:latin typeface="Arial"/>
+              </a:rPr>
+              <a:t>•  Power capacity is unrecorded for all 2,696, so every statistic is a facility count, not a capacity share.</a:t>
+            </a:r>
+          </a:p>
+          <a:p>
+            <a:pPr algn="l">
+              <a:lnSpc>
+                <a:spcPct val="95000"/>
+              </a:lnSpc>
+              <a:spcAft>
+                <a:spcPts val="800"/>
+              </a:spcAft>
+            </a:pPr>
+            <a:r>
+              <a:rPr sz="2100" b="0">
+                <a:solidFill>
+                  <a:srgbClr val="000000"/>
+                </a:solidFill>
+                <a:latin typeface="Arial"/>
+              </a:rPr>
+              <a:t>•  234 coordinates match a building only beyond 200 m. Under 500-draw positional error, 2,067 facilities never change class.</a:t>
+            </a:r>
+          </a:p>
+        </p:txBody>
+      </p:sp>
+      <p:sp>
+        <p:nvSpPr>
+          <p:cNvPr id="135" name="Rectangle 134"/>
           <p:cNvSpPr/>
           <p:nvPr/>
         </p:nvSpPr>
         <p:spPr>
           <a:xfrm>
-            <a:off x="457200" y="4526280"/>
-            <a:ext cx="10332720" cy="868680"/>
+            <a:off x="422419" y="17561098"/>
+            <a:ext cx="10191338" cy="676656"/>
           </a:xfrm>
           <a:prstGeom prst="rect">
             <a:avLst/>
           </a:prstGeom>
           <a:solidFill>
-            <a:srgbClr val="006600"/>
+            <a:srgbClr val="EFEFEF"/>
           </a:solidFill>
-          <a:ln>
-            <a:noFill/>
+          <a:ln w="12700">
+            <a:solidFill>
+              <a:srgbClr val="A5A5A5"/>
+            </a:solidFill>
           </a:ln>
           <a:effectLst/>
         </p:spPr>
@@ -5306,14 +6722,14 @@
       </p:sp>
       <p:sp>
         <p:nvSpPr>
-          <p:cNvPr id="112" name="TextBox 111"/>
+          <p:cNvPr id="136" name="TextBox 135"/>
           <p:cNvSpPr txBox="1"/>
           <p:nvPr/>
         </p:nvSpPr>
         <p:spPr>
           <a:xfrm>
-            <a:off x="640080" y="4581144"/>
-            <a:ext cx="10058400" cy="777240"/>
+            <a:off x="559580" y="17597674"/>
+            <a:ext cx="2926080" cy="603504"/>
           </a:xfrm>
           <a:prstGeom prst="rect">
             <a:avLst/>
@@ -5321,7 +6737,7 @@
           <a:noFill/>
         </p:spPr>
         <p:txBody>
-          <a:bodyPr wrap="square" anchor="ctr">
+          <a:bodyPr wrap="square" anchor="ctr" tIns="36576" bIns="36576">
             <a:spAutoFit/>
           </a:bodyPr>
           <a:lstStyle/>
@@ -5331,31 +6747,31 @@
                 <a:spcPct val="95000"/>
               </a:lnSpc>
               <a:spcAft>
-                <a:spcPts val="1000"/>
+                <a:spcPts val="800"/>
               </a:spcAft>
             </a:pPr>
             <a:r>
-              <a:rPr sz="4400" b="1">
-                <a:solidFill>
-                  <a:srgbClr val="FFFFFF"/>
+              <a:rPr sz="2400" b="1">
+                <a:solidFill>
+                  <a:srgbClr val="000000"/>
                 </a:solidFill>
                 <a:latin typeface="Arial"/>
               </a:rPr>
-              <a:t>Background</a:t>
-            </a:r>
-          </a:p>
-        </p:txBody>
-      </p:sp>
-      <p:sp>
-        <p:nvSpPr>
-          <p:cNvPr id="113" name="TextBox 112"/>
+              <a:t>Earthquake</a:t>
+            </a:r>
+          </a:p>
+        </p:txBody>
+      </p:sp>
+      <p:sp>
+        <p:nvSpPr>
+          <p:cNvPr id="137" name="TextBox 136"/>
           <p:cNvSpPr txBox="1"/>
           <p:nvPr/>
         </p:nvSpPr>
         <p:spPr>
           <a:xfrm>
-            <a:off x="457200" y="5486400"/>
-            <a:ext cx="10332720" cy="5474207"/>
+            <a:off x="3531380" y="17597674"/>
+            <a:ext cx="6899497" cy="603504"/>
           </a:xfrm>
           <a:prstGeom prst="rect">
             <a:avLst/>
@@ -5363,7 +6779,7 @@
           <a:noFill/>
         </p:spPr>
         <p:txBody>
-          <a:bodyPr wrap="square" anchor="t">
+          <a:bodyPr wrap="square" anchor="ctr" tIns="36576" bIns="36576">
             <a:spAutoFit/>
           </a:bodyPr>
           <a:lstStyle/>
@@ -5373,116 +6789,42 @@
                 <a:spcPct val="95000"/>
               </a:lnSpc>
               <a:spcAft>
-                <a:spcPts val="1000"/>
+                <a:spcPts val="800"/>
               </a:spcAft>
             </a:pPr>
             <a:r>
-              <a:rPr sz="2800" b="0">
-                <a:solidFill>
-                  <a:srgbClr val="000000"/>
+              <a:rPr sz="2200" b="0">
+                <a:solidFill>
+                  <a:srgbClr val="333333"/>
                 </a:solidFill>
                 <a:latin typeface="Arial"/>
               </a:rPr>
-              <a:t>Artificial intelligence and cloud computing have concentrated enormous computing capacity into a small number of US locations. Those buildings face earthquakes, wildfire, and flooding, but no open dataset records where they physically stand.</a:t>
-            </a:r>
-          </a:p>
-          <a:p>
-            <a:pPr algn="l">
-              <a:lnSpc>
-                <a:spcPct val="95000"/>
-              </a:lnSpc>
-              <a:spcAft>
-                <a:spcPts val="1000"/>
-              </a:spcAft>
-            </a:pPr>
-            <a:r>
-              <a:rPr sz="2800" b="0">
-                <a:solidFill>
-                  <a:srgbClr val="000000"/>
-                </a:solidFill>
-                <a:latin typeface="Arial"/>
-              </a:rPr>
-              <a:t/>
-            </a:r>
-          </a:p>
-          <a:p>
-            <a:pPr algn="l">
-              <a:lnSpc>
-                <a:spcPct val="95000"/>
-              </a:lnSpc>
-              <a:spcAft>
-                <a:spcPts val="1000"/>
-              </a:spcAft>
-            </a:pPr>
-            <a:r>
-              <a:rPr sz="2800" b="0">
-                <a:solidFill>
-                  <a:srgbClr val="000000"/>
-                </a:solidFill>
-                <a:latin typeface="Arial"/>
-              </a:rPr>
-              <a:t>Existing sources are proprietary, aggregated above the building level, or unverified. Without building-level locations, no one can measure what US computing infrastructure is exposed to.</a:t>
-            </a:r>
-          </a:p>
-          <a:p>
-            <a:pPr algn="l">
-              <a:lnSpc>
-                <a:spcPct val="95000"/>
-              </a:lnSpc>
-              <a:spcAft>
-                <a:spcPts val="1000"/>
-              </a:spcAft>
-            </a:pPr>
-            <a:r>
-              <a:rPr sz="2800" b="0">
-                <a:solidFill>
-                  <a:srgbClr val="000000"/>
-                </a:solidFill>
-                <a:latin typeface="Arial"/>
-              </a:rPr>
-              <a:t/>
-            </a:r>
-          </a:p>
-          <a:p>
-            <a:pPr algn="l">
-              <a:lnSpc>
-                <a:spcPct val="95000"/>
-              </a:lnSpc>
-              <a:spcAft>
-                <a:spcPts val="1000"/>
-              </a:spcAft>
-            </a:pPr>
-            <a:r>
-              <a:rPr sz="2800" b="0">
-                <a:solidFill>
-                  <a:srgbClr val="000000"/>
-                </a:solidFill>
-                <a:latin typeface="Arial"/>
-              </a:rPr>
-              <a:t>These are EXPOSURE values, not risk. No vulnerability term is applied, so nothing here is a damage or loss estimate.</a:t>
-            </a:r>
-          </a:p>
-        </p:txBody>
-      </p:sp>
-      <p:sp>
-        <p:nvSpPr>
-          <p:cNvPr id="114" name="Rectangle 113"/>
+              <a:t>USGS ASCE 7-22 point service</a:t>
+            </a:r>
+          </a:p>
+        </p:txBody>
+      </p:sp>
+      <p:sp>
+        <p:nvSpPr>
+          <p:cNvPr id="138" name="Rectangle 137"/>
           <p:cNvSpPr/>
           <p:nvPr/>
         </p:nvSpPr>
         <p:spPr>
           <a:xfrm>
-            <a:off x="457200" y="11750040"/>
-            <a:ext cx="10332720" cy="868680"/>
+            <a:off x="422419" y="18329194"/>
+            <a:ext cx="10191338" cy="676656"/>
           </a:xfrm>
           <a:prstGeom prst="rect">
             <a:avLst/>
           </a:prstGeom>
           <a:solidFill>
-            <a:srgbClr val="006600"/>
+            <a:srgbClr val="EFEFEF"/>
           </a:solidFill>
-          <a:ln>
-            <a:noFill/>
+          <a:ln w="12700">
+            <a:solidFill>
+              <a:srgbClr val="A5A5A5"/>
+            </a:solidFill>
           </a:ln>
           <a:effectLst/>
         </p:spPr>
@@ -5510,14 +6852,14 @@
       </p:sp>
       <p:sp>
         <p:nvSpPr>
-          <p:cNvPr id="115" name="TextBox 114"/>
+          <p:cNvPr id="139" name="TextBox 138"/>
           <p:cNvSpPr txBox="1"/>
           <p:nvPr/>
         </p:nvSpPr>
         <p:spPr>
           <a:xfrm>
-            <a:off x="640080" y="11804904"/>
-            <a:ext cx="10058400" cy="777240"/>
+            <a:off x="559580" y="18365770"/>
+            <a:ext cx="2926080" cy="603504"/>
           </a:xfrm>
           <a:prstGeom prst="rect">
             <a:avLst/>
@@ -5525,7 +6867,7 @@
           <a:noFill/>
         </p:spPr>
         <p:txBody>
-          <a:bodyPr wrap="square" anchor="ctr">
+          <a:bodyPr wrap="square" anchor="ctr" tIns="36576" bIns="36576">
             <a:spAutoFit/>
           </a:bodyPr>
           <a:lstStyle/>
@@ -5535,31 +6877,31 @@
                 <a:spcPct val="95000"/>
               </a:lnSpc>
               <a:spcAft>
-                <a:spcPts val="1000"/>
+                <a:spcPts val="800"/>
               </a:spcAft>
             </a:pPr>
             <a:r>
-              <a:rPr sz="4400" b="1">
-                <a:solidFill>
-                  <a:srgbClr val="FFFFFF"/>
+              <a:rPr sz="2400" b="1">
+                <a:solidFill>
+                  <a:srgbClr val="000000"/>
                 </a:solidFill>
                 <a:latin typeface="Arial"/>
               </a:rPr>
-              <a:t>Materials and Methods</a:t>
-            </a:r>
-          </a:p>
-        </p:txBody>
-      </p:sp>
-      <p:sp>
-        <p:nvSpPr>
-          <p:cNvPr id="116" name="TextBox 115"/>
+              <a:t>Wildfire</a:t>
+            </a:r>
+          </a:p>
+        </p:txBody>
+      </p:sp>
+      <p:sp>
+        <p:nvSpPr>
+          <p:cNvPr id="140" name="TextBox 139"/>
           <p:cNvSpPr txBox="1"/>
           <p:nvPr/>
         </p:nvSpPr>
         <p:spPr>
           <a:xfrm>
-            <a:off x="457200" y="12710159"/>
-            <a:ext cx="10332720" cy="2855468"/>
+            <a:off x="3531380" y="18365770"/>
+            <a:ext cx="6899497" cy="603504"/>
           </a:xfrm>
           <a:prstGeom prst="rect">
             <a:avLst/>
@@ -5567,7 +6909,7 @@
           <a:noFill/>
         </p:spPr>
         <p:txBody>
-          <a:bodyPr wrap="square" anchor="t">
+          <a:bodyPr wrap="square" anchor="ctr" tIns="36576" bIns="36576">
             <a:spAutoFit/>
           </a:bodyPr>
           <a:lstStyle/>
@@ -5577,75 +6919,37 @@
                 <a:spcPct val="95000"/>
               </a:lnSpc>
               <a:spcAft>
-                <a:spcPts val="1000"/>
+                <a:spcPts val="800"/>
               </a:spcAft>
             </a:pPr>
             <a:r>
-              <a:rPr sz="2800" b="0">
-                <a:solidFill>
-                  <a:srgbClr val="000000"/>
+              <a:rPr sz="2200" b="0">
+                <a:solidFill>
+                  <a:srgbClr val="333333"/>
                 </a:solidFill>
                 <a:latin typeface="Arial"/>
               </a:rPr>
-              <a:t>A reproducible Python pipeline merges OpenStreetMap, PeeringDB, and Wikidata, removes duplicate records, and grades every coordinate against an independent building-footprint dataset.</a:t>
-            </a:r>
-          </a:p>
-          <a:p>
-            <a:pPr algn="l">
-              <a:lnSpc>
-                <a:spcPct val="95000"/>
-              </a:lnSpc>
-              <a:spcAft>
-                <a:spcPts val="1000"/>
-              </a:spcAft>
-            </a:pPr>
-            <a:r>
-              <a:rPr sz="2800" b="0">
-                <a:solidFill>
-                  <a:srgbClr val="000000"/>
-                </a:solidFill>
-                <a:latin typeface="Arial"/>
-              </a:rPr>
-              <a:t/>
-            </a:r>
-          </a:p>
-          <a:p>
-            <a:pPr algn="l">
-              <a:lnSpc>
-                <a:spcPct val="95000"/>
-              </a:lnSpc>
-              <a:spcAft>
-                <a:spcPts val="1000"/>
-              </a:spcAft>
-            </a:pPr>
-            <a:r>
-              <a:rPr sz="2800" b="0">
-                <a:solidFill>
-                  <a:srgbClr val="000000"/>
-                </a:solidFill>
-                <a:latin typeface="Arial"/>
-              </a:rPr>
-              <a:t>Hazards are then read at each facility from official sources:</a:t>
-            </a:r>
-          </a:p>
-        </p:txBody>
-      </p:sp>
-      <p:sp>
-        <p:nvSpPr>
-          <p:cNvPr id="117" name="Rectangle 116"/>
+              <a:t>USFS Hazard Potential, 270 m</a:t>
+            </a:r>
+          </a:p>
+        </p:txBody>
+      </p:sp>
+      <p:sp>
+        <p:nvSpPr>
+          <p:cNvPr id="141" name="Rectangle 140"/>
           <p:cNvSpPr/>
           <p:nvPr/>
         </p:nvSpPr>
         <p:spPr>
           <a:xfrm>
-            <a:off x="548640" y="15565627"/>
-            <a:ext cx="10149840" cy="713232"/>
+            <a:off x="422419" y="19097290"/>
+            <a:ext cx="10191338" cy="676656"/>
           </a:xfrm>
           <a:prstGeom prst="rect">
             <a:avLst/>
           </a:prstGeom>
           <a:solidFill>
-            <a:srgbClr val="E5E5E5"/>
+            <a:srgbClr val="EFEFEF"/>
           </a:solidFill>
           <a:ln w="12700">
             <a:solidFill>
@@ -5678,14 +6982,14 @@
       </p:sp>
       <p:sp>
         <p:nvSpPr>
-          <p:cNvPr id="118" name="TextBox 117"/>
+          <p:cNvPr id="142" name="TextBox 141"/>
           <p:cNvSpPr txBox="1"/>
           <p:nvPr/>
         </p:nvSpPr>
         <p:spPr>
           <a:xfrm>
-            <a:off x="685800" y="15620491"/>
-            <a:ext cx="3017520" cy="603504"/>
+            <a:off x="559580" y="19133866"/>
+            <a:ext cx="2926080" cy="603504"/>
           </a:xfrm>
           <a:prstGeom prst="rect">
             <a:avLst/>
@@ -5693,7 +6997,7 @@
           <a:noFill/>
         </p:spPr>
         <p:txBody>
-          <a:bodyPr wrap="square" anchor="ctr">
+          <a:bodyPr wrap="square" anchor="ctr" tIns="36576" bIns="36576">
             <a:spAutoFit/>
           </a:bodyPr>
           <a:lstStyle/>
@@ -5703,31 +7007,31 @@
                 <a:spcPct val="95000"/>
               </a:lnSpc>
               <a:spcAft>
-                <a:spcPts val="1000"/>
+                <a:spcPts val="800"/>
               </a:spcAft>
             </a:pPr>
             <a:r>
-              <a:rPr sz="2600" b="1">
+              <a:rPr sz="2400" b="1">
                 <a:solidFill>
                   <a:srgbClr val="000000"/>
                 </a:solidFill>
                 <a:latin typeface="Arial"/>
               </a:rPr>
-              <a:t>Earthquake</a:t>
-            </a:r>
-          </a:p>
-        </p:txBody>
-      </p:sp>
-      <p:sp>
-        <p:nvSpPr>
-          <p:cNvPr id="119" name="TextBox 118"/>
+              <a:t>Flood</a:t>
+            </a:r>
+          </a:p>
+        </p:txBody>
+      </p:sp>
+      <p:sp>
+        <p:nvSpPr>
+          <p:cNvPr id="143" name="TextBox 142"/>
           <p:cNvSpPr txBox="1"/>
           <p:nvPr/>
         </p:nvSpPr>
         <p:spPr>
           <a:xfrm>
-            <a:off x="3703320" y="15620491"/>
-            <a:ext cx="6812280" cy="603504"/>
+            <a:off x="3531380" y="19133866"/>
+            <a:ext cx="6899497" cy="603504"/>
           </a:xfrm>
           <a:prstGeom prst="rect">
             <a:avLst/>
@@ -5735,7 +7039,7 @@
           <a:noFill/>
         </p:spPr>
         <p:txBody>
-          <a:bodyPr wrap="square" anchor="ctr">
+          <a:bodyPr wrap="square" anchor="ctr" tIns="36576" bIns="36576">
             <a:spAutoFit/>
           </a:bodyPr>
           <a:lstStyle/>
@@ -5745,37 +7049,37 @@
                 <a:spcPct val="95000"/>
               </a:lnSpc>
               <a:spcAft>
-                <a:spcPts val="1000"/>
+                <a:spcPts val="800"/>
               </a:spcAft>
             </a:pPr>
             <a:r>
-              <a:rPr sz="2400" b="0">
+              <a:rPr sz="2200" b="0">
                 <a:solidFill>
                   <a:srgbClr val="333333"/>
                 </a:solidFill>
                 <a:latin typeface="Arial"/>
               </a:rPr>
-              <a:t>USGS ASCE 7-22 point service</a:t>
-            </a:r>
-          </a:p>
-        </p:txBody>
-      </p:sp>
-      <p:sp>
-        <p:nvSpPr>
-          <p:cNvPr id="120" name="Rectangle 119"/>
+              <a:t>FEMA National Flood Hazard Layer</a:t>
+            </a:r>
+          </a:p>
+        </p:txBody>
+      </p:sp>
+      <p:sp>
+        <p:nvSpPr>
+          <p:cNvPr id="144" name="Rectangle 143"/>
           <p:cNvSpPr/>
           <p:nvPr/>
         </p:nvSpPr>
         <p:spPr>
           <a:xfrm>
-            <a:off x="548640" y="16388587"/>
-            <a:ext cx="10149840" cy="713232"/>
+            <a:off x="422419" y="19865386"/>
+            <a:ext cx="10191338" cy="676656"/>
           </a:xfrm>
           <a:prstGeom prst="rect">
             <a:avLst/>
           </a:prstGeom>
           <a:solidFill>
-            <a:srgbClr val="E5E5E5"/>
+            <a:srgbClr val="EFEFEF"/>
           </a:solidFill>
           <a:ln w="12700">
             <a:solidFill>
@@ -5808,14 +7112,14 @@
       </p:sp>
       <p:sp>
         <p:nvSpPr>
-          <p:cNvPr id="121" name="TextBox 120"/>
+          <p:cNvPr id="145" name="TextBox 144"/>
           <p:cNvSpPr txBox="1"/>
           <p:nvPr/>
         </p:nvSpPr>
         <p:spPr>
           <a:xfrm>
-            <a:off x="685800" y="16443451"/>
-            <a:ext cx="3017520" cy="603504"/>
+            <a:off x="559580" y="19901962"/>
+            <a:ext cx="2926080" cy="603504"/>
           </a:xfrm>
           <a:prstGeom prst="rect">
             <a:avLst/>
@@ -5823,7 +7127,7 @@
           <a:noFill/>
         </p:spPr>
         <p:txBody>
-          <a:bodyPr wrap="square" anchor="ctr">
+          <a:bodyPr wrap="square" anchor="ctr" tIns="36576" bIns="36576">
             <a:spAutoFit/>
           </a:bodyPr>
           <a:lstStyle/>
@@ -5833,31 +7137,31 @@
                 <a:spcPct val="95000"/>
               </a:lnSpc>
               <a:spcAft>
-                <a:spcPts val="1000"/>
+                <a:spcPts val="800"/>
               </a:spcAft>
             </a:pPr>
             <a:r>
-              <a:rPr sz="2600" b="1">
+              <a:rPr sz="2400" b="1">
                 <a:solidFill>
                   <a:srgbClr val="000000"/>
                 </a:solidFill>
                 <a:latin typeface="Arial"/>
               </a:rPr>
-              <a:t>Wildfire</a:t>
-            </a:r>
-          </a:p>
-        </p:txBody>
-      </p:sp>
-      <p:sp>
-        <p:nvSpPr>
-          <p:cNvPr id="122" name="TextBox 121"/>
+              <a:t>Water stress</a:t>
+            </a:r>
+          </a:p>
+        </p:txBody>
+      </p:sp>
+      <p:sp>
+        <p:nvSpPr>
+          <p:cNvPr id="146" name="TextBox 145"/>
           <p:cNvSpPr txBox="1"/>
           <p:nvPr/>
         </p:nvSpPr>
         <p:spPr>
           <a:xfrm>
-            <a:off x="3703320" y="16443451"/>
-            <a:ext cx="6812280" cy="603504"/>
+            <a:off x="3531380" y="19901962"/>
+            <a:ext cx="6899497" cy="603504"/>
           </a:xfrm>
           <a:prstGeom prst="rect">
             <a:avLst/>
@@ -5865,7 +7169,7 @@
           <a:noFill/>
         </p:spPr>
         <p:txBody>
-          <a:bodyPr wrap="square" anchor="ctr">
+          <a:bodyPr wrap="square" anchor="ctr" tIns="36576" bIns="36576">
             <a:spAutoFit/>
           </a:bodyPr>
           <a:lstStyle/>
@@ -5875,37 +7179,627 @@
                 <a:spcPct val="95000"/>
               </a:lnSpc>
               <a:spcAft>
-                <a:spcPts val="1000"/>
+                <a:spcPts val="800"/>
               </a:spcAft>
             </a:pPr>
             <a:r>
-              <a:rPr sz="2400" b="0">
+              <a:rPr sz="2200" b="0">
                 <a:solidFill>
                   <a:srgbClr val="333333"/>
                 </a:solidFill>
                 <a:latin typeface="Arial"/>
               </a:rPr>
-              <a:t>USFS Hazard Potential, 270 m</a:t>
-            </a:r>
-          </a:p>
-        </p:txBody>
-      </p:sp>
-      <p:sp>
-        <p:nvSpPr>
-          <p:cNvPr id="123" name="Rectangle 122"/>
+              <a:t>WRI Aqueduct 4.0</a:t>
+            </a:r>
+          </a:p>
+        </p:txBody>
+      </p:sp>
+      <p:sp>
+        <p:nvSpPr>
+          <p:cNvPr id="147" name="TextBox 146"/>
+          <p:cNvSpPr txBox="1"/>
+          <p:nvPr/>
+        </p:nvSpPr>
+        <p:spPr>
+          <a:xfrm>
+            <a:off x="376700" y="20724922"/>
+            <a:ext cx="10282778" cy="1823466"/>
+          </a:xfrm>
+          <a:prstGeom prst="rect">
+            <a:avLst/>
+          </a:prstGeom>
+          <a:noFill/>
+        </p:spPr>
+        <p:txBody>
+          <a:bodyPr wrap="square" anchor="t" tIns="36576" bIns="36576">
+            <a:spAutoFit/>
+          </a:bodyPr>
+          <a:lstStyle/>
+          <a:p>
+            <a:pPr algn="l">
+              <a:lnSpc>
+                <a:spcPct val="95000"/>
+              </a:lnSpc>
+              <a:spcAft>
+                <a:spcPts val="800"/>
+              </a:spcAft>
+            </a:pPr>
+            <a:r>
+              <a:rPr sz="2600" b="0">
+                <a:solidFill>
+                  <a:srgbClr val="000000"/>
+                </a:solidFill>
+                <a:latin typeface="Arial"/>
+              </a:rPr>
+              <a:t>Missing data is recorded as unknown, never as zero. A facility counts as exposed if it is within 2.4 km of land rated High or Very High for wildfire, inside a FEMA regulatory floodplain, or at peak ground acceleration of 0.30 g or more.</a:t>
+            </a:r>
+          </a:p>
+        </p:txBody>
+      </p:sp>
+      <p:sp>
+        <p:nvSpPr>
+          <p:cNvPr id="148" name="TextBox 147"/>
+          <p:cNvSpPr txBox="1"/>
+          <p:nvPr/>
+        </p:nvSpPr>
+        <p:spPr>
+          <a:xfrm>
+            <a:off x="11011693" y="5251774"/>
+            <a:ext cx="2626857" cy="749808"/>
+          </a:xfrm>
+          <a:prstGeom prst="rect">
+            <a:avLst/>
+          </a:prstGeom>
+          <a:noFill/>
+        </p:spPr>
+        <p:txBody>
+          <a:bodyPr wrap="square" anchor="t" tIns="36576" bIns="36576">
+            <a:spAutoFit/>
+          </a:bodyPr>
+          <a:lstStyle/>
+          <a:p>
+            <a:pPr algn="ctr">
+              <a:lnSpc>
+                <a:spcPct val="95000"/>
+              </a:lnSpc>
+              <a:spcAft>
+                <a:spcPts val="800"/>
+              </a:spcAft>
+            </a:pPr>
+            <a:r>
+              <a:rPr sz="4800" b="1">
+                <a:solidFill>
+                  <a:srgbClr val="006600"/>
+                </a:solidFill>
+                <a:latin typeface="Arial"/>
+              </a:rPr>
+              <a:t>2,696</a:t>
+            </a:r>
+          </a:p>
+        </p:txBody>
+      </p:sp>
+      <p:sp>
+        <p:nvSpPr>
+          <p:cNvPr id="149" name="TextBox 148"/>
+          <p:cNvSpPr txBox="1"/>
+          <p:nvPr/>
+        </p:nvSpPr>
+        <p:spPr>
+          <a:xfrm>
+            <a:off x="11011693" y="5965006"/>
+            <a:ext cx="2626857" cy="566928"/>
+          </a:xfrm>
+          <a:prstGeom prst="rect">
+            <a:avLst/>
+          </a:prstGeom>
+          <a:noFill/>
+        </p:spPr>
+        <p:txBody>
+          <a:bodyPr wrap="square" anchor="t" tIns="36576" bIns="36576">
+            <a:spAutoFit/>
+          </a:bodyPr>
+          <a:lstStyle/>
+          <a:p>
+            <a:pPr algn="ctr">
+              <a:lnSpc>
+                <a:spcPct val="95000"/>
+              </a:lnSpc>
+              <a:spcAft>
+                <a:spcPts val="800"/>
+              </a:spcAft>
+            </a:pPr>
+            <a:r>
+              <a:rPr sz="1900" b="0">
+                <a:solidFill>
+                  <a:srgbClr val="333333"/>
+                </a:solidFill>
+                <a:latin typeface="Arial"/>
+              </a:rPr>
+              <a:t>facilities mapped</a:t>
+            </a:r>
+          </a:p>
+        </p:txBody>
+      </p:sp>
+      <p:sp>
+        <p:nvSpPr>
+          <p:cNvPr id="150" name="TextBox 149"/>
+          <p:cNvSpPr txBox="1"/>
+          <p:nvPr/>
+        </p:nvSpPr>
+        <p:spPr>
+          <a:xfrm>
+            <a:off x="13711702" y="5251774"/>
+            <a:ext cx="2626857" cy="749808"/>
+          </a:xfrm>
+          <a:prstGeom prst="rect">
+            <a:avLst/>
+          </a:prstGeom>
+          <a:noFill/>
+        </p:spPr>
+        <p:txBody>
+          <a:bodyPr wrap="square" anchor="t" tIns="36576" bIns="36576">
+            <a:spAutoFit/>
+          </a:bodyPr>
+          <a:lstStyle/>
+          <a:p>
+            <a:pPr algn="ctr">
+              <a:lnSpc>
+                <a:spcPct val="95000"/>
+              </a:lnSpc>
+              <a:spcAft>
+                <a:spcPts val="800"/>
+              </a:spcAft>
+            </a:pPr>
+            <a:r>
+              <a:rPr sz="4800" b="1">
+                <a:solidFill>
+                  <a:srgbClr val="006600"/>
+                </a:solidFill>
+                <a:latin typeface="Arial"/>
+              </a:rPr>
+              <a:t>1,681</a:t>
+            </a:r>
+          </a:p>
+        </p:txBody>
+      </p:sp>
+      <p:sp>
+        <p:nvSpPr>
+          <p:cNvPr id="151" name="TextBox 150"/>
+          <p:cNvSpPr txBox="1"/>
+          <p:nvPr/>
+        </p:nvSpPr>
+        <p:spPr>
+          <a:xfrm>
+            <a:off x="13711702" y="5965006"/>
+            <a:ext cx="2626857" cy="566928"/>
+          </a:xfrm>
+          <a:prstGeom prst="rect">
+            <a:avLst/>
+          </a:prstGeom>
+          <a:noFill/>
+        </p:spPr>
+        <p:txBody>
+          <a:bodyPr wrap="square" anchor="t" tIns="36576" bIns="36576">
+            <a:spAutoFit/>
+          </a:bodyPr>
+          <a:lstStyle/>
+          <a:p>
+            <a:pPr algn="ctr">
+              <a:lnSpc>
+                <a:spcPct val="95000"/>
+              </a:lnSpc>
+              <a:spcAft>
+                <a:spcPts val="800"/>
+              </a:spcAft>
+            </a:pPr>
+            <a:r>
+              <a:rPr sz="1900" b="0">
+                <a:solidFill>
+                  <a:srgbClr val="333333"/>
+                </a:solidFill>
+                <a:latin typeface="Arial"/>
+              </a:rPr>
+              <a:t>on a building footprint</a:t>
+            </a:r>
+          </a:p>
+        </p:txBody>
+      </p:sp>
+      <p:sp>
+        <p:nvSpPr>
+          <p:cNvPr id="152" name="TextBox 151"/>
+          <p:cNvSpPr txBox="1"/>
+          <p:nvPr/>
+        </p:nvSpPr>
+        <p:spPr>
+          <a:xfrm>
+            <a:off x="16411711" y="5251774"/>
+            <a:ext cx="2626857" cy="749808"/>
+          </a:xfrm>
+          <a:prstGeom prst="rect">
+            <a:avLst/>
+          </a:prstGeom>
+          <a:noFill/>
+        </p:spPr>
+        <p:txBody>
+          <a:bodyPr wrap="square" anchor="t" tIns="36576" bIns="36576">
+            <a:spAutoFit/>
+          </a:bodyPr>
+          <a:lstStyle/>
+          <a:p>
+            <a:pPr algn="ctr">
+              <a:lnSpc>
+                <a:spcPct val="95000"/>
+              </a:lnSpc>
+              <a:spcAft>
+                <a:spcPts val="800"/>
+              </a:spcAft>
+            </a:pPr>
+            <a:r>
+              <a:rPr sz="4800" b="1">
+                <a:solidFill>
+                  <a:srgbClr val="006600"/>
+                </a:solidFill>
+                <a:latin typeface="Arial"/>
+              </a:rPr>
+              <a:t>35%</a:t>
+            </a:r>
+          </a:p>
+        </p:txBody>
+      </p:sp>
+      <p:sp>
+        <p:nvSpPr>
+          <p:cNvPr id="153" name="TextBox 152"/>
+          <p:cNvSpPr txBox="1"/>
+          <p:nvPr/>
+        </p:nvSpPr>
+        <p:spPr>
+          <a:xfrm>
+            <a:off x="16411711" y="5965006"/>
+            <a:ext cx="2626857" cy="566928"/>
+          </a:xfrm>
+          <a:prstGeom prst="rect">
+            <a:avLst/>
+          </a:prstGeom>
+          <a:noFill/>
+        </p:spPr>
+        <p:txBody>
+          <a:bodyPr wrap="square" anchor="t" tIns="36576" bIns="36576">
+            <a:spAutoFit/>
+          </a:bodyPr>
+          <a:lstStyle/>
+          <a:p>
+            <a:pPr algn="ctr">
+              <a:lnSpc>
+                <a:spcPct val="95000"/>
+              </a:lnSpc>
+              <a:spcAft>
+                <a:spcPts val="800"/>
+              </a:spcAft>
+            </a:pPr>
+            <a:r>
+              <a:rPr sz="1900" b="0">
+                <a:solidFill>
+                  <a:srgbClr val="333333"/>
+                </a:solidFill>
+                <a:latin typeface="Arial"/>
+              </a:rPr>
+              <a:t>face a mapped hazard</a:t>
+            </a:r>
+          </a:p>
+        </p:txBody>
+      </p:sp>
+      <p:sp>
+        <p:nvSpPr>
+          <p:cNvPr id="154" name="TextBox 153"/>
+          <p:cNvSpPr txBox="1"/>
+          <p:nvPr/>
+        </p:nvSpPr>
+        <p:spPr>
+          <a:xfrm>
+            <a:off x="19111720" y="5251774"/>
+            <a:ext cx="2626857" cy="749808"/>
+          </a:xfrm>
+          <a:prstGeom prst="rect">
+            <a:avLst/>
+          </a:prstGeom>
+          <a:noFill/>
+        </p:spPr>
+        <p:txBody>
+          <a:bodyPr wrap="square" anchor="t" tIns="36576" bIns="36576">
+            <a:spAutoFit/>
+          </a:bodyPr>
+          <a:lstStyle/>
+          <a:p>
+            <a:pPr algn="ctr">
+              <a:lnSpc>
+                <a:spcPct val="95000"/>
+              </a:lnSpc>
+              <a:spcAft>
+                <a:spcPts val="800"/>
+              </a:spcAft>
+            </a:pPr>
+            <a:r>
+              <a:rPr sz="4800" b="1">
+                <a:solidFill>
+                  <a:srgbClr val="006600"/>
+                </a:solidFill>
+                <a:latin typeface="Arial"/>
+              </a:rPr>
+              <a:t>0.7%</a:t>
+            </a:r>
+          </a:p>
+        </p:txBody>
+      </p:sp>
+      <p:sp>
+        <p:nvSpPr>
+          <p:cNvPr id="155" name="TextBox 154"/>
+          <p:cNvSpPr txBox="1"/>
+          <p:nvPr/>
+        </p:nvSpPr>
+        <p:spPr>
+          <a:xfrm>
+            <a:off x="19111720" y="5965006"/>
+            <a:ext cx="2626857" cy="566928"/>
+          </a:xfrm>
+          <a:prstGeom prst="rect">
+            <a:avLst/>
+          </a:prstGeom>
+          <a:noFill/>
+        </p:spPr>
+        <p:txBody>
+          <a:bodyPr wrap="square" anchor="t" tIns="36576" bIns="36576">
+            <a:spAutoFit/>
+          </a:bodyPr>
+          <a:lstStyle/>
+          <a:p>
+            <a:pPr algn="ctr">
+              <a:lnSpc>
+                <a:spcPct val="95000"/>
+              </a:lnSpc>
+              <a:spcAft>
+                <a:spcPts val="800"/>
+              </a:spcAft>
+            </a:pPr>
+            <a:r>
+              <a:rPr sz="1900" b="0">
+                <a:solidFill>
+                  <a:srgbClr val="333333"/>
+                </a:solidFill>
+                <a:latin typeface="Arial"/>
+              </a:rPr>
+              <a:t>of Virginia's 409</a:t>
+            </a:r>
+          </a:p>
+        </p:txBody>
+      </p:sp>
+      <p:pic>
+        <p:nvPicPr>
+          <p:cNvPr id="156" name="Picture 155" descr="fig1_map.png"/>
+          <p:cNvPicPr>
+            <a:picLocks noChangeAspect="1"/>
+          </p:cNvPicPr>
+          <p:nvPr/>
+        </p:nvPicPr>
+        <p:blipFill>
+          <a:blip r:embed="rId5"/>
+          <a:stretch>
+            <a:fillRect/>
+          </a:stretch>
+        </p:blipFill>
+        <p:spPr>
+          <a:xfrm>
+            <a:off x="10965973" y="8001197"/>
+            <a:ext cx="10781748" cy="4494943"/>
+          </a:xfrm>
+          <a:prstGeom prst="rect">
+            <a:avLst/>
+          </a:prstGeom>
+        </p:spPr>
+      </p:pic>
+      <p:sp>
+        <p:nvSpPr>
+          <p:cNvPr id="157" name="TextBox 156"/>
+          <p:cNvSpPr txBox="1"/>
+          <p:nvPr/>
+        </p:nvSpPr>
+        <p:spPr>
+          <a:xfrm>
+            <a:off x="10965973" y="12569292"/>
+            <a:ext cx="10781748" cy="785875"/>
+          </a:xfrm>
+          <a:prstGeom prst="rect">
+            <a:avLst/>
+          </a:prstGeom>
+          <a:noFill/>
+        </p:spPr>
+        <p:txBody>
+          <a:bodyPr wrap="square" anchor="t" tIns="36576" bIns="36576">
+            <a:spAutoFit/>
+          </a:bodyPr>
+          <a:lstStyle/>
+          <a:p>
+            <a:pPr algn="l">
+              <a:lnSpc>
+                <a:spcPct val="95000"/>
+              </a:lnSpc>
+              <a:spcAft>
+                <a:spcPts val="800"/>
+              </a:spcAft>
+            </a:pPr>
+            <a:r>
+              <a:rPr sz="2200" b="1">
+                <a:solidFill>
+                  <a:srgbClr val="000000"/>
+                </a:solidFill>
+                <a:latin typeface="Arial"/>
+              </a:rPr>
+              <a:t>Fig 1. Two thirds of US data centers face no mapped hazard. Exposure is regional, not universal.</a:t>
+            </a:r>
+          </a:p>
+        </p:txBody>
+      </p:sp>
+      <p:sp>
+        <p:nvSpPr>
+          <p:cNvPr id="158" name="TextBox 157"/>
+          <p:cNvSpPr txBox="1"/>
+          <p:nvPr/>
+        </p:nvSpPr>
+        <p:spPr>
+          <a:xfrm>
+            <a:off x="10965973" y="13446608"/>
+            <a:ext cx="10781748" cy="3018536"/>
+          </a:xfrm>
+          <a:prstGeom prst="rect">
+            <a:avLst/>
+          </a:prstGeom>
+          <a:noFill/>
+        </p:spPr>
+        <p:txBody>
+          <a:bodyPr wrap="square" anchor="t" tIns="36576" bIns="36576">
+            <a:spAutoFit/>
+          </a:bodyPr>
+          <a:lstStyle/>
+          <a:p>
+            <a:pPr algn="l">
+              <a:lnSpc>
+                <a:spcPct val="95000"/>
+              </a:lnSpc>
+              <a:spcAft>
+                <a:spcPts val="800"/>
+              </a:spcAft>
+            </a:pPr>
+            <a:r>
+              <a:rPr sz="2600" b="0">
+                <a:solidFill>
+                  <a:srgbClr val="000000"/>
+                </a:solidFill>
+                <a:latin typeface="Arial"/>
+              </a:rPr>
+              <a:t>Of 2,696 facilities, 1,742 face no mapped hazard and 205 face two or more. Eighteen states holding half the fleet sit below 10% exposed. Ten states holding a third sit above 60%.</a:t>
+            </a:r>
+          </a:p>
+          <a:p>
+            <a:pPr algn="l">
+              <a:lnSpc>
+                <a:spcPct val="95000"/>
+              </a:lnSpc>
+              <a:spcAft>
+                <a:spcPts val="800"/>
+              </a:spcAft>
+            </a:pPr>
+            <a:r>
+              <a:rPr sz="2600" b="0">
+                <a:solidFill>
+                  <a:srgbClr val="000000"/>
+                </a:solidFill>
+                <a:latin typeface="Arial"/>
+              </a:rPr>
+              <a:t>Virginia, the largest concentration on Earth, is 0.7% exposed. California and New Jersey are 100%.</a:t>
+            </a:r>
+          </a:p>
+          <a:p>
+            <a:pPr algn="l">
+              <a:lnSpc>
+                <a:spcPct val="95000"/>
+              </a:lnSpc>
+              <a:spcAft>
+                <a:spcPts val="800"/>
+              </a:spcAft>
+            </a:pPr>
+            <a:r>
+              <a:rPr sz="2600" b="0">
+                <a:solidFill>
+                  <a:srgbClr val="000000"/>
+                </a:solidFill>
+                <a:latin typeface="Arial"/>
+              </a:rPr>
+              <a:t>Water stress is the exception that reaches Virginia. 952 facilities nationally sit in high or extremely-high stress basins.</a:t>
+            </a:r>
+          </a:p>
+        </p:txBody>
+      </p:sp>
+      <p:pic>
+        <p:nvPicPr>
+          <p:cNvPr id="159" name="Picture 158" descr="fig2_states.png"/>
+          <p:cNvPicPr>
+            <a:picLocks noChangeAspect="1"/>
+          </p:cNvPicPr>
+          <p:nvPr/>
+        </p:nvPicPr>
+        <p:blipFill>
+          <a:blip r:embed="rId6"/>
+          <a:stretch>
+            <a:fillRect/>
+          </a:stretch>
+        </p:blipFill>
+        <p:spPr>
+          <a:xfrm>
+            <a:off x="10965973" y="16556584"/>
+            <a:ext cx="10781748" cy="5086649"/>
+          </a:xfrm>
+          <a:prstGeom prst="rect">
+            <a:avLst/>
+          </a:prstGeom>
+        </p:spPr>
+      </p:pic>
+      <p:sp>
+        <p:nvSpPr>
+          <p:cNvPr id="160" name="TextBox 159"/>
+          <p:cNvSpPr txBox="1"/>
+          <p:nvPr/>
+        </p:nvSpPr>
+        <p:spPr>
+          <a:xfrm>
+            <a:off x="10965973" y="21698096"/>
+            <a:ext cx="10781748" cy="520445"/>
+          </a:xfrm>
+          <a:prstGeom prst="rect">
+            <a:avLst/>
+          </a:prstGeom>
+          <a:noFill/>
+        </p:spPr>
+        <p:txBody>
+          <a:bodyPr wrap="square" anchor="t" tIns="36576" bIns="36576">
+            <a:spAutoFit/>
+          </a:bodyPr>
+          <a:lstStyle/>
+          <a:p>
+            <a:pPr algn="l">
+              <a:lnSpc>
+                <a:spcPct val="95000"/>
+              </a:lnSpc>
+              <a:spcAft>
+                <a:spcPts val="800"/>
+              </a:spcAft>
+            </a:pPr>
+            <a:r>
+              <a:rPr sz="2200" b="1">
+                <a:solidFill>
+                  <a:srgbClr val="000000"/>
+                </a:solidFill>
+                <a:latin typeface="Arial"/>
+              </a:rPr>
+              <a:t>Fig 2. States split into two groups, with almost nothing between them.</a:t>
+            </a:r>
+          </a:p>
+        </p:txBody>
+      </p:sp>
+      <p:sp>
+        <p:nvSpPr>
+          <p:cNvPr id="161" name="Rectangle 160"/>
           <p:cNvSpPr/>
           <p:nvPr/>
         </p:nvSpPr>
         <p:spPr>
           <a:xfrm>
-            <a:off x="548640" y="17211547"/>
-            <a:ext cx="10149840" cy="713232"/>
+            <a:off x="22090621" y="7825810"/>
+            <a:ext cx="10397100" cy="1795144"/>
           </a:xfrm>
           <a:prstGeom prst="rect">
             <a:avLst/>
           </a:prstGeom>
           <a:solidFill>
-            <a:srgbClr val="E5E5E5"/>
+            <a:srgbClr val="EFEFEF"/>
           </a:solidFill>
           <a:ln w="12700">
             <a:solidFill>
@@ -5938,109 +7832,23 @@
       </p:sp>
       <p:sp>
         <p:nvSpPr>
-          <p:cNvPr id="124" name="TextBox 123"/>
-          <p:cNvSpPr txBox="1"/>
-          <p:nvPr/>
-        </p:nvSpPr>
-        <p:spPr>
-          <a:xfrm>
-            <a:off x="685800" y="17266411"/>
-            <a:ext cx="3017520" cy="603504"/>
-          </a:xfrm>
-          <a:prstGeom prst="rect">
-            <a:avLst/>
-          </a:prstGeom>
-          <a:noFill/>
-        </p:spPr>
-        <p:txBody>
-          <a:bodyPr wrap="square" anchor="ctr">
-            <a:spAutoFit/>
-          </a:bodyPr>
-          <a:lstStyle/>
-          <a:p>
-            <a:pPr algn="l">
-              <a:lnSpc>
-                <a:spcPct val="95000"/>
-              </a:lnSpc>
-              <a:spcAft>
-                <a:spcPts val="1000"/>
-              </a:spcAft>
-            </a:pPr>
-            <a:r>
-              <a:rPr sz="2600" b="1">
-                <a:solidFill>
-                  <a:srgbClr val="000000"/>
-                </a:solidFill>
-                <a:latin typeface="Arial"/>
-              </a:rPr>
-              <a:t>Flood</a:t>
-            </a:r>
-          </a:p>
-        </p:txBody>
-      </p:sp>
-      <p:sp>
-        <p:nvSpPr>
-          <p:cNvPr id="125" name="TextBox 124"/>
-          <p:cNvSpPr txBox="1"/>
-          <p:nvPr/>
-        </p:nvSpPr>
-        <p:spPr>
-          <a:xfrm>
-            <a:off x="3703320" y="17266411"/>
-            <a:ext cx="6812280" cy="603504"/>
-          </a:xfrm>
-          <a:prstGeom prst="rect">
-            <a:avLst/>
-          </a:prstGeom>
-          <a:noFill/>
-        </p:spPr>
-        <p:txBody>
-          <a:bodyPr wrap="square" anchor="ctr">
-            <a:spAutoFit/>
-          </a:bodyPr>
-          <a:lstStyle/>
-          <a:p>
-            <a:pPr algn="l">
-              <a:lnSpc>
-                <a:spcPct val="95000"/>
-              </a:lnSpc>
-              <a:spcAft>
-                <a:spcPts val="1000"/>
-              </a:spcAft>
-            </a:pPr>
-            <a:r>
-              <a:rPr sz="2400" b="0">
-                <a:solidFill>
-                  <a:srgbClr val="333333"/>
-                </a:solidFill>
-                <a:latin typeface="Arial"/>
-              </a:rPr>
-              <a:t>FEMA National Flood Hazard Layer</a:t>
-            </a:r>
-          </a:p>
-        </p:txBody>
-      </p:sp>
-      <p:sp>
-        <p:nvSpPr>
-          <p:cNvPr id="126" name="Rectangle 125"/>
+          <p:cNvPr id="162" name="Rectangle 161"/>
           <p:cNvSpPr/>
           <p:nvPr/>
         </p:nvSpPr>
         <p:spPr>
           <a:xfrm>
-            <a:off x="548640" y="18034507"/>
-            <a:ext cx="10149840" cy="713232"/>
+            <a:off x="22090621" y="7825810"/>
+            <a:ext cx="128016" cy="1795144"/>
           </a:xfrm>
           <a:prstGeom prst="rect">
             <a:avLst/>
           </a:prstGeom>
           <a:solidFill>
-            <a:srgbClr val="E5E5E5"/>
+            <a:srgbClr val="FFCC00"/>
           </a:solidFill>
-          <a:ln w="12700">
-            <a:solidFill>
-              <a:srgbClr val="A5A5A5"/>
-            </a:solidFill>
+          <a:ln>
+            <a:noFill/>
           </a:ln>
           <a:effectLst/>
         </p:spPr>
@@ -6068,14 +7876,14 @@
       </p:sp>
       <p:sp>
         <p:nvSpPr>
-          <p:cNvPr id="127" name="TextBox 126"/>
+          <p:cNvPr id="163" name="TextBox 162"/>
           <p:cNvSpPr txBox="1"/>
           <p:nvPr/>
         </p:nvSpPr>
         <p:spPr>
           <a:xfrm>
-            <a:off x="685800" y="18089371"/>
-            <a:ext cx="3017520" cy="603504"/>
+            <a:off x="22328365" y="7898962"/>
+            <a:ext cx="9985620" cy="1648841"/>
           </a:xfrm>
           <a:prstGeom prst="rect">
             <a:avLst/>
@@ -6083,7 +7891,7 @@
           <a:noFill/>
         </p:spPr>
         <p:txBody>
-          <a:bodyPr wrap="square" anchor="ctr">
+          <a:bodyPr wrap="square" anchor="t" tIns="36576" bIns="36576">
             <a:spAutoFit/>
           </a:bodyPr>
           <a:lstStyle/>
@@ -6093,1404 +7901,43 @@
                 <a:spcPct val="95000"/>
               </a:lnSpc>
               <a:spcAft>
-                <a:spcPts val="1000"/>
+                <a:spcPts val="800"/>
               </a:spcAft>
             </a:pPr>
             <a:r>
-              <a:rPr sz="2600" b="1">
+              <a:rPr sz="2100" b="0">
                 <a:solidFill>
                   <a:srgbClr val="000000"/>
                 </a:solidFill>
                 <a:latin typeface="Arial"/>
               </a:rPr>
-              <a:t>Water stress</a:t>
-            </a:r>
-          </a:p>
-        </p:txBody>
-      </p:sp>
-      <p:sp>
-        <p:nvSpPr>
-          <p:cNvPr id="128" name="TextBox 127"/>
-          <p:cNvSpPr txBox="1"/>
-          <p:nvPr/>
-        </p:nvSpPr>
-        <p:spPr>
-          <a:xfrm>
-            <a:off x="3703320" y="18089371"/>
-            <a:ext cx="6812280" cy="603504"/>
-          </a:xfrm>
-          <a:prstGeom prst="rect">
-            <a:avLst/>
-          </a:prstGeom>
-          <a:noFill/>
-        </p:spPr>
-        <p:txBody>
-          <a:bodyPr wrap="square" anchor="ctr">
-            <a:spAutoFit/>
-          </a:bodyPr>
-          <a:lstStyle/>
+              <a:t>Two things we expected and did not find</a:t>
+            </a:r>
+          </a:p>
           <a:p>
             <a:pPr algn="l">
               <a:lnSpc>
                 <a:spcPct val="95000"/>
               </a:lnSpc>
               <a:spcAft>
-                <a:spcPts val="1000"/>
+                <a:spcPts val="800"/>
               </a:spcAft>
             </a:pPr>
             <a:r>
-              <a:rPr sz="2400" b="0">
-                <a:solidFill>
-                  <a:srgbClr val="333333"/>
+              <a:rPr sz="2100" b="0">
+                <a:solidFill>
+                  <a:srgbClr val="000000"/>
                 </a:solidFill>
                 <a:latin typeface="Arial"/>
               </a:rPr>
-              <a:t>WRI Aqueduct 4.0</a:t>
-            </a:r>
-          </a:p>
-        </p:txBody>
-      </p:sp>
-      <p:sp>
-        <p:nvSpPr>
-          <p:cNvPr id="129" name="TextBox 128"/>
-          <p:cNvSpPr txBox="1"/>
-          <p:nvPr/>
-        </p:nvSpPr>
-        <p:spPr>
-          <a:xfrm>
-            <a:off x="457200" y="18948907"/>
-            <a:ext cx="10332720" cy="1925827"/>
-          </a:xfrm>
-          <a:prstGeom prst="rect">
-            <a:avLst/>
-          </a:prstGeom>
-          <a:noFill/>
-        </p:spPr>
-        <p:txBody>
-          <a:bodyPr wrap="square" anchor="t">
-            <a:spAutoFit/>
-          </a:bodyPr>
-          <a:lstStyle/>
-          <a:p>
-            <a:pPr algn="l">
-              <a:lnSpc>
-                <a:spcPct val="95000"/>
-              </a:lnSpc>
-              <a:spcAft>
-                <a:spcPts val="1000"/>
-              </a:spcAft>
-            </a:pPr>
-            <a:r>
-              <a:rPr sz="2800" b="0">
-                <a:solidFill>
-                  <a:srgbClr val="000000"/>
-                </a:solidFill>
-                <a:latin typeface="Arial"/>
-              </a:rPr>
-              <a:t>Missing data is always recorded as unknown, never as zero. A facility counts as exposed if it sits within 2.4 km of land rated High or Very High for wildfire potential, inside a FEMA regulatory floodplain, or at peak ground acceleration of 0.30 g or more.</a:t>
-            </a:r>
-          </a:p>
-        </p:txBody>
-      </p:sp>
-      <p:sp>
-        <p:nvSpPr>
-          <p:cNvPr id="130" name="Rectangle 129"/>
-          <p:cNvSpPr/>
-          <p:nvPr/>
-        </p:nvSpPr>
-        <p:spPr>
-          <a:xfrm>
-            <a:off x="457200" y="21103335"/>
-            <a:ext cx="10332720" cy="2434844"/>
-          </a:xfrm>
-          <a:prstGeom prst="rect">
-            <a:avLst/>
-          </a:prstGeom>
-          <a:solidFill>
-            <a:srgbClr val="E5E5E5"/>
-          </a:solidFill>
-          <a:ln w="12700">
-            <a:solidFill>
-              <a:srgbClr val="A5A5A5"/>
-            </a:solidFill>
-          </a:ln>
-          <a:effectLst/>
-        </p:spPr>
-        <p:style>
-          <a:lnRef idx="1">
-            <a:schemeClr val="accent1"/>
-          </a:lnRef>
-          <a:fillRef idx="3">
-            <a:schemeClr val="accent1"/>
-          </a:fillRef>
-          <a:effectRef idx="2">
-            <a:schemeClr val="accent1"/>
-          </a:effectRef>
-          <a:fontRef idx="minor">
-            <a:schemeClr val="lt1"/>
-          </a:fontRef>
-        </p:style>
-        <p:txBody>
-          <a:bodyPr rtlCol="0" anchor="ctr"/>
-          <a:lstStyle/>
-          <a:p>
-            <a:pPr algn="ctr"/>
-          </a:p>
-        </p:txBody>
-      </p:sp>
-      <p:sp>
-        <p:nvSpPr>
-          <p:cNvPr id="131" name="Rectangle 130"/>
-          <p:cNvSpPr/>
-          <p:nvPr/>
-        </p:nvSpPr>
-        <p:spPr>
-          <a:xfrm>
-            <a:off x="457200" y="21103335"/>
-            <a:ext cx="128016" cy="2434844"/>
-          </a:xfrm>
-          <a:prstGeom prst="rect">
-            <a:avLst/>
-          </a:prstGeom>
-          <a:solidFill>
-            <a:srgbClr val="FFCC00"/>
-          </a:solidFill>
-          <a:ln>
-            <a:noFill/>
-          </a:ln>
-          <a:effectLst/>
-        </p:spPr>
-        <p:style>
-          <a:lnRef idx="1">
-            <a:schemeClr val="accent1"/>
-          </a:lnRef>
-          <a:fillRef idx="3">
-            <a:schemeClr val="accent1"/>
-          </a:fillRef>
-          <a:effectRef idx="2">
-            <a:schemeClr val="accent1"/>
-          </a:effectRef>
-          <a:fontRef idx="minor">
-            <a:schemeClr val="lt1"/>
-          </a:fontRef>
-        </p:style>
-        <p:txBody>
-          <a:bodyPr rtlCol="0" anchor="ctr"/>
-          <a:lstStyle/>
-          <a:p>
-            <a:pPr algn="ctr"/>
-          </a:p>
-        </p:txBody>
-      </p:sp>
-      <p:sp>
-        <p:nvSpPr>
-          <p:cNvPr id="132" name="TextBox 131"/>
-          <p:cNvSpPr txBox="1"/>
-          <p:nvPr/>
-        </p:nvSpPr>
-        <p:spPr>
-          <a:xfrm>
-            <a:off x="685800" y="21158199"/>
-            <a:ext cx="9921240" cy="2306828"/>
-          </a:xfrm>
-          <a:prstGeom prst="rect">
-            <a:avLst/>
-          </a:prstGeom>
-          <a:noFill/>
-        </p:spPr>
-        <p:txBody>
-          <a:bodyPr wrap="square" anchor="t">
-            <a:spAutoFit/>
-          </a:bodyPr>
-          <a:lstStyle/>
-          <a:p>
-            <a:pPr algn="l">
-              <a:lnSpc>
-                <a:spcPct val="95000"/>
-              </a:lnSpc>
-              <a:spcAft>
-                <a:spcPts val="1000"/>
-              </a:spcAft>
-            </a:pPr>
-            <a:r>
-              <a:rPr sz="2000" b="0">
-                <a:solidFill>
-                  <a:srgbClr val="000000"/>
-                </a:solidFill>
-                <a:latin typeface="Arial"/>
-              </a:rPr>
-              <a:t>Bounds on these results</a:t>
-            </a:r>
-          </a:p>
-          <a:p>
-            <a:pPr algn="l">
-              <a:lnSpc>
-                <a:spcPct val="95000"/>
-              </a:lnSpc>
-              <a:spcAft>
-                <a:spcPts val="1000"/>
-              </a:spcAft>
-            </a:pPr>
-            <a:r>
-              <a:rPr sz="2000" b="0">
-                <a:solidFill>
-                  <a:srgbClr val="000000"/>
-                </a:solidFill>
-                <a:latin typeface="Arial"/>
-              </a:rPr>
-              <a:t>•  Hail and wind rates track observer density (+0.39, +0.34 within state) and are excluded from every result shown.</a:t>
-            </a:r>
-          </a:p>
-          <a:p>
-            <a:pPr algn="l">
-              <a:lnSpc>
-                <a:spcPct val="95000"/>
-              </a:lnSpc>
-              <a:spcAft>
-                <a:spcPts val="1000"/>
-              </a:spcAft>
-            </a:pPr>
-            <a:r>
-              <a:rPr sz="2000" b="0">
-                <a:solidFill>
-                  <a:srgbClr val="000000"/>
-                </a:solidFill>
-                <a:latin typeface="Arial"/>
-              </a:rPr>
-              <a:t>•  Power capacity is unrecorded for all 2,696, so every statistic is a facility count, not capacity.</a:t>
-            </a:r>
-          </a:p>
-          <a:p>
-            <a:pPr algn="l">
-              <a:lnSpc>
-                <a:spcPct val="95000"/>
-              </a:lnSpc>
-              <a:spcAft>
-                <a:spcPts val="1000"/>
-              </a:spcAft>
-            </a:pPr>
-            <a:r>
-              <a:rPr sz="2000" b="0">
-                <a:solidFill>
-                  <a:srgbClr val="000000"/>
-                </a:solidFill>
-                <a:latin typeface="Arial"/>
-              </a:rPr>
-              <a:t>•  234 coordinates match a building only beyond 200 m. Under 500-draw positional error, 2,067 facilities never change class.</a:t>
-            </a:r>
-          </a:p>
-        </p:txBody>
-      </p:sp>
-      <p:sp>
-        <p:nvSpPr>
-          <p:cNvPr id="133" name="Rectangle 132"/>
-          <p:cNvSpPr/>
-          <p:nvPr/>
-        </p:nvSpPr>
-        <p:spPr>
-          <a:xfrm>
-            <a:off x="11292840" y="4526280"/>
-            <a:ext cx="10332720" cy="868680"/>
-          </a:xfrm>
-          <a:prstGeom prst="rect">
-            <a:avLst/>
-          </a:prstGeom>
-          <a:solidFill>
-            <a:srgbClr val="006600"/>
-          </a:solidFill>
-          <a:ln>
-            <a:noFill/>
-          </a:ln>
-          <a:effectLst/>
-        </p:spPr>
-        <p:style>
-          <a:lnRef idx="1">
-            <a:schemeClr val="accent1"/>
-          </a:lnRef>
-          <a:fillRef idx="3">
-            <a:schemeClr val="accent1"/>
-          </a:fillRef>
-          <a:effectRef idx="2">
-            <a:schemeClr val="accent1"/>
-          </a:effectRef>
-          <a:fontRef idx="minor">
-            <a:schemeClr val="lt1"/>
-          </a:fontRef>
-        </p:style>
-        <p:txBody>
-          <a:bodyPr rtlCol="0" anchor="ctr"/>
-          <a:lstStyle/>
-          <a:p>
-            <a:pPr algn="ctr"/>
-          </a:p>
-        </p:txBody>
-      </p:sp>
-      <p:sp>
-        <p:nvSpPr>
-          <p:cNvPr id="134" name="TextBox 133"/>
-          <p:cNvSpPr txBox="1"/>
-          <p:nvPr/>
-        </p:nvSpPr>
-        <p:spPr>
-          <a:xfrm>
-            <a:off x="11475719" y="4581144"/>
-            <a:ext cx="10058400" cy="777240"/>
-          </a:xfrm>
-          <a:prstGeom prst="rect">
-            <a:avLst/>
-          </a:prstGeom>
-          <a:noFill/>
-        </p:spPr>
-        <p:txBody>
-          <a:bodyPr wrap="square" anchor="ctr">
-            <a:spAutoFit/>
-          </a:bodyPr>
-          <a:lstStyle/>
-          <a:p>
-            <a:pPr algn="l">
-              <a:lnSpc>
-                <a:spcPct val="95000"/>
-              </a:lnSpc>
-              <a:spcAft>
-                <a:spcPts val="1000"/>
-              </a:spcAft>
-            </a:pPr>
-            <a:r>
-              <a:rPr sz="4400" b="1">
-                <a:solidFill>
-                  <a:srgbClr val="FFFFFF"/>
-                </a:solidFill>
-                <a:latin typeface="Arial"/>
-              </a:rPr>
-              <a:t>Results</a:t>
-            </a:r>
-          </a:p>
-        </p:txBody>
-      </p:sp>
-      <p:sp>
-        <p:nvSpPr>
-          <p:cNvPr id="135" name="TextBox 134"/>
-          <p:cNvSpPr txBox="1"/>
-          <p:nvPr/>
-        </p:nvSpPr>
-        <p:spPr>
-          <a:xfrm>
-            <a:off x="11338560" y="5486400"/>
-            <a:ext cx="2514600" cy="777240"/>
-          </a:xfrm>
-          <a:prstGeom prst="rect">
-            <a:avLst/>
-          </a:prstGeom>
-          <a:noFill/>
-        </p:spPr>
-        <p:txBody>
-          <a:bodyPr wrap="square" anchor="t">
-            <a:spAutoFit/>
-          </a:bodyPr>
-          <a:lstStyle/>
-          <a:p>
-            <a:pPr algn="ctr">
-              <a:lnSpc>
-                <a:spcPct val="95000"/>
-              </a:lnSpc>
-              <a:spcAft>
-                <a:spcPts val="1000"/>
-              </a:spcAft>
-            </a:pPr>
-            <a:r>
-              <a:rPr sz="5400" b="1">
-                <a:solidFill>
-                  <a:srgbClr val="006600"/>
-                </a:solidFill>
-                <a:latin typeface="Arial"/>
-              </a:rPr>
-              <a:t>2,696</a:t>
-            </a:r>
-          </a:p>
-        </p:txBody>
-      </p:sp>
-      <p:sp>
-        <p:nvSpPr>
-          <p:cNvPr id="136" name="TextBox 135"/>
-          <p:cNvSpPr txBox="1"/>
-          <p:nvPr/>
-        </p:nvSpPr>
-        <p:spPr>
-          <a:xfrm>
-            <a:off x="11338560" y="6236208"/>
-            <a:ext cx="2514600" cy="685800"/>
-          </a:xfrm>
-          <a:prstGeom prst="rect">
-            <a:avLst/>
-          </a:prstGeom>
-          <a:noFill/>
-        </p:spPr>
-        <p:txBody>
-          <a:bodyPr wrap="square" anchor="t">
-            <a:spAutoFit/>
-          </a:bodyPr>
-          <a:lstStyle/>
-          <a:p>
-            <a:pPr algn="ctr">
-              <a:lnSpc>
-                <a:spcPct val="95000"/>
-              </a:lnSpc>
-              <a:spcAft>
-                <a:spcPts val="1000"/>
-              </a:spcAft>
-            </a:pPr>
-            <a:r>
-              <a:rPr sz="1900" b="0">
-                <a:solidFill>
-                  <a:srgbClr val="444444"/>
-                </a:solidFill>
-                <a:latin typeface="Arial"/>
-              </a:rPr>
-              <a:t>facilities mapped</a:t>
-            </a:r>
-          </a:p>
-        </p:txBody>
-      </p:sp>
-      <p:sp>
-        <p:nvSpPr>
-          <p:cNvPr id="137" name="TextBox 136"/>
-          <p:cNvSpPr txBox="1"/>
-          <p:nvPr/>
-        </p:nvSpPr>
-        <p:spPr>
-          <a:xfrm>
-            <a:off x="13898880" y="5486400"/>
-            <a:ext cx="2514600" cy="777240"/>
-          </a:xfrm>
-          <a:prstGeom prst="rect">
-            <a:avLst/>
-          </a:prstGeom>
-          <a:noFill/>
-        </p:spPr>
-        <p:txBody>
-          <a:bodyPr wrap="square" anchor="t">
-            <a:spAutoFit/>
-          </a:bodyPr>
-          <a:lstStyle/>
-          <a:p>
-            <a:pPr algn="ctr">
-              <a:lnSpc>
-                <a:spcPct val="95000"/>
-              </a:lnSpc>
-              <a:spcAft>
-                <a:spcPts val="1000"/>
-              </a:spcAft>
-            </a:pPr>
-            <a:r>
-              <a:rPr sz="5400" b="1">
-                <a:solidFill>
-                  <a:srgbClr val="006600"/>
-                </a:solidFill>
-                <a:latin typeface="Arial"/>
-              </a:rPr>
-              <a:t>1,681</a:t>
-            </a:r>
-          </a:p>
-        </p:txBody>
-      </p:sp>
-      <p:sp>
-        <p:nvSpPr>
-          <p:cNvPr id="138" name="TextBox 137"/>
-          <p:cNvSpPr txBox="1"/>
-          <p:nvPr/>
-        </p:nvSpPr>
-        <p:spPr>
-          <a:xfrm>
-            <a:off x="13898880" y="6236208"/>
-            <a:ext cx="2514600" cy="685800"/>
-          </a:xfrm>
-          <a:prstGeom prst="rect">
-            <a:avLst/>
-          </a:prstGeom>
-          <a:noFill/>
-        </p:spPr>
-        <p:txBody>
-          <a:bodyPr wrap="square" anchor="t">
-            <a:spAutoFit/>
-          </a:bodyPr>
-          <a:lstStyle/>
-          <a:p>
-            <a:pPr algn="ctr">
-              <a:lnSpc>
-                <a:spcPct val="95000"/>
-              </a:lnSpc>
-              <a:spcAft>
-                <a:spcPts val="1000"/>
-              </a:spcAft>
-            </a:pPr>
-            <a:r>
-              <a:rPr sz="1900" b="0">
-                <a:solidFill>
-                  <a:srgbClr val="444444"/>
-                </a:solidFill>
-                <a:latin typeface="Arial"/>
-              </a:rPr>
-              <a:t>on a building footprint</a:t>
-            </a:r>
-          </a:p>
-        </p:txBody>
-      </p:sp>
-      <p:sp>
-        <p:nvSpPr>
-          <p:cNvPr id="139" name="TextBox 138"/>
-          <p:cNvSpPr txBox="1"/>
-          <p:nvPr/>
-        </p:nvSpPr>
-        <p:spPr>
-          <a:xfrm>
-            <a:off x="16459200" y="5486400"/>
-            <a:ext cx="2514600" cy="777240"/>
-          </a:xfrm>
-          <a:prstGeom prst="rect">
-            <a:avLst/>
-          </a:prstGeom>
-          <a:noFill/>
-        </p:spPr>
-        <p:txBody>
-          <a:bodyPr wrap="square" anchor="t">
-            <a:spAutoFit/>
-          </a:bodyPr>
-          <a:lstStyle/>
-          <a:p>
-            <a:pPr algn="ctr">
-              <a:lnSpc>
-                <a:spcPct val="95000"/>
-              </a:lnSpc>
-              <a:spcAft>
-                <a:spcPts val="1000"/>
-              </a:spcAft>
-            </a:pPr>
-            <a:r>
-              <a:rPr sz="5400" b="1">
-                <a:solidFill>
-                  <a:srgbClr val="006600"/>
-                </a:solidFill>
-                <a:latin typeface="Arial"/>
-              </a:rPr>
-              <a:t>35%</a:t>
-            </a:r>
-          </a:p>
-        </p:txBody>
-      </p:sp>
-      <p:sp>
-        <p:nvSpPr>
-          <p:cNvPr id="140" name="TextBox 139"/>
-          <p:cNvSpPr txBox="1"/>
-          <p:nvPr/>
-        </p:nvSpPr>
-        <p:spPr>
-          <a:xfrm>
-            <a:off x="16459200" y="6236208"/>
-            <a:ext cx="2514600" cy="685800"/>
-          </a:xfrm>
-          <a:prstGeom prst="rect">
-            <a:avLst/>
-          </a:prstGeom>
-          <a:noFill/>
-        </p:spPr>
-        <p:txBody>
-          <a:bodyPr wrap="square" anchor="t">
-            <a:spAutoFit/>
-          </a:bodyPr>
-          <a:lstStyle/>
-          <a:p>
-            <a:pPr algn="ctr">
-              <a:lnSpc>
-                <a:spcPct val="95000"/>
-              </a:lnSpc>
-              <a:spcAft>
-                <a:spcPts val="1000"/>
-              </a:spcAft>
-            </a:pPr>
-            <a:r>
-              <a:rPr sz="1900" b="0">
-                <a:solidFill>
-                  <a:srgbClr val="444444"/>
-                </a:solidFill>
-                <a:latin typeface="Arial"/>
-              </a:rPr>
-              <a:t>face a mapped hazard</a:t>
-            </a:r>
-          </a:p>
-        </p:txBody>
-      </p:sp>
-      <p:sp>
-        <p:nvSpPr>
-          <p:cNvPr id="141" name="TextBox 140"/>
-          <p:cNvSpPr txBox="1"/>
-          <p:nvPr/>
-        </p:nvSpPr>
-        <p:spPr>
-          <a:xfrm>
-            <a:off x="19019519" y="5486400"/>
-            <a:ext cx="2514600" cy="777240"/>
-          </a:xfrm>
-          <a:prstGeom prst="rect">
-            <a:avLst/>
-          </a:prstGeom>
-          <a:noFill/>
-        </p:spPr>
-        <p:txBody>
-          <a:bodyPr wrap="square" anchor="t">
-            <a:spAutoFit/>
-          </a:bodyPr>
-          <a:lstStyle/>
-          <a:p>
-            <a:pPr algn="ctr">
-              <a:lnSpc>
-                <a:spcPct val="95000"/>
-              </a:lnSpc>
-              <a:spcAft>
-                <a:spcPts val="1000"/>
-              </a:spcAft>
-            </a:pPr>
-            <a:r>
-              <a:rPr sz="5400" b="1">
-                <a:solidFill>
-                  <a:srgbClr val="006600"/>
-                </a:solidFill>
-                <a:latin typeface="Arial"/>
-              </a:rPr>
-              <a:t>0.7%</a:t>
-            </a:r>
-          </a:p>
-        </p:txBody>
-      </p:sp>
-      <p:sp>
-        <p:nvSpPr>
-          <p:cNvPr id="142" name="TextBox 141"/>
-          <p:cNvSpPr txBox="1"/>
-          <p:nvPr/>
-        </p:nvSpPr>
-        <p:spPr>
-          <a:xfrm>
-            <a:off x="19019519" y="6236208"/>
-            <a:ext cx="2514600" cy="685800"/>
-          </a:xfrm>
-          <a:prstGeom prst="rect">
-            <a:avLst/>
-          </a:prstGeom>
-          <a:noFill/>
-        </p:spPr>
-        <p:txBody>
-          <a:bodyPr wrap="square" anchor="t">
-            <a:spAutoFit/>
-          </a:bodyPr>
-          <a:lstStyle/>
-          <a:p>
-            <a:pPr algn="ctr">
-              <a:lnSpc>
-                <a:spcPct val="95000"/>
-              </a:lnSpc>
-              <a:spcAft>
-                <a:spcPts val="1000"/>
-              </a:spcAft>
-            </a:pPr>
-            <a:r>
-              <a:rPr sz="1900" b="0">
-                <a:solidFill>
-                  <a:srgbClr val="444444"/>
-                </a:solidFill>
-                <a:latin typeface="Arial"/>
-              </a:rPr>
-              <a:t>of Virginia's 409</a:t>
-            </a:r>
-          </a:p>
-        </p:txBody>
-      </p:sp>
-      <p:sp>
-        <p:nvSpPr>
-          <p:cNvPr id="143" name="TextBox 142"/>
-          <p:cNvSpPr txBox="1"/>
-          <p:nvPr/>
-        </p:nvSpPr>
-        <p:spPr>
-          <a:xfrm>
-            <a:off x="11292840" y="6931152"/>
-            <a:ext cx="10332720" cy="1358773"/>
-          </a:xfrm>
-          <a:prstGeom prst="rect">
-            <a:avLst/>
-          </a:prstGeom>
-          <a:noFill/>
-        </p:spPr>
-        <p:txBody>
-          <a:bodyPr wrap="square" anchor="t">
-            <a:spAutoFit/>
-          </a:bodyPr>
-          <a:lstStyle/>
-          <a:p>
-            <a:pPr algn="l">
-              <a:lnSpc>
-                <a:spcPct val="95000"/>
-              </a:lnSpc>
-              <a:spcAft>
-                <a:spcPts val="1000"/>
-              </a:spcAft>
-            </a:pPr>
-            <a:r>
-              <a:rPr sz="3100" b="1">
-                <a:solidFill>
-                  <a:srgbClr val="000000"/>
-                </a:solidFill>
-                <a:latin typeface="Arial"/>
-              </a:rPr>
-              <a:t>Hazard exposure is bimodal. It is decided by which cluster a facility sits in, not by anything about data centers.</a:t>
+              <a:t>Measuring hazard across the whole building footprint rather than at one point changed the answer for only 8.9% of facilities. Building height showed no association with exposure once state was controlled, a median difference of 0.0 across 23 states.</a:t>
             </a:r>
           </a:p>
         </p:txBody>
       </p:sp>
       <p:pic>
         <p:nvPicPr>
-          <p:cNvPr id="144" name="Picture 143" descr="fig1_map.png"/>
-          <p:cNvPicPr>
-            <a:picLocks noChangeAspect="1"/>
-          </p:cNvPicPr>
-          <p:nvPr/>
-        </p:nvPicPr>
-        <p:blipFill>
-          <a:blip r:embed="rId5"/>
-          <a:stretch>
-            <a:fillRect/>
-          </a:stretch>
-        </p:blipFill>
-        <p:spPr>
-          <a:xfrm>
-            <a:off x="11292840" y="8399653"/>
-            <a:ext cx="10332720" cy="4307742"/>
-          </a:xfrm>
-          <a:prstGeom prst="rect">
-            <a:avLst/>
-          </a:prstGeom>
-        </p:spPr>
-      </p:pic>
-      <p:sp>
-        <p:nvSpPr>
-          <p:cNvPr id="145" name="TextBox 144"/>
-          <p:cNvSpPr txBox="1"/>
-          <p:nvPr/>
-        </p:nvSpPr>
-        <p:spPr>
-          <a:xfrm>
-            <a:off x="11292840" y="12844555"/>
-            <a:ext cx="10332720" cy="815847"/>
-          </a:xfrm>
-          <a:prstGeom prst="rect">
-            <a:avLst/>
-          </a:prstGeom>
-          <a:noFill/>
-        </p:spPr>
-        <p:txBody>
-          <a:bodyPr wrap="square" anchor="t">
-            <a:spAutoFit/>
-          </a:bodyPr>
-          <a:lstStyle/>
-          <a:p>
-            <a:pPr algn="l">
-              <a:lnSpc>
-                <a:spcPct val="95000"/>
-              </a:lnSpc>
-              <a:spcAft>
-                <a:spcPts val="1000"/>
-              </a:spcAft>
-            </a:pPr>
-            <a:r>
-              <a:rPr sz="2400" b="1">
-                <a:solidFill>
-                  <a:srgbClr val="000000"/>
-                </a:solidFill>
-                <a:latin typeface="Arial"/>
-              </a:rPr>
-              <a:t>Fig 1. Two thirds of US data centers face no mapped hazard. Exposure is regional, not universal.</a:t>
-            </a:r>
-          </a:p>
-        </p:txBody>
-      </p:sp>
-      <p:sp>
-        <p:nvSpPr>
-          <p:cNvPr id="146" name="TextBox 145"/>
-          <p:cNvSpPr txBox="1"/>
-          <p:nvPr/>
-        </p:nvSpPr>
-        <p:spPr>
-          <a:xfrm>
-            <a:off x="11292840" y="13751843"/>
-            <a:ext cx="10332720" cy="4460748"/>
-          </a:xfrm>
-          <a:prstGeom prst="rect">
-            <a:avLst/>
-          </a:prstGeom>
-          <a:noFill/>
-        </p:spPr>
-        <p:txBody>
-          <a:bodyPr wrap="square" anchor="t">
-            <a:spAutoFit/>
-          </a:bodyPr>
-          <a:lstStyle/>
-          <a:p>
-            <a:pPr algn="l">
-              <a:lnSpc>
-                <a:spcPct val="95000"/>
-              </a:lnSpc>
-              <a:spcAft>
-                <a:spcPts val="1000"/>
-              </a:spcAft>
-            </a:pPr>
-            <a:r>
-              <a:rPr sz="2800" b="0">
-                <a:solidFill>
-                  <a:srgbClr val="000000"/>
-                </a:solidFill>
-                <a:latin typeface="Arial"/>
-              </a:rPr>
-              <a:t>Of 2,696 facilities, 1,742 face no mapped hazard and 205 face two or more. Eighteen states holding half the fleet sit below 10% exposed. Ten states holding a third sit above 60%.</a:t>
-            </a:r>
-          </a:p>
-          <a:p>
-            <a:pPr algn="l">
-              <a:lnSpc>
-                <a:spcPct val="95000"/>
-              </a:lnSpc>
-              <a:spcAft>
-                <a:spcPts val="1000"/>
-              </a:spcAft>
-            </a:pPr>
-            <a:r>
-              <a:rPr sz="2800" b="0">
-                <a:solidFill>
-                  <a:srgbClr val="000000"/>
-                </a:solidFill>
-                <a:latin typeface="Arial"/>
-              </a:rPr>
-              <a:t/>
-            </a:r>
-          </a:p>
-          <a:p>
-            <a:pPr algn="l">
-              <a:lnSpc>
-                <a:spcPct val="95000"/>
-              </a:lnSpc>
-              <a:spcAft>
-                <a:spcPts val="1000"/>
-              </a:spcAft>
-            </a:pPr>
-            <a:r>
-              <a:rPr sz="2800" b="0">
-                <a:solidFill>
-                  <a:srgbClr val="000000"/>
-                </a:solidFill>
-                <a:latin typeface="Arial"/>
-              </a:rPr>
-              <a:t>Virginia, the largest concentration on Earth, is 0.7% exposed. California and New Jersey are 100%.</a:t>
-            </a:r>
-          </a:p>
-          <a:p>
-            <a:pPr algn="l">
-              <a:lnSpc>
-                <a:spcPct val="95000"/>
-              </a:lnSpc>
-              <a:spcAft>
-                <a:spcPts val="1000"/>
-              </a:spcAft>
-            </a:pPr>
-            <a:r>
-              <a:rPr sz="2800" b="0">
-                <a:solidFill>
-                  <a:srgbClr val="000000"/>
-                </a:solidFill>
-                <a:latin typeface="Arial"/>
-              </a:rPr>
-              <a:t/>
-            </a:r>
-          </a:p>
-          <a:p>
-            <a:pPr algn="l">
-              <a:lnSpc>
-                <a:spcPct val="95000"/>
-              </a:lnSpc>
-              <a:spcAft>
-                <a:spcPts val="1000"/>
-              </a:spcAft>
-            </a:pPr>
-            <a:r>
-              <a:rPr sz="2800" b="0">
-                <a:solidFill>
-                  <a:srgbClr val="000000"/>
-                </a:solidFill>
-                <a:latin typeface="Arial"/>
-              </a:rPr>
-              <a:t>Water stress is the exception that reaches Virginia. 952 facilities nationally sit in high or extremely-high stress basins.</a:t>
-            </a:r>
-          </a:p>
-        </p:txBody>
-      </p:sp>
-      <p:pic>
-        <p:nvPicPr>
-          <p:cNvPr id="147" name="Picture 146" descr="fig2_states.png"/>
-          <p:cNvPicPr>
-            <a:picLocks noChangeAspect="1"/>
-          </p:cNvPicPr>
-          <p:nvPr/>
-        </p:nvPicPr>
-        <p:blipFill>
-          <a:blip r:embed="rId6"/>
-          <a:stretch>
-            <a:fillRect/>
-          </a:stretch>
-        </p:blipFill>
-        <p:spPr>
-          <a:xfrm>
-            <a:off x="11292840" y="18322319"/>
-            <a:ext cx="10332720" cy="4874805"/>
-          </a:xfrm>
-          <a:prstGeom prst="rect">
-            <a:avLst/>
-          </a:prstGeom>
-        </p:spPr>
-      </p:pic>
-      <p:sp>
-        <p:nvSpPr>
-          <p:cNvPr id="148" name="TextBox 147"/>
-          <p:cNvSpPr txBox="1"/>
-          <p:nvPr/>
-        </p:nvSpPr>
-        <p:spPr>
-          <a:xfrm>
-            <a:off x="11292840" y="23334283"/>
-            <a:ext cx="10332720" cy="815847"/>
-          </a:xfrm>
-          <a:prstGeom prst="rect">
-            <a:avLst/>
-          </a:prstGeom>
-          <a:noFill/>
-        </p:spPr>
-        <p:txBody>
-          <a:bodyPr wrap="square" anchor="t">
-            <a:spAutoFit/>
-          </a:bodyPr>
-          <a:lstStyle/>
-          <a:p>
-            <a:pPr algn="l">
-              <a:lnSpc>
-                <a:spcPct val="95000"/>
-              </a:lnSpc>
-              <a:spcAft>
-                <a:spcPts val="1000"/>
-              </a:spcAft>
-            </a:pPr>
-            <a:r>
-              <a:rPr sz="2400" b="1">
-                <a:solidFill>
-                  <a:srgbClr val="000000"/>
-                </a:solidFill>
-                <a:latin typeface="Arial"/>
-              </a:rPr>
-              <a:t>Fig 2. States split into two groups with almost nothing between them.</a:t>
-            </a:r>
-          </a:p>
-        </p:txBody>
-      </p:sp>
-      <p:sp>
-        <p:nvSpPr>
-          <p:cNvPr id="149" name="Rectangle 148"/>
-          <p:cNvSpPr/>
-          <p:nvPr/>
-        </p:nvSpPr>
-        <p:spPr>
-          <a:xfrm>
-            <a:off x="22128480" y="4526280"/>
-            <a:ext cx="10332720" cy="868680"/>
-          </a:xfrm>
-          <a:prstGeom prst="rect">
-            <a:avLst/>
-          </a:prstGeom>
-          <a:solidFill>
-            <a:srgbClr val="006600"/>
-          </a:solidFill>
-          <a:ln>
-            <a:noFill/>
-          </a:ln>
-          <a:effectLst/>
-        </p:spPr>
-        <p:style>
-          <a:lnRef idx="1">
-            <a:schemeClr val="accent1"/>
-          </a:lnRef>
-          <a:fillRef idx="3">
-            <a:schemeClr val="accent1"/>
-          </a:fillRef>
-          <a:effectRef idx="2">
-            <a:schemeClr val="accent1"/>
-          </a:effectRef>
-          <a:fontRef idx="minor">
-            <a:schemeClr val="lt1"/>
-          </a:fontRef>
-        </p:style>
-        <p:txBody>
-          <a:bodyPr rtlCol="0" anchor="ctr"/>
-          <a:lstStyle/>
-          <a:p>
-            <a:pPr algn="ctr"/>
-          </a:p>
-        </p:txBody>
-      </p:sp>
-      <p:sp>
-        <p:nvSpPr>
-          <p:cNvPr id="150" name="TextBox 149"/>
-          <p:cNvSpPr txBox="1"/>
-          <p:nvPr/>
-        </p:nvSpPr>
-        <p:spPr>
-          <a:xfrm>
-            <a:off x="22311360" y="4581144"/>
-            <a:ext cx="10058400" cy="777240"/>
-          </a:xfrm>
-          <a:prstGeom prst="rect">
-            <a:avLst/>
-          </a:prstGeom>
-          <a:noFill/>
-        </p:spPr>
-        <p:txBody>
-          <a:bodyPr wrap="square" anchor="ctr">
-            <a:spAutoFit/>
-          </a:bodyPr>
-          <a:lstStyle/>
-          <a:p>
-            <a:pPr algn="l">
-              <a:lnSpc>
-                <a:spcPct val="95000"/>
-              </a:lnSpc>
-              <a:spcAft>
-                <a:spcPts val="1000"/>
-              </a:spcAft>
-            </a:pPr>
-            <a:r>
-              <a:rPr sz="4400" b="1">
-                <a:solidFill>
-                  <a:srgbClr val="FFFFFF"/>
-                </a:solidFill>
-                <a:latin typeface="Arial"/>
-              </a:rPr>
-              <a:t>Conclusions</a:t>
-            </a:r>
-          </a:p>
-        </p:txBody>
-      </p:sp>
-      <p:sp>
-        <p:nvSpPr>
-          <p:cNvPr id="151" name="TextBox 150"/>
-          <p:cNvSpPr txBox="1"/>
-          <p:nvPr/>
-        </p:nvSpPr>
-        <p:spPr>
-          <a:xfrm>
-            <a:off x="22128480" y="5486400"/>
-            <a:ext cx="10332720" cy="4582033"/>
-          </a:xfrm>
-          <a:prstGeom prst="rect">
-            <a:avLst/>
-          </a:prstGeom>
-          <a:noFill/>
-        </p:spPr>
-        <p:txBody>
-          <a:bodyPr wrap="square" anchor="t">
-            <a:spAutoFit/>
-          </a:bodyPr>
-          <a:lstStyle/>
-          <a:p>
-            <a:pPr algn="l">
-              <a:lnSpc>
-                <a:spcPct val="95000"/>
-              </a:lnSpc>
-              <a:spcAft>
-                <a:spcPts val="1000"/>
-              </a:spcAft>
-            </a:pPr>
-            <a:r>
-              <a:rPr sz="2700" b="0">
-                <a:solidFill>
-                  <a:srgbClr val="000000"/>
-                </a:solidFill>
-                <a:latin typeface="Arial"/>
-              </a:rPr>
-              <a:t>•  A national average describes no real facility. Exposure is concentrated in a nameable minority of places.</a:t>
-            </a:r>
-          </a:p>
-          <a:p>
-            <a:pPr algn="l">
-              <a:lnSpc>
-                <a:spcPct val="95000"/>
-              </a:lnSpc>
-              <a:spcAft>
-                <a:spcPts val="1000"/>
-              </a:spcAft>
-            </a:pPr>
-            <a:r>
-              <a:rPr sz="2700" b="0">
-                <a:solidFill>
-                  <a:srgbClr val="000000"/>
-                </a:solidFill>
-                <a:latin typeface="Arial"/>
-              </a:rPr>
-              <a:t/>
-            </a:r>
-          </a:p>
-          <a:p>
-            <a:pPr algn="l">
-              <a:lnSpc>
-                <a:spcPct val="95000"/>
-              </a:lnSpc>
-              <a:spcAft>
-                <a:spcPts val="1000"/>
-              </a:spcAft>
-            </a:pPr>
-            <a:r>
-              <a:rPr sz="2700" b="0">
-                <a:solidFill>
-                  <a:srgbClr val="000000"/>
-                </a:solidFill>
-                <a:latin typeface="Arial"/>
-              </a:rPr>
-              <a:t>•  The industry has clustered in the low-exposure half of the country. That is a finding about siting.</a:t>
-            </a:r>
-          </a:p>
-          <a:p>
-            <a:pPr algn="l">
-              <a:lnSpc>
-                <a:spcPct val="95000"/>
-              </a:lnSpc>
-              <a:spcAft>
-                <a:spcPts val="1000"/>
-              </a:spcAft>
-            </a:pPr>
-            <a:r>
-              <a:rPr sz="2700" b="0">
-                <a:solidFill>
-                  <a:srgbClr val="000000"/>
-                </a:solidFill>
-                <a:latin typeface="Arial"/>
-              </a:rPr>
-              <a:t/>
-            </a:r>
-          </a:p>
-          <a:p>
-            <a:pPr algn="l">
-              <a:lnSpc>
-                <a:spcPct val="95000"/>
-              </a:lnSpc>
-              <a:spcAft>
-                <a:spcPts val="1000"/>
-              </a:spcAft>
-            </a:pPr>
-            <a:r>
-              <a:rPr sz="2700" b="0">
-                <a:solidFill>
-                  <a:srgbClr val="000000"/>
-                </a:solidFill>
-                <a:latin typeface="Arial"/>
-              </a:rPr>
-              <a:t>•  Building height belongs in the vulnerability term, not the exposure term.</a:t>
-            </a:r>
-          </a:p>
-          <a:p>
-            <a:pPr algn="l">
-              <a:lnSpc>
-                <a:spcPct val="95000"/>
-              </a:lnSpc>
-              <a:spcAft>
-                <a:spcPts val="1000"/>
-              </a:spcAft>
-            </a:pPr>
-            <a:r>
-              <a:rPr sz="2700" b="0">
-                <a:solidFill>
-                  <a:srgbClr val="000000"/>
-                </a:solidFill>
-                <a:latin typeface="Arial"/>
-              </a:rPr>
-              <a:t/>
-            </a:r>
-          </a:p>
-          <a:p>
-            <a:pPr algn="l">
-              <a:lnSpc>
-                <a:spcPct val="95000"/>
-              </a:lnSpc>
-              <a:spcAft>
-                <a:spcPts val="1000"/>
-              </a:spcAft>
-            </a:pPr>
-            <a:r>
-              <a:rPr sz="2700" b="0">
-                <a:solidFill>
-                  <a:srgbClr val="000000"/>
-                </a:solidFill>
-                <a:latin typeface="Arial"/>
-              </a:rPr>
-              <a:t>•  Next: fragility curves for server and cooling equipment, to turn exposure into estimated loss.</a:t>
-            </a:r>
-          </a:p>
-        </p:txBody>
-      </p:sp>
-      <p:sp>
-        <p:nvSpPr>
-          <p:cNvPr id="152" name="Rectangle 151"/>
-          <p:cNvSpPr/>
-          <p:nvPr/>
-        </p:nvSpPr>
-        <p:spPr>
-          <a:xfrm>
-            <a:off x="22128480" y="10178161"/>
-            <a:ext cx="10332720" cy="2175002"/>
-          </a:xfrm>
-          <a:prstGeom prst="rect">
-            <a:avLst/>
-          </a:prstGeom>
-          <a:solidFill>
-            <a:srgbClr val="E5E5E5"/>
-          </a:solidFill>
-          <a:ln w="12700">
-            <a:solidFill>
-              <a:srgbClr val="A5A5A5"/>
-            </a:solidFill>
-          </a:ln>
-          <a:effectLst/>
-        </p:spPr>
-        <p:style>
-          <a:lnRef idx="1">
-            <a:schemeClr val="accent1"/>
-          </a:lnRef>
-          <a:fillRef idx="3">
-            <a:schemeClr val="accent1"/>
-          </a:fillRef>
-          <a:effectRef idx="2">
-            <a:schemeClr val="accent1"/>
-          </a:effectRef>
-          <a:fontRef idx="minor">
-            <a:schemeClr val="lt1"/>
-          </a:fontRef>
-        </p:style>
-        <p:txBody>
-          <a:bodyPr rtlCol="0" anchor="ctr"/>
-          <a:lstStyle/>
-          <a:p>
-            <a:pPr algn="ctr"/>
-          </a:p>
-        </p:txBody>
-      </p:sp>
-      <p:sp>
-        <p:nvSpPr>
-          <p:cNvPr id="153" name="Rectangle 152"/>
-          <p:cNvSpPr/>
-          <p:nvPr/>
-        </p:nvSpPr>
-        <p:spPr>
-          <a:xfrm>
-            <a:off x="22128480" y="10178161"/>
-            <a:ext cx="128016" cy="2175002"/>
-          </a:xfrm>
-          <a:prstGeom prst="rect">
-            <a:avLst/>
-          </a:prstGeom>
-          <a:solidFill>
-            <a:srgbClr val="FFCC00"/>
-          </a:solidFill>
-          <a:ln>
-            <a:noFill/>
-          </a:ln>
-          <a:effectLst/>
-        </p:spPr>
-        <p:style>
-          <a:lnRef idx="1">
-            <a:schemeClr val="accent1"/>
-          </a:lnRef>
-          <a:fillRef idx="3">
-            <a:schemeClr val="accent1"/>
-          </a:fillRef>
-          <a:effectRef idx="2">
-            <a:schemeClr val="accent1"/>
-          </a:effectRef>
-          <a:fontRef idx="minor">
-            <a:schemeClr val="lt1"/>
-          </a:fontRef>
-        </p:style>
-        <p:txBody>
-          <a:bodyPr rtlCol="0" anchor="ctr"/>
-          <a:lstStyle/>
-          <a:p>
-            <a:pPr algn="ctr"/>
-          </a:p>
-        </p:txBody>
-      </p:sp>
-      <p:sp>
-        <p:nvSpPr>
-          <p:cNvPr id="154" name="TextBox 153"/>
-          <p:cNvSpPr txBox="1"/>
-          <p:nvPr/>
-        </p:nvSpPr>
-        <p:spPr>
-          <a:xfrm>
-            <a:off x="22357080" y="10251313"/>
-            <a:ext cx="9921240" cy="2028698"/>
-          </a:xfrm>
-          <a:prstGeom prst="rect">
-            <a:avLst/>
-          </a:prstGeom>
-          <a:noFill/>
-        </p:spPr>
-        <p:txBody>
-          <a:bodyPr wrap="square" anchor="t">
-            <a:spAutoFit/>
-          </a:bodyPr>
-          <a:lstStyle/>
-          <a:p>
-            <a:pPr algn="l">
-              <a:lnSpc>
-                <a:spcPct val="95000"/>
-              </a:lnSpc>
-              <a:spcAft>
-                <a:spcPts val="1000"/>
-              </a:spcAft>
-            </a:pPr>
-            <a:r>
-              <a:rPr sz="2300" b="0">
-                <a:solidFill>
-                  <a:srgbClr val="000000"/>
-                </a:solidFill>
-                <a:latin typeface="Arial"/>
-              </a:rPr>
-              <a:t>Two things we expected and did not find</a:t>
-            </a:r>
-          </a:p>
-          <a:p>
-            <a:pPr algn="l">
-              <a:lnSpc>
-                <a:spcPct val="95000"/>
-              </a:lnSpc>
-              <a:spcAft>
-                <a:spcPts val="1000"/>
-              </a:spcAft>
-            </a:pPr>
-            <a:r>
-              <a:rPr sz="2300" b="0">
-                <a:solidFill>
-                  <a:srgbClr val="000000"/>
-                </a:solidFill>
-                <a:latin typeface="Arial"/>
-              </a:rPr>
-              <a:t>Measuring hazard across the whole building footprint instead of one point changed the answer for only 8.9% of facilities. Building height showed no association with exposure once state was controlled, with a median difference of exactly 0.0 across 23 states.</a:t>
-            </a:r>
-          </a:p>
-        </p:txBody>
-      </p:sp>
-      <p:pic>
-        <p:nvPicPr>
-          <p:cNvPr id="155" name="Picture 154" descr="fig3_confidence.png"/>
+          <p:cNvPr id="164" name="Picture 163" descr="fig3_confidence.png"/>
           <p:cNvPicPr>
             <a:picLocks noChangeAspect="1"/>
           </p:cNvPicPr>
@@ -7504,8 +7951,8 @@
         </p:blipFill>
         <p:spPr>
           <a:xfrm>
-            <a:off x="22128480" y="12481179"/>
-            <a:ext cx="10332720" cy="3880657"/>
+            <a:off x="22090621" y="9748971"/>
+            <a:ext cx="10397100" cy="3904836"/>
           </a:xfrm>
           <a:prstGeom prst="rect">
             <a:avLst/>
@@ -7514,14 +7961,14 @@
       </p:pic>
       <p:sp>
         <p:nvSpPr>
-          <p:cNvPr id="156" name="TextBox 155"/>
+          <p:cNvPr id="165" name="TextBox 164"/>
           <p:cNvSpPr txBox="1"/>
           <p:nvPr/>
         </p:nvSpPr>
         <p:spPr>
           <a:xfrm>
-            <a:off x="22128480" y="16471563"/>
-            <a:ext cx="10332720" cy="815847"/>
+            <a:off x="22090621" y="13690383"/>
+            <a:ext cx="10397100" cy="761746"/>
           </a:xfrm>
           <a:prstGeom prst="rect">
             <a:avLst/>
@@ -7529,7 +7976,7 @@
           <a:noFill/>
         </p:spPr>
         <p:txBody>
-          <a:bodyPr wrap="square" anchor="t">
+          <a:bodyPr wrap="square" anchor="t" tIns="36576" bIns="36576">
             <a:spAutoFit/>
           </a:bodyPr>
           <a:lstStyle/>
@@ -7539,387 +7986,17 @@
                 <a:spcPct val="95000"/>
               </a:lnSpc>
               <a:spcAft>
-                <a:spcPts val="1000"/>
+                <a:spcPts val="800"/>
               </a:spcAft>
             </a:pPr>
             <a:r>
-              <a:rPr sz="2400" b="1">
+              <a:rPr sz="2100" b="1">
                 <a:solidFill>
                   <a:srgbClr val="000000"/>
                 </a:solidFill>
                 <a:latin typeface="Arial"/>
               </a:rPr>
               <a:t>Fig 3. Coordinate quality was measured, not assumed. Results stay stable under realistic positional error.</a:t>
-            </a:r>
-          </a:p>
-        </p:txBody>
-      </p:sp>
-      <p:sp>
-        <p:nvSpPr>
-          <p:cNvPr id="157" name="Rectangle 156"/>
-          <p:cNvSpPr/>
-          <p:nvPr/>
-        </p:nvSpPr>
-        <p:spPr>
-          <a:xfrm>
-            <a:off x="22128480" y="16471563"/>
-            <a:ext cx="10332720" cy="868680"/>
-          </a:xfrm>
-          <a:prstGeom prst="rect">
-            <a:avLst/>
-          </a:prstGeom>
-          <a:solidFill>
-            <a:srgbClr val="006600"/>
-          </a:solidFill>
-          <a:ln>
-            <a:noFill/>
-          </a:ln>
-          <a:effectLst/>
-        </p:spPr>
-        <p:style>
-          <a:lnRef idx="1">
-            <a:schemeClr val="accent1"/>
-          </a:lnRef>
-          <a:fillRef idx="3">
-            <a:schemeClr val="accent1"/>
-          </a:fillRef>
-          <a:effectRef idx="2">
-            <a:schemeClr val="accent1"/>
-          </a:effectRef>
-          <a:fontRef idx="minor">
-            <a:schemeClr val="lt1"/>
-          </a:fontRef>
-        </p:style>
-        <p:txBody>
-          <a:bodyPr rtlCol="0" anchor="ctr"/>
-          <a:lstStyle/>
-          <a:p>
-            <a:pPr algn="ctr"/>
-          </a:p>
-        </p:txBody>
-      </p:sp>
-      <p:sp>
-        <p:nvSpPr>
-          <p:cNvPr id="158" name="TextBox 157"/>
-          <p:cNvSpPr txBox="1"/>
-          <p:nvPr/>
-        </p:nvSpPr>
-        <p:spPr>
-          <a:xfrm>
-            <a:off x="22311360" y="16526427"/>
-            <a:ext cx="10058400" cy="777240"/>
-          </a:xfrm>
-          <a:prstGeom prst="rect">
-            <a:avLst/>
-          </a:prstGeom>
-          <a:noFill/>
-        </p:spPr>
-        <p:txBody>
-          <a:bodyPr wrap="square" anchor="ctr">
-            <a:spAutoFit/>
-          </a:bodyPr>
-          <a:lstStyle/>
-          <a:p>
-            <a:pPr algn="l">
-              <a:lnSpc>
-                <a:spcPct val="95000"/>
-              </a:lnSpc>
-              <a:spcAft>
-                <a:spcPts val="1000"/>
-              </a:spcAft>
-            </a:pPr>
-            <a:r>
-              <a:rPr sz="4400" b="1">
-                <a:solidFill>
-                  <a:srgbClr val="FFFFFF"/>
-                </a:solidFill>
-                <a:latin typeface="Arial"/>
-              </a:rPr>
-              <a:t>Major Citations</a:t>
-            </a:r>
-          </a:p>
-        </p:txBody>
-      </p:sp>
-      <p:sp>
-        <p:nvSpPr>
-          <p:cNvPr id="159" name="TextBox 158"/>
-          <p:cNvSpPr txBox="1"/>
-          <p:nvPr/>
-        </p:nvSpPr>
-        <p:spPr>
-          <a:xfrm>
-            <a:off x="22128480" y="17431683"/>
-            <a:ext cx="10332720" cy="2699258"/>
-          </a:xfrm>
-          <a:prstGeom prst="rect">
-            <a:avLst/>
-          </a:prstGeom>
-          <a:noFill/>
-        </p:spPr>
-        <p:txBody>
-          <a:bodyPr wrap="square" anchor="t">
-            <a:spAutoFit/>
-          </a:bodyPr>
-          <a:lstStyle/>
-          <a:p>
-            <a:pPr algn="l">
-              <a:lnSpc>
-                <a:spcPct val="90000"/>
-              </a:lnSpc>
-              <a:spcAft>
-                <a:spcPts val="1000"/>
-              </a:spcAft>
-            </a:pPr>
-            <a:r>
-              <a:rPr sz="1900" b="0">
-                <a:solidFill>
-                  <a:srgbClr val="333333"/>
-                </a:solidFill>
-                <a:latin typeface="Arial"/>
-              </a:rPr>
-              <a:t>Dillon, G.K. (2023) Wildfire Hazard Potential for the United States, 270-m, v2023. USDA Forest Service. doi:10.2737/RDS-2015-0047-4</a:t>
-            </a:r>
-          </a:p>
-          <a:p>
-            <a:pPr algn="l">
-              <a:lnSpc>
-                <a:spcPct val="90000"/>
-              </a:lnSpc>
-              <a:spcAft>
-                <a:spcPts val="1000"/>
-              </a:spcAft>
-            </a:pPr>
-            <a:r>
-              <a:rPr sz="1900" b="0">
-                <a:solidFill>
-                  <a:srgbClr val="333333"/>
-                </a:solidFill>
-                <a:latin typeface="Arial"/>
-              </a:rPr>
-              <a:t>Petersen, M.D. et al. (2023) 2023 US National Seismic Hazard Model. USGS. doi:10.5066/P9GNPCOD</a:t>
-            </a:r>
-          </a:p>
-          <a:p>
-            <a:pPr algn="l">
-              <a:lnSpc>
-                <a:spcPct val="90000"/>
-              </a:lnSpc>
-              <a:spcAft>
-                <a:spcPts val="1000"/>
-              </a:spcAft>
-            </a:pPr>
-            <a:r>
-              <a:rPr sz="1900" b="0">
-                <a:solidFill>
-                  <a:srgbClr val="333333"/>
-                </a:solidFill>
-                <a:latin typeface="Arial"/>
-              </a:rPr>
-              <a:t>FEMA (2026) National Flood Hazard Layer. hazards.fema.gov</a:t>
-            </a:r>
-          </a:p>
-          <a:p>
-            <a:pPr algn="l">
-              <a:lnSpc>
-                <a:spcPct val="90000"/>
-              </a:lnSpc>
-              <a:spcAft>
-                <a:spcPts val="1000"/>
-              </a:spcAft>
-            </a:pPr>
-            <a:r>
-              <a:rPr sz="1900" b="0">
-                <a:solidFill>
-                  <a:srgbClr val="333333"/>
-                </a:solidFill>
-                <a:latin typeface="Arial"/>
-              </a:rPr>
-              <a:t>Oughton, E.J. &amp; Weigel, R. (2026) A Comparative Multi-Hazard Risk Assessment of the US High-Voltage Transmission Network. Zenodo. doi:10.5281/zenodo.20331026 (CC BY 4.0)</a:t>
-            </a:r>
-          </a:p>
-          <a:p>
-            <a:pPr algn="l">
-              <a:lnSpc>
-                <a:spcPct val="90000"/>
-              </a:lnSpc>
-              <a:spcAft>
-                <a:spcPts val="1000"/>
-              </a:spcAft>
-            </a:pPr>
-            <a:r>
-              <a:rPr sz="1900" b="0">
-                <a:solidFill>
-                  <a:srgbClr val="333333"/>
-                </a:solidFill>
-                <a:latin typeface="Arial"/>
-              </a:rPr>
-              <a:t>WRI (2023) Aqueduct 4.0 Water Risk Atlas.</a:t>
-            </a:r>
-          </a:p>
-        </p:txBody>
-      </p:sp>
-      <p:sp>
-        <p:nvSpPr>
-          <p:cNvPr id="160" name="Rectangle 159"/>
-          <p:cNvSpPr/>
-          <p:nvPr/>
-        </p:nvSpPr>
-        <p:spPr>
-          <a:xfrm>
-            <a:off x="22128480" y="20240669"/>
-            <a:ext cx="10332720" cy="868680"/>
-          </a:xfrm>
-          <a:prstGeom prst="rect">
-            <a:avLst/>
-          </a:prstGeom>
-          <a:solidFill>
-            <a:srgbClr val="006600"/>
-          </a:solidFill>
-          <a:ln>
-            <a:noFill/>
-          </a:ln>
-          <a:effectLst/>
-        </p:spPr>
-        <p:style>
-          <a:lnRef idx="1">
-            <a:schemeClr val="accent1"/>
-          </a:lnRef>
-          <a:fillRef idx="3">
-            <a:schemeClr val="accent1"/>
-          </a:fillRef>
-          <a:effectRef idx="2">
-            <a:schemeClr val="accent1"/>
-          </a:effectRef>
-          <a:fontRef idx="minor">
-            <a:schemeClr val="lt1"/>
-          </a:fontRef>
-        </p:style>
-        <p:txBody>
-          <a:bodyPr rtlCol="0" anchor="ctr"/>
-          <a:lstStyle/>
-          <a:p>
-            <a:pPr algn="ctr"/>
-          </a:p>
-        </p:txBody>
-      </p:sp>
-      <p:sp>
-        <p:nvSpPr>
-          <p:cNvPr id="161" name="TextBox 160"/>
-          <p:cNvSpPr txBox="1"/>
-          <p:nvPr/>
-        </p:nvSpPr>
-        <p:spPr>
-          <a:xfrm>
-            <a:off x="22311360" y="20295533"/>
-            <a:ext cx="10058400" cy="777240"/>
-          </a:xfrm>
-          <a:prstGeom prst="rect">
-            <a:avLst/>
-          </a:prstGeom>
-          <a:noFill/>
-        </p:spPr>
-        <p:txBody>
-          <a:bodyPr wrap="square" anchor="ctr">
-            <a:spAutoFit/>
-          </a:bodyPr>
-          <a:lstStyle/>
-          <a:p>
-            <a:pPr algn="l">
-              <a:lnSpc>
-                <a:spcPct val="95000"/>
-              </a:lnSpc>
-              <a:spcAft>
-                <a:spcPts val="1000"/>
-              </a:spcAft>
-            </a:pPr>
-            <a:r>
-              <a:rPr sz="4400" b="1">
-                <a:solidFill>
-                  <a:srgbClr val="FFFFFF"/>
-                </a:solidFill>
-                <a:latin typeface="Arial"/>
-              </a:rPr>
-              <a:t>Acknowledgements</a:t>
-            </a:r>
-          </a:p>
-        </p:txBody>
-      </p:sp>
-      <p:sp>
-        <p:nvSpPr>
-          <p:cNvPr id="162" name="TextBox 161"/>
-          <p:cNvSpPr txBox="1"/>
-          <p:nvPr/>
-        </p:nvSpPr>
-        <p:spPr>
-          <a:xfrm>
-            <a:off x="22128480" y="21200789"/>
-            <a:ext cx="10332720" cy="1757552"/>
-          </a:xfrm>
-          <a:prstGeom prst="rect">
-            <a:avLst/>
-          </a:prstGeom>
-          <a:noFill/>
-        </p:spPr>
-        <p:txBody>
-          <a:bodyPr wrap="square" anchor="t">
-            <a:spAutoFit/>
-          </a:bodyPr>
-          <a:lstStyle/>
-          <a:p>
-            <a:pPr algn="l">
-              <a:lnSpc>
-                <a:spcPct val="95000"/>
-              </a:lnSpc>
-              <a:spcAft>
-                <a:spcPts val="1000"/>
-              </a:spcAft>
-            </a:pPr>
-            <a:r>
-              <a:rPr sz="2100" b="0">
-                <a:solidFill>
-                  <a:srgbClr val="333333"/>
-                </a:solidFill>
-                <a:latin typeface="Arial"/>
-              </a:rPr>
-              <a:t>Made possible by George Mason University's College of Science, which supports the ASSIP Program. Thanks to Prof. Edward Oughton for supervision and Dennies Bor for the multi-hazard layers.</a:t>
-            </a:r>
-          </a:p>
-          <a:p>
-            <a:pPr algn="l">
-              <a:lnSpc>
-                <a:spcPct val="95000"/>
-              </a:lnSpc>
-              <a:spcAft>
-                <a:spcPts val="1000"/>
-              </a:spcAft>
-            </a:pPr>
-            <a:r>
-              <a:rPr sz="2100" b="0">
-                <a:solidFill>
-                  <a:srgbClr val="333333"/>
-                </a:solidFill>
-                <a:latin typeface="Arial"/>
-              </a:rPr>
-              <a:t/>
-            </a:r>
-          </a:p>
-          <a:p>
-            <a:pPr algn="l">
-              <a:lnSpc>
-                <a:spcPct val="95000"/>
-              </a:lnSpc>
-              <a:spcAft>
-                <a:spcPts val="1000"/>
-              </a:spcAft>
-            </a:pPr>
-            <a:r>
-              <a:rPr sz="2100" b="0">
-                <a:solidFill>
-                  <a:srgbClr val="333333"/>
-                </a:solidFill>
-                <a:latin typeface="Arial"/>
-              </a:rPr>
-              <a:t>Data and code: github.com/aviangirekula/datacenter-dataset</a:t>
             </a:r>
           </a:p>
         </p:txBody>

--- a/figures/Oughton_Avilash_Angirekula_2026ASSIP_Poster.pptx
+++ b/figures/Oughton_Avilash_Angirekula_2026ASSIP_Poster.pptx
@@ -5240,7 +5240,7 @@
         <p:spPr>
           <a:xfrm>
             <a:off x="376700" y="5251774"/>
-            <a:ext cx="10282778" cy="3645916"/>
+            <a:ext cx="10282778" cy="3883723"/>
           </a:xfrm>
           <a:prstGeom prst="rect">
             <a:avLst/>
@@ -5256,7 +5256,7 @@
           <a:bodyPr spcFirstLastPara="1" wrap="square" lIns="164592" tIns="164592" rIns="164592" bIns="164592" anchor="t" anchorCtr="0"/>
           <a:lstStyle/>
           <a:p>
-            <a:pPr algn="just">
+            <a:pPr algn="l">
               <a:lnSpc>
                 <a:spcPct val="95000"/>
               </a:lnSpc>
@@ -5275,7 +5275,7 @@
                 </a:solidFill>
                 <a:latin typeface="Arial"/>
               </a:rPr>
-              <a:t>AI and cloud computing have concentrated enormous computing capacity into a small number of US locations. Those buildings face earthquakes, wildfire and flooding, but no open dataset records where they physically stand.</a:t>
+              <a:t>AI and cloud computing have concentrated enormous computing capacity into a small number of US locations. Those buildings face earthquakes, wildfire and flooding, but no open dataset records where they stand.</a:t>
             </a:r>
             <a:endParaRPr sz="2600" dirty="0">
               <a:latin typeface="Palatino"/>
@@ -5285,7 +5285,7 @@
             </a:endParaRPr>
           </a:p>
           <a:p>
-            <a:pPr>
+            <a:pPr algn="l">
               <a:lnSpc>
                 <a:spcPct val="95000"/>
               </a:lnSpc>
@@ -5304,7 +5304,7 @@
             </a:r>
           </a:p>
           <a:p>
-            <a:pPr>
+            <a:pPr algn="l">
               <a:lnSpc>
                 <a:spcPct val="95000"/>
               </a:lnSpc>
@@ -5969,7 +5969,7 @@
         <p:spPr>
           <a:xfrm>
             <a:off x="376700" y="15205502"/>
-            <a:ext cx="10282778" cy="2264156"/>
+            <a:ext cx="10282778" cy="1953006"/>
           </a:xfrm>
           <a:prstGeom prst="rect">
             <a:avLst/>
@@ -5985,7 +5985,7 @@
           <a:bodyPr spcFirstLastPara="1" wrap="square" lIns="164592" tIns="164592" rIns="164592" bIns="164592" anchor="t" anchorCtr="0"/>
           <a:lstStyle/>
           <a:p>
-            <a:pPr algn="just">
+            <a:pPr algn="l">
               <a:lnSpc>
                 <a:spcPct val="95000"/>
               </a:lnSpc>
@@ -6008,7 +6008,7 @@
             </a:r>
           </a:p>
           <a:p>
-            <a:pPr>
+            <a:pPr algn="l">
               <a:lnSpc>
                 <a:spcPct val="95000"/>
               </a:lnSpc>
@@ -6042,8 +6042,8 @@
         </p:nvSpPr>
         <p:spPr>
           <a:xfrm>
-            <a:off x="10965973" y="6605086"/>
-            <a:ext cx="10781748" cy="1304671"/>
+            <a:off x="10965973" y="6733102"/>
+            <a:ext cx="10781748" cy="1187767"/>
           </a:xfrm>
           <a:prstGeom prst="rect">
             <a:avLst/>
@@ -6059,7 +6059,7 @@
           <a:bodyPr spcFirstLastPara="1" wrap="square" lIns="164592" tIns="164592" rIns="164592" bIns="164592" anchor="t" anchorCtr="0"/>
           <a:lstStyle/>
           <a:p>
-            <a:pPr algn="just">
+            <a:pPr algn="l">
               <a:lnSpc>
                 <a:spcPct val="95000"/>
               </a:lnSpc>
@@ -6134,7 +6134,7 @@
               </a:spcAft>
             </a:pPr>
             <a:r>
-              <a:rPr sz="8000" b="1">
+              <a:rPr sz="6400" b="1">
                 <a:solidFill>
                   <a:srgbClr val="000000"/>
                 </a:solidFill>
@@ -6160,7 +6160,7 @@
         <p:spPr>
           <a:xfrm>
             <a:off x="22090621" y="5251774"/>
-            <a:ext cx="10397100" cy="2391156"/>
+            <a:ext cx="10397100" cy="2801493"/>
           </a:xfrm>
           <a:prstGeom prst="rect">
             <a:avLst/>
@@ -6176,7 +6176,7 @@
           <a:bodyPr spcFirstLastPara="1" wrap="square" lIns="164592" tIns="164592" rIns="164592" bIns="164592" anchor="t" anchorCtr="0"/>
           <a:lstStyle/>
           <a:p>
-            <a:pPr algn="just">
+            <a:pPr algn="l" marL="346710" indent="-346710">
               <a:lnSpc>
                 <a:spcPct val="95000"/>
               </a:lnSpc>
@@ -6199,7 +6199,7 @@
             </a:r>
           </a:p>
           <a:p>
-            <a:pPr>
+            <a:pPr algn="l" marL="346710" indent="-346710">
               <a:lnSpc>
                 <a:spcPct val="95000"/>
               </a:lnSpc>
@@ -6218,7 +6218,7 @@
             </a:r>
           </a:p>
           <a:p>
-            <a:pPr>
+            <a:pPr algn="l" marL="346710" indent="-346710">
               <a:lnSpc>
                 <a:spcPct val="95000"/>
               </a:lnSpc>
@@ -6253,7 +6253,7 @@
         <p:spPr>
           <a:xfrm>
             <a:off x="22090621" y="16218476"/>
-            <a:ext cx="10418660" cy="2820416"/>
+            <a:ext cx="10418660" cy="3257042"/>
           </a:xfrm>
           <a:prstGeom prst="rect">
             <a:avLst/>
@@ -6269,7 +6269,7 @@
           <a:bodyPr spcFirstLastPara="1" wrap="square" lIns="164592" tIns="164592" rIns="164592" bIns="164592" anchor="t" anchorCtr="0"/>
           <a:lstStyle/>
           <a:p>
-            <a:pPr algn="just">
+            <a:pPr algn="l">
               <a:lnSpc>
                 <a:spcPct val="90000"/>
               </a:lnSpc>
@@ -6298,7 +6298,7 @@
             </a:endParaRPr>
           </a:p>
           <a:p>
-            <a:pPr>
+            <a:pPr algn="l">
               <a:lnSpc>
                 <a:spcPct val="90000"/>
               </a:lnSpc>
@@ -6317,7 +6317,7 @@
             </a:r>
           </a:p>
           <a:p>
-            <a:pPr>
+            <a:pPr algn="l">
               <a:lnSpc>
                 <a:spcPct val="90000"/>
               </a:lnSpc>
@@ -6336,7 +6336,7 @@
             </a:r>
           </a:p>
           <a:p>
-            <a:pPr>
+            <a:pPr algn="l">
               <a:lnSpc>
                 <a:spcPct val="90000"/>
               </a:lnSpc>
@@ -6355,7 +6355,7 @@
             </a:r>
           </a:p>
           <a:p>
-            <a:pPr>
+            <a:pPr algn="l">
               <a:lnSpc>
                 <a:spcPct val="90000"/>
               </a:lnSpc>
@@ -6390,7 +6390,7 @@
         <p:spPr>
           <a:xfrm>
             <a:off x="22061036" y="21636297"/>
-            <a:ext cx="10480664" cy="1347216"/>
+            <a:ext cx="10480664" cy="1620012"/>
           </a:xfrm>
           <a:prstGeom prst="rect">
             <a:avLst/>
@@ -6406,7 +6406,7 @@
           <a:bodyPr spcFirstLastPara="1" wrap="square" lIns="164592" tIns="164592" rIns="164592" bIns="164592" anchor="t" anchorCtr="0"/>
           <a:lstStyle/>
           <a:p>
-            <a:pPr algn="just">
+            <a:pPr algn="l">
               <a:lnSpc>
                 <a:spcPct val="95000"/>
               </a:lnSpc>
@@ -6435,7 +6435,7 @@
             </a:endParaRPr>
           </a:p>
           <a:p>
-            <a:pPr>
+            <a:pPr algn="l">
               <a:lnSpc>
                 <a:spcPct val="95000"/>
               </a:lnSpc>
@@ -6493,8 +6493,8 @@
         </p:nvSpPr>
         <p:spPr>
           <a:xfrm>
-            <a:off x="376700" y="9135434"/>
-            <a:ext cx="10282778" cy="2555875"/>
+            <a:off x="376700" y="10094248"/>
+            <a:ext cx="10282778" cy="3047047"/>
           </a:xfrm>
           <a:prstGeom prst="rect">
             <a:avLst/>
@@ -6539,8 +6539,8 @@
         </p:nvSpPr>
         <p:spPr>
           <a:xfrm>
-            <a:off x="376700" y="9135434"/>
-            <a:ext cx="128016" cy="2555875"/>
+            <a:off x="376700" y="10094248"/>
+            <a:ext cx="128016" cy="3047047"/>
           </a:xfrm>
           <a:prstGeom prst="rect">
             <a:avLst/>
@@ -6583,8 +6583,8 @@
         </p:nvSpPr>
         <p:spPr>
           <a:xfrm>
-            <a:off x="614444" y="9208586"/>
-            <a:ext cx="9871298" cy="2409571"/>
+            <a:off x="614444" y="10167400"/>
+            <a:ext cx="9871298" cy="2900743"/>
           </a:xfrm>
           <a:prstGeom prst="rect">
             <a:avLst/>
@@ -6606,7 +6606,7 @@
               </a:spcAft>
             </a:pPr>
             <a:r>
-              <a:rPr sz="2100" b="0">
+              <a:rPr sz="2200" b="1">
                 <a:solidFill>
                   <a:srgbClr val="000000"/>
                 </a:solidFill>
@@ -6616,7 +6616,7 @@
             </a:r>
           </a:p>
           <a:p>
-            <a:pPr algn="l">
+            <a:pPr algn="l" marL="280035" indent="-280035">
               <a:lnSpc>
                 <a:spcPct val="95000"/>
               </a:lnSpc>
@@ -6635,7 +6635,7 @@
             </a:r>
           </a:p>
           <a:p>
-            <a:pPr algn="l">
+            <a:pPr algn="l" marL="280035" indent="-280035">
               <a:lnSpc>
                 <a:spcPct val="95000"/>
               </a:lnSpc>
@@ -6654,7 +6654,7 @@
             </a:r>
           </a:p>
           <a:p>
-            <a:pPr algn="l">
+            <a:pPr algn="l" marL="280035" indent="-280035">
               <a:lnSpc>
                 <a:spcPct val="95000"/>
               </a:lnSpc>
@@ -6682,7 +6682,7 @@
         </p:nvSpPr>
         <p:spPr>
           <a:xfrm>
-            <a:off x="422419" y="17561098"/>
+            <a:off x="422419" y="17249948"/>
             <a:ext cx="10191338" cy="676656"/>
           </a:xfrm>
           <a:prstGeom prst="rect">
@@ -6728,7 +6728,7 @@
         </p:nvSpPr>
         <p:spPr>
           <a:xfrm>
-            <a:off x="559580" y="17597674"/>
+            <a:off x="559580" y="17286524"/>
             <a:ext cx="2926080" cy="603504"/>
           </a:xfrm>
           <a:prstGeom prst="rect">
@@ -6770,7 +6770,7 @@
         </p:nvSpPr>
         <p:spPr>
           <a:xfrm>
-            <a:off x="3531380" y="17597674"/>
+            <a:off x="3531380" y="17286524"/>
             <a:ext cx="6899497" cy="603504"/>
           </a:xfrm>
           <a:prstGeom prst="rect">
@@ -6812,7 +6812,7 @@
         </p:nvSpPr>
         <p:spPr>
           <a:xfrm>
-            <a:off x="422419" y="18329194"/>
+            <a:off x="422419" y="18018044"/>
             <a:ext cx="10191338" cy="676656"/>
           </a:xfrm>
           <a:prstGeom prst="rect">
@@ -6858,7 +6858,7 @@
         </p:nvSpPr>
         <p:spPr>
           <a:xfrm>
-            <a:off x="559580" y="18365770"/>
+            <a:off x="559580" y="18054620"/>
             <a:ext cx="2926080" cy="603504"/>
           </a:xfrm>
           <a:prstGeom prst="rect">
@@ -6900,7 +6900,7 @@
         </p:nvSpPr>
         <p:spPr>
           <a:xfrm>
-            <a:off x="3531380" y="18365770"/>
+            <a:off x="3531380" y="18054620"/>
             <a:ext cx="6899497" cy="603504"/>
           </a:xfrm>
           <a:prstGeom prst="rect">
@@ -6942,7 +6942,7 @@
         </p:nvSpPr>
         <p:spPr>
           <a:xfrm>
-            <a:off x="422419" y="19097290"/>
+            <a:off x="422419" y="18786140"/>
             <a:ext cx="10191338" cy="676656"/>
           </a:xfrm>
           <a:prstGeom prst="rect">
@@ -6988,7 +6988,7 @@
         </p:nvSpPr>
         <p:spPr>
           <a:xfrm>
-            <a:off x="559580" y="19133866"/>
+            <a:off x="559580" y="18822716"/>
             <a:ext cx="2926080" cy="603504"/>
           </a:xfrm>
           <a:prstGeom prst="rect">
@@ -7030,7 +7030,7 @@
         </p:nvSpPr>
         <p:spPr>
           <a:xfrm>
-            <a:off x="3531380" y="19133866"/>
+            <a:off x="3531380" y="18822716"/>
             <a:ext cx="6899497" cy="603504"/>
           </a:xfrm>
           <a:prstGeom prst="rect">
@@ -7072,7 +7072,7 @@
         </p:nvSpPr>
         <p:spPr>
           <a:xfrm>
-            <a:off x="422419" y="19865386"/>
+            <a:off x="422419" y="19554236"/>
             <a:ext cx="10191338" cy="676656"/>
           </a:xfrm>
           <a:prstGeom prst="rect">
@@ -7118,7 +7118,7 @@
         </p:nvSpPr>
         <p:spPr>
           <a:xfrm>
-            <a:off x="559580" y="19901962"/>
+            <a:off x="559580" y="19590812"/>
             <a:ext cx="2926080" cy="603504"/>
           </a:xfrm>
           <a:prstGeom prst="rect">
@@ -7160,7 +7160,7 @@
         </p:nvSpPr>
         <p:spPr>
           <a:xfrm>
-            <a:off x="3531380" y="19901962"/>
+            <a:off x="3531380" y="19590812"/>
             <a:ext cx="6899497" cy="603504"/>
           </a:xfrm>
           <a:prstGeom prst="rect">
@@ -7202,8 +7202,8 @@
         </p:nvSpPr>
         <p:spPr>
           <a:xfrm>
-            <a:off x="376700" y="20724922"/>
-            <a:ext cx="10282778" cy="1823466"/>
+            <a:off x="376700" y="20413772"/>
+            <a:ext cx="10282778" cy="1826005"/>
           </a:xfrm>
           <a:prstGeom prst="rect">
             <a:avLst/>
@@ -7231,7 +7231,7 @@
                 </a:solidFill>
                 <a:latin typeface="Arial"/>
               </a:rPr>
-              <a:t>Missing data is recorded as unknown, never as zero. A facility counts as exposed if it is within 2.4 km of land rated High or Very High for wildfire, inside a FEMA regulatory floodplain, or at peak ground acceleration of 0.30 g or more.</a:t>
+              <a:t>Missing data is recorded as unknown, never as zero. A facility counts as exposed if it is within 2.4 km of land rated High or Very High for wildfire, inside a FEMA floodplain, or at peak ground acceleration of 0.30 g or more.</a:t>
             </a:r>
           </a:p>
         </p:txBody>
@@ -7245,7 +7245,7 @@
         <p:spPr>
           <a:xfrm>
             <a:off x="11011693" y="5251774"/>
-            <a:ext cx="2626857" cy="749808"/>
+            <a:ext cx="2626857" cy="896112"/>
           </a:xfrm>
           <a:prstGeom prst="rect">
             <a:avLst/>
@@ -7286,7 +7286,7 @@
         </p:nvSpPr>
         <p:spPr>
           <a:xfrm>
-            <a:off x="11011693" y="5965006"/>
+            <a:off x="11011693" y="6093022"/>
             <a:ext cx="2626857" cy="566928"/>
           </a:xfrm>
           <a:prstGeom prst="rect">
@@ -7329,7 +7329,7 @@
         <p:spPr>
           <a:xfrm>
             <a:off x="13711702" y="5251774"/>
-            <a:ext cx="2626857" cy="749808"/>
+            <a:ext cx="2626857" cy="896112"/>
           </a:xfrm>
           <a:prstGeom prst="rect">
             <a:avLst/>
@@ -7370,7 +7370,7 @@
         </p:nvSpPr>
         <p:spPr>
           <a:xfrm>
-            <a:off x="13711702" y="5965006"/>
+            <a:off x="13711702" y="6093022"/>
             <a:ext cx="2626857" cy="566928"/>
           </a:xfrm>
           <a:prstGeom prst="rect">
@@ -7413,7 +7413,7 @@
         <p:spPr>
           <a:xfrm>
             <a:off x="16411711" y="5251774"/>
-            <a:ext cx="2626857" cy="749808"/>
+            <a:ext cx="2626857" cy="896112"/>
           </a:xfrm>
           <a:prstGeom prst="rect">
             <a:avLst/>
@@ -7454,7 +7454,7 @@
         </p:nvSpPr>
         <p:spPr>
           <a:xfrm>
-            <a:off x="16411711" y="5965006"/>
+            <a:off x="16411711" y="6093022"/>
             <a:ext cx="2626857" cy="566928"/>
           </a:xfrm>
           <a:prstGeom prst="rect">
@@ -7497,7 +7497,7 @@
         <p:spPr>
           <a:xfrm>
             <a:off x="19111720" y="5251774"/>
-            <a:ext cx="2626857" cy="749808"/>
+            <a:ext cx="2626857" cy="896112"/>
           </a:xfrm>
           <a:prstGeom prst="rect">
             <a:avLst/>
@@ -7538,7 +7538,7 @@
         </p:nvSpPr>
         <p:spPr>
           <a:xfrm>
-            <a:off x="19111720" y="5965006"/>
+            <a:off x="19111720" y="6093022"/>
             <a:ext cx="2626857" cy="566928"/>
           </a:xfrm>
           <a:prstGeom prst="rect">
@@ -7588,7 +7588,7 @@
         </p:blipFill>
         <p:spPr>
           <a:xfrm>
-            <a:off x="10965973" y="8001197"/>
+            <a:off x="10965973" y="8012309"/>
             <a:ext cx="10781748" cy="4494943"/>
           </a:xfrm>
           <a:prstGeom prst="rect">
@@ -7604,8 +7604,8 @@
         </p:nvSpPr>
         <p:spPr>
           <a:xfrm>
-            <a:off x="10965973" y="12569292"/>
-            <a:ext cx="10781748" cy="785875"/>
+            <a:off x="10965973" y="12580404"/>
+            <a:ext cx="10781748" cy="993521"/>
           </a:xfrm>
           <a:prstGeom prst="rect">
             <a:avLst/>
@@ -7646,8 +7646,8 @@
         </p:nvSpPr>
         <p:spPr>
           <a:xfrm>
-            <a:off x="10965973" y="13446608"/>
-            <a:ext cx="10781748" cy="3018536"/>
+            <a:off x="10965973" y="13665365"/>
+            <a:ext cx="10781748" cy="3883723"/>
           </a:xfrm>
           <a:prstGeom prst="rect">
             <a:avLst/>
@@ -7675,7 +7675,7 @@
                 </a:solidFill>
                 <a:latin typeface="Arial"/>
               </a:rPr>
-              <a:t>Of 2,696 facilities, 1,742 face no mapped hazard and 205 face two or more. Eighteen states holding half the fleet sit below 10% exposed. Ten states holding a third sit above 60%.</a:t>
+              <a:t>Of 2,696 facilities, 1,742 face no mapped hazard and 205 face two or more. Among the 32 states holding 20 or more, 15 sit below 10% exposed and 10 sit above 60%. Only 7 lie in between, holding 12% of all facilities.</a:t>
             </a:r>
           </a:p>
           <a:p>
@@ -7713,7 +7713,7 @@
                 </a:solidFill>
                 <a:latin typeface="Arial"/>
               </a:rPr>
-              <a:t>Water stress is the exception that reaches Virginia. 952 facilities nationally sit in high or extremely-high stress basins.</a:t>
+              <a:t>Water stress is the exception that reaches Virginia: 31% of its facilities sit in high or extremely-high stress basins, against 0.7% for mapped hazards. Nationally 952 do.</a:t>
             </a:r>
           </a:p>
         </p:txBody>
@@ -7734,8 +7734,8 @@
         </p:blipFill>
         <p:spPr>
           <a:xfrm>
-            <a:off x="10965973" y="16556584"/>
-            <a:ext cx="10781748" cy="5086649"/>
+            <a:off x="10965973" y="17640529"/>
+            <a:ext cx="10781748" cy="4947413"/>
           </a:xfrm>
           <a:prstGeom prst="rect">
             <a:avLst/>
@@ -7750,8 +7750,8 @@
         </p:nvSpPr>
         <p:spPr>
           <a:xfrm>
-            <a:off x="10965973" y="21698096"/>
-            <a:ext cx="10781748" cy="520445"/>
+            <a:off x="10965973" y="22642806"/>
+            <a:ext cx="10781748" cy="993521"/>
           </a:xfrm>
           <a:prstGeom prst="rect">
             <a:avLst/>
@@ -7779,7 +7779,7 @@
                 </a:solidFill>
                 <a:latin typeface="Arial"/>
               </a:rPr>
-              <a:t>Fig 2. States split into two groups, with almost nothing between them.</a:t>
+              <a:t>Fig 2. The least and most exposed states. The middle of the range is sparsely occupied, not empty.</a:t>
             </a:r>
           </a:p>
         </p:txBody>
@@ -7792,8 +7792,8 @@
         </p:nvSpPr>
         <p:spPr>
           <a:xfrm>
-            <a:off x="22090621" y="7825810"/>
-            <a:ext cx="10397100" cy="1795144"/>
+            <a:off x="22090621" y="8236146"/>
+            <a:ext cx="10397100" cy="2182558"/>
           </a:xfrm>
           <a:prstGeom prst="rect">
             <a:avLst/>
@@ -7838,8 +7838,8 @@
         </p:nvSpPr>
         <p:spPr>
           <a:xfrm>
-            <a:off x="22090621" y="7825810"/>
-            <a:ext cx="128016" cy="1795144"/>
+            <a:off x="22090621" y="8236146"/>
+            <a:ext cx="128016" cy="2182558"/>
           </a:xfrm>
           <a:prstGeom prst="rect">
             <a:avLst/>
@@ -7882,8 +7882,8 @@
         </p:nvSpPr>
         <p:spPr>
           <a:xfrm>
-            <a:off x="22328365" y="7898962"/>
-            <a:ext cx="9985620" cy="1648841"/>
+            <a:off x="22328365" y="8309298"/>
+            <a:ext cx="9985620" cy="2036254"/>
           </a:xfrm>
           <a:prstGeom prst="rect">
             <a:avLst/>
@@ -7905,7 +7905,7 @@
               </a:spcAft>
             </a:pPr>
             <a:r>
-              <a:rPr sz="2100" b="0">
+              <a:rPr sz="2200" b="1">
                 <a:solidFill>
                   <a:srgbClr val="000000"/>
                 </a:solidFill>
@@ -7951,7 +7951,7 @@
         </p:blipFill>
         <p:spPr>
           <a:xfrm>
-            <a:off x="22090621" y="9748971"/>
+            <a:off x="22090621" y="10546721"/>
             <a:ext cx="10397100" cy="3904836"/>
           </a:xfrm>
           <a:prstGeom prst="rect">
@@ -7967,8 +7967,8 @@
         </p:nvSpPr>
         <p:spPr>
           <a:xfrm>
-            <a:off x="22090621" y="13690383"/>
-            <a:ext cx="10397100" cy="761746"/>
+            <a:off x="22090621" y="14488133"/>
+            <a:ext cx="10397100" cy="965771"/>
           </a:xfrm>
           <a:prstGeom prst="rect">
             <a:avLst/>

--- a/figures/Oughton_Avilash_Angirekula_2026ASSIP_Poster.pptx
+++ b/figures/Oughton_Avilash_Angirekula_2026ASSIP_Poster.pptx
@@ -5240,7 +5240,7 @@
         <p:spPr>
           <a:xfrm>
             <a:off x="376700" y="5251774"/>
-            <a:ext cx="10282778" cy="3883723"/>
+            <a:ext cx="10282778" cy="3649979"/>
           </a:xfrm>
           <a:prstGeom prst="rect">
             <a:avLst/>
@@ -5253,10 +5253,10 @@
           </a:ln>
         </p:spPr>
         <p:txBody>
-          <a:bodyPr spcFirstLastPara="1" wrap="square" lIns="164592" tIns="164592" rIns="164592" bIns="164592" anchor="t" anchorCtr="0"/>
-          <a:lstStyle/>
-          <a:p>
-            <a:pPr algn="l">
+          <a:bodyPr spcFirstLastPara="1" wrap="square" anchor="t" anchorCtr="0"/>
+          <a:lstStyle/>
+          <a:p>
+            <a:pPr algn="l" marL="346710" indent="-346710">
               <a:lnSpc>
                 <a:spcPct val="95000"/>
               </a:lnSpc>
@@ -5275,7 +5275,7 @@
                 </a:solidFill>
                 <a:latin typeface="Arial"/>
               </a:rPr>
-              <a:t>AI and cloud computing have concentrated enormous computing capacity into a small number of US locations. Those buildings face earthquakes, wildfire and flooding, but no open dataset records where they stand.</a:t>
+              <a:t>•  AI and cloud computing have concentrated US computing capacity into a few hundred sites.</a:t>
             </a:r>
             <a:endParaRPr sz="2600" dirty="0">
               <a:latin typeface="Palatino"/>
@@ -5285,7 +5285,7 @@
             </a:endParaRPr>
           </a:p>
           <a:p>
-            <a:pPr algn="l">
+            <a:pPr algn="l" marL="346710" indent="-346710">
               <a:lnSpc>
                 <a:spcPct val="95000"/>
               </a:lnSpc>
@@ -5300,11 +5300,11 @@
                 </a:solidFill>
                 <a:latin typeface="Arial"/>
               </a:rPr>
-              <a:t>Existing sources are proprietary, aggregated above the building level, or unverified. Without building-level locations, no one can measure what US computing infrastructure is exposed to.</a:t>
-            </a:r>
-          </a:p>
-          <a:p>
-            <a:pPr algn="l">
+              <a:t>•  Those sites face earthquakes, wildfire and flooding, but no open dataset records where they physically stand.</a:t>
+            </a:r>
+          </a:p>
+          <a:p>
+            <a:pPr algn="l" marL="346710" indent="-346710">
               <a:lnSpc>
                 <a:spcPct val="95000"/>
               </a:lnSpc>
@@ -5319,7 +5319,26 @@
                 </a:solidFill>
                 <a:latin typeface="Arial"/>
               </a:rPr>
-              <a:t>These are EXPOSURE values, not risk. No vulnerability term is applied, so nothing here is a damage or loss estimate.</a:t>
+              <a:t>•  Existing sources are proprietary, aggregated above the building level, or unverified.</a:t>
+            </a:r>
+          </a:p>
+          <a:p>
+            <a:pPr algn="l" marL="346710" indent="-346710">
+              <a:lnSpc>
+                <a:spcPct val="95000"/>
+              </a:lnSpc>
+              <a:spcAft>
+                <a:spcPts val="1000"/>
+              </a:spcAft>
+            </a:pPr>
+            <a:r>
+              <a:rPr sz="2600" b="0">
+                <a:solidFill>
+                  <a:srgbClr val="000000"/>
+                </a:solidFill>
+                <a:latin typeface="Arial"/>
+              </a:rPr>
+              <a:t>•  We measured exposure: whether a facility sits in a hazard zone. We did not model damage, so nothing here is a loss estimate.</a:t>
             </a:r>
           </a:p>
         </p:txBody>
@@ -5475,7 +5494,7 @@
           </a:ln>
         </p:spPr>
         <p:txBody>
-          <a:bodyPr spcFirstLastPara="1" wrap="square" lIns="65826" tIns="32904" rIns="65826" bIns="32904" anchor="t" anchorCtr="0"/>
+          <a:bodyPr spcFirstLastPara="1" wrap="square" anchor="t" anchorCtr="0"/>
           <a:lstStyle/>
           <a:p>
             <a:pPr algn="ctr">
@@ -5604,7 +5623,7 @@
           </a:ln>
         </p:spPr>
         <p:txBody>
-          <a:bodyPr spcFirstLastPara="1" wrap="square" lIns="65826" tIns="32904" rIns="65826" bIns="32904" anchor="t" anchorCtr="0"/>
+          <a:bodyPr spcFirstLastPara="1" wrap="square" anchor="t" anchorCtr="0"/>
           <a:lstStyle/>
           <a:p>
             <a:pPr algn="ctr">
@@ -5969,7 +5988,7 @@
         <p:spPr>
           <a:xfrm>
             <a:off x="376700" y="15205502"/>
-            <a:ext cx="10282778" cy="1953006"/>
+            <a:ext cx="10282778" cy="2313749"/>
           </a:xfrm>
           <a:prstGeom prst="rect">
             <a:avLst/>
@@ -5982,7 +6001,7 @@
           </a:ln>
         </p:spPr>
         <p:txBody>
-          <a:bodyPr spcFirstLastPara="1" wrap="square" lIns="164592" tIns="164592" rIns="164592" bIns="164592" anchor="t" anchorCtr="0"/>
+          <a:bodyPr spcFirstLastPara="1" wrap="square" anchor="t" anchorCtr="0"/>
           <a:lstStyle/>
           <a:p>
             <a:pPr algn="l">
@@ -6004,7 +6023,7 @@
                 </a:solidFill>
                 <a:latin typeface="Arial"/>
               </a:rPr>
-              <a:t>A reproducible Python pipeline merges OpenStreetMap, PeeringDB and Wikidata, removes duplicate records, and grades every coordinate against an independent building-footprint dataset.</a:t>
+              <a:t>We merged OpenStreetMap, PeeringDB and Wikidata into one row per site. Records within 60 m with matching fuzzy names are unioned, campus siblings are kept apart, and every merge is logged.</a:t>
             </a:r>
           </a:p>
           <a:p>
@@ -6023,7 +6042,7 @@
                 </a:solidFill>
                 <a:latin typeface="Arial"/>
               </a:rPr>
-              <a:t>Hazards are then read at each facility from official sources:</a:t>
+              <a:t>We then graded each coordinate against FEMA USA Structures building footprints and sampled hazards in an equal-area projection:</a:t>
             </a:r>
           </a:p>
         </p:txBody>
@@ -6042,7 +6061,7 @@
         </p:nvSpPr>
         <p:spPr>
           <a:xfrm>
-            <a:off x="10965973" y="6733102"/>
+            <a:off x="10965973" y="6952558"/>
             <a:ext cx="10781748" cy="1187767"/>
           </a:xfrm>
           <a:prstGeom prst="rect">
@@ -6056,7 +6075,7 @@
           </a:ln>
         </p:spPr>
         <p:txBody>
-          <a:bodyPr spcFirstLastPara="1" wrap="square" lIns="164592" tIns="164592" rIns="164592" bIns="164592" anchor="t" anchorCtr="0"/>
+          <a:bodyPr spcFirstLastPara="1" wrap="square" anchor="t" anchorCtr="0"/>
           <a:lstStyle/>
           <a:p>
             <a:pPr algn="l">
@@ -6078,7 +6097,7 @@
                 </a:solidFill>
                 <a:latin typeface="Arial"/>
               </a:rPr>
-              <a:t>Hazard exposure is bimodal. It is decided by which cluster a facility sits in, not by anything about data centers.</a:t>
+              <a:t>Where a facility sits predicts its hazard exposure far better than anything about the facility itself.</a:t>
             </a:r>
           </a:p>
         </p:txBody>
@@ -6134,13 +6153,13 @@
               </a:spcAft>
             </a:pPr>
             <a:r>
-              <a:rPr sz="6400" b="1">
+              <a:rPr sz="7800" b="1">
                 <a:solidFill>
                   <a:srgbClr val="000000"/>
                 </a:solidFill>
                 <a:latin typeface="Arial"/>
               </a:rPr>
-              <a:t>Two Americas of Data Center Hazard: 2,696 US Facilities Mapped</a:t>
+              <a:t>A Multi-Hazard Assessment of 2,696 US Data Centers</a:t>
             </a:r>
           </a:p>
         </p:txBody>
@@ -6160,7 +6179,7 @@
         <p:spPr>
           <a:xfrm>
             <a:off x="22090621" y="5251774"/>
-            <a:ext cx="10397100" cy="2801493"/>
+            <a:ext cx="10397100" cy="2928493"/>
           </a:xfrm>
           <a:prstGeom prst="rect">
             <a:avLst/>
@@ -6173,7 +6192,7 @@
           </a:ln>
         </p:spPr>
         <p:txBody>
-          <a:bodyPr spcFirstLastPara="1" wrap="square" lIns="164592" tIns="164592" rIns="164592" bIns="164592" anchor="t" anchorCtr="0"/>
+          <a:bodyPr spcFirstLastPara="1" wrap="square" anchor="t" anchorCtr="0"/>
           <a:lstStyle/>
           <a:p>
             <a:pPr algn="l" marL="346710" indent="-346710">
@@ -6195,7 +6214,7 @@
                 </a:solidFill>
                 <a:latin typeface="Arial"/>
               </a:rPr>
-              <a:t>•  A national average describes no real facility. Exposure is concentrated in a nameable minority of places.</a:t>
+              <a:t>•  The national 35% figure describes no real state.</a:t>
             </a:r>
           </a:p>
           <a:p>
@@ -6214,7 +6233,7 @@
                 </a:solidFill>
                 <a:latin typeface="Arial"/>
               </a:rPr>
-              <a:t>•  The industry has clustered in the low-exposure half of the country. That is a finding about siting.</a:t>
+              <a:t>•  Most sit in low-exposure regions, but we did not test why. Power price and fiber routes are likelier drivers than hazard avoidance.</a:t>
             </a:r>
           </a:p>
           <a:p>
@@ -6233,7 +6252,26 @@
                 </a:solidFill>
                 <a:latin typeface="Arial"/>
               </a:rPr>
-              <a:t>•  Next: fragility curves for server and cooling equipment, to turn exposure into estimated loss.</a:t>
+              <a:t>•  Two states can both read 100% and face different hazards, so a combined index must keep them separate.</a:t>
+            </a:r>
+          </a:p>
+          <a:p>
+            <a:pPr algn="l" marL="346710" indent="-346710">
+              <a:lnSpc>
+                <a:spcPct val="95000"/>
+              </a:lnSpc>
+              <a:spcAft>
+                <a:spcPts val="1000"/>
+              </a:spcAft>
+            </a:pPr>
+            <a:r>
+              <a:rPr sz="2600" b="0">
+                <a:solidFill>
+                  <a:srgbClr val="000000"/>
+                </a:solidFill>
+                <a:latin typeface="Arial"/>
+              </a:rPr>
+              <a:t>•  Next: fragility curves to turn exposure into estimated loss.</a:t>
             </a:r>
           </a:p>
         </p:txBody>
@@ -6253,7 +6291,7 @@
         <p:spPr>
           <a:xfrm>
             <a:off x="22090621" y="16218476"/>
-            <a:ext cx="10418660" cy="3257042"/>
+            <a:ext cx="10418660" cy="3646932"/>
           </a:xfrm>
           <a:prstGeom prst="rect">
             <a:avLst/>
@@ -6266,7 +6304,7 @@
           </a:ln>
         </p:spPr>
         <p:txBody>
-          <a:bodyPr spcFirstLastPara="1" wrap="square" lIns="164592" tIns="164592" rIns="164592" bIns="164592" anchor="t" anchorCtr="0"/>
+          <a:bodyPr spcFirstLastPara="1" wrap="square" anchor="t" anchorCtr="0"/>
           <a:lstStyle/>
           <a:p>
             <a:pPr algn="l">
@@ -6352,6 +6390,25 @@
                 <a:latin typeface="Arial"/>
               </a:rPr>
               <a:t>Oughton, E.J. and Weigel, R. (2026) A Comparative Multi-Hazard Risk Assessment of the US High-Voltage Transmission Network. Zenodo. doi:10.5281/zenodo.20331026 (CC BY 4.0)</a:t>
+            </a:r>
+          </a:p>
+          <a:p>
+            <a:pPr algn="l">
+              <a:lnSpc>
+                <a:spcPct val="90000"/>
+              </a:lnSpc>
+              <a:spcAft>
+                <a:spcPts val="1000"/>
+              </a:spcAft>
+            </a:pPr>
+            <a:r>
+              <a:rPr sz="2000" b="0">
+                <a:solidFill>
+                  <a:srgbClr val="333333"/>
+                </a:solidFill>
+                <a:latin typeface="Arial"/>
+              </a:rPr>
+              <a:t>FEMA and ORNL (2024) USA Structures. gis.fema.gov</a:t>
             </a:r>
           </a:p>
           <a:p>
@@ -6403,7 +6460,7 @@
           </a:ln>
         </p:spPr>
         <p:txBody>
-          <a:bodyPr spcFirstLastPara="1" wrap="square" lIns="164592" tIns="164592" rIns="164592" bIns="164592" anchor="t" anchorCtr="0"/>
+          <a:bodyPr spcFirstLastPara="1" wrap="square" anchor="t" anchorCtr="0"/>
           <a:lstStyle/>
           <a:p>
             <a:pPr algn="l">
@@ -6425,7 +6482,7 @@
                 </a:solidFill>
                 <a:latin typeface="Arial"/>
               </a:rPr>
-              <a:t>This research was made possible through the support of George Mason University's College of Science, which supports the ASSIP Program. Thanks to Prof. Edward Oughton for supervision and to Dennies Bor for the multi-hazard layers.</a:t>
+              <a:t>This research was made possible through the support of George Mason University's College of Science, which supports the ASSIP Program, and by the NCAR multi-hazards project.</a:t>
             </a:r>
             <a:endParaRPr sz="2600" i="1" dirty="0">
               <a:latin typeface="Arial" panose="020B0604020202020204" pitchFamily="34" charset="0"/>
@@ -6493,8 +6550,8 @@
         </p:nvSpPr>
         <p:spPr>
           <a:xfrm>
-            <a:off x="376700" y="10094248"/>
-            <a:ext cx="10282778" cy="3047047"/>
+            <a:off x="376700" y="9139498"/>
+            <a:ext cx="10282778" cy="4979892"/>
           </a:xfrm>
           <a:prstGeom prst="rect">
             <a:avLst/>
@@ -6539,8 +6596,8 @@
         </p:nvSpPr>
         <p:spPr>
           <a:xfrm>
-            <a:off x="376700" y="10094248"/>
-            <a:ext cx="128016" cy="3047047"/>
+            <a:off x="376700" y="9139498"/>
+            <a:ext cx="128016" cy="4979892"/>
           </a:xfrm>
           <a:prstGeom prst="rect">
             <a:avLst/>
@@ -6583,8 +6640,8 @@
         </p:nvSpPr>
         <p:spPr>
           <a:xfrm>
-            <a:off x="614444" y="10167400"/>
-            <a:ext cx="9871298" cy="2900743"/>
+            <a:off x="614444" y="9212650"/>
+            <a:ext cx="9871298" cy="4833588"/>
           </a:xfrm>
           <a:prstGeom prst="rect">
             <a:avLst/>
@@ -6606,7 +6663,7 @@
               </a:spcAft>
             </a:pPr>
             <a:r>
-              <a:rPr sz="2200" b="1">
+              <a:rPr sz="2500" b="1">
                 <a:solidFill>
                   <a:srgbClr val="000000"/>
                 </a:solidFill>
@@ -6616,7 +6673,7 @@
             </a:r>
           </a:p>
           <a:p>
-            <a:pPr algn="l" marL="280035" indent="-280035">
+            <a:pPr algn="l" marL="320040" indent="-320040">
               <a:lnSpc>
                 <a:spcPct val="95000"/>
               </a:lnSpc>
@@ -6625,17 +6682,17 @@
               </a:spcAft>
             </a:pPr>
             <a:r>
-              <a:rPr sz="2100" b="0">
+              <a:rPr sz="2400" b="0">
                 <a:solidFill>
                   <a:srgbClr val="000000"/>
                 </a:solidFill>
                 <a:latin typeface="Arial"/>
               </a:rPr>
-              <a:t>•  Hail and wind rates track observer density (+0.39, +0.34 within state) and are excluded from every result shown.</a:t>
-            </a:r>
-          </a:p>
-          <a:p>
-            <a:pPr algn="l" marL="280035" indent="-280035">
+              <a:t>•  Coverage is incomplete. Open sources list 2,696 US facilities where commercial directories list several thousand, and mapping density varies by state.</a:t>
+            </a:r>
+          </a:p>
+          <a:p>
+            <a:pPr algn="l" marL="320040" indent="-320040">
               <a:lnSpc>
                 <a:spcPct val="95000"/>
               </a:lnSpc>
@@ -6644,17 +6701,17 @@
               </a:spcAft>
             </a:pPr>
             <a:r>
-              <a:rPr sz="2100" b="0">
+              <a:rPr sz="2400" b="0">
                 <a:solidFill>
                   <a:srgbClr val="000000"/>
                 </a:solidFill>
                 <a:latin typeface="Arial"/>
               </a:rPr>
-              <a:t>•  Power capacity is unrecorded for all 2,696, so every statistic is a facility count, not a capacity share.</a:t>
-            </a:r>
-          </a:p>
-          <a:p>
-            <a:pPr algn="l" marL="280035" indent="-280035">
+              <a:t>•  Hail and wind reports rise with observer density (Spearman 0.39 and 0.34 within state), so we excluded both.</a:t>
+            </a:r>
+          </a:p>
+          <a:p>
+            <a:pPr algn="l" marL="320040" indent="-320040">
               <a:lnSpc>
                 <a:spcPct val="95000"/>
               </a:lnSpc>
@@ -6663,13 +6720,51 @@
               </a:spcAft>
             </a:pPr>
             <a:r>
-              <a:rPr sz="2100" b="0">
+              <a:rPr sz="2400" b="0">
                 <a:solidFill>
                   <a:srgbClr val="000000"/>
                 </a:solidFill>
                 <a:latin typeface="Arial"/>
               </a:rPr>
-              <a:t>•  234 coordinates match a building only beyond 200 m. Under 500-draw positional error, 2,067 facilities never change class.</a:t>
+              <a:t>•  Power capacity is unrecorded, so we count facilities, never megawatts.</a:t>
+            </a:r>
+          </a:p>
+          <a:p>
+            <a:pPr algn="l" marL="320040" indent="-320040">
+              <a:lnSpc>
+                <a:spcPct val="95000"/>
+              </a:lnSpc>
+              <a:spcAft>
+                <a:spcPts val="800"/>
+              </a:spcAft>
+            </a:pPr>
+            <a:r>
+              <a:rPr sz="2400" b="0">
+                <a:solidFill>
+                  <a:srgbClr val="000000"/>
+                </a:solidFill>
+                <a:latin typeface="Arial"/>
+              </a:rPr>
+              <a:t>•  48 facilities shown as facing no hazard sit outside FEMA's mapped extent, so 35% is a floor.</a:t>
+            </a:r>
+          </a:p>
+          <a:p>
+            <a:pPr algn="l" marL="320040" indent="-320040">
+              <a:lnSpc>
+                <a:spcPct val="95000"/>
+              </a:lnSpc>
+              <a:spcAft>
+                <a:spcPts val="800"/>
+              </a:spcAft>
+            </a:pPr>
+            <a:r>
+              <a:rPr sz="2400" b="0">
+                <a:solidFill>
+                  <a:srgbClr val="000000"/>
+                </a:solidFill>
+                <a:latin typeface="Arial"/>
+              </a:rPr>
+              <a:t>•  Across 500 relocations, 1,681 sites never changed wildfire class.</a:t>
             </a:r>
           </a:p>
         </p:txBody>
@@ -6682,7 +6777,7 @@
         </p:nvSpPr>
         <p:spPr>
           <a:xfrm>
-            <a:off x="422419" y="17249948"/>
+            <a:off x="422419" y="17610691"/>
             <a:ext cx="10191338" cy="676656"/>
           </a:xfrm>
           <a:prstGeom prst="rect">
@@ -6728,7 +6823,7 @@
         </p:nvSpPr>
         <p:spPr>
           <a:xfrm>
-            <a:off x="559580" y="17286524"/>
+            <a:off x="559580" y="17647267"/>
             <a:ext cx="2926080" cy="603504"/>
           </a:xfrm>
           <a:prstGeom prst="rect">
@@ -6770,7 +6865,7 @@
         </p:nvSpPr>
         <p:spPr>
           <a:xfrm>
-            <a:off x="3531380" y="17286524"/>
+            <a:off x="3531380" y="17647267"/>
             <a:ext cx="6899497" cy="603504"/>
           </a:xfrm>
           <a:prstGeom prst="rect">
@@ -6799,7 +6894,7 @@
                 </a:solidFill>
                 <a:latin typeface="Arial"/>
               </a:rPr>
-              <a:t>USGS ASCE 7-22 point service</a:t>
+              <a:t>USGS ASCE 7-22, MCE_G PGA, site class BC</a:t>
             </a:r>
           </a:p>
         </p:txBody>
@@ -6812,7 +6907,7 @@
         </p:nvSpPr>
         <p:spPr>
           <a:xfrm>
-            <a:off x="422419" y="18018044"/>
+            <a:off x="422419" y="18378787"/>
             <a:ext cx="10191338" cy="676656"/>
           </a:xfrm>
           <a:prstGeom prst="rect">
@@ -6858,7 +6953,7 @@
         </p:nvSpPr>
         <p:spPr>
           <a:xfrm>
-            <a:off x="559580" y="18054620"/>
+            <a:off x="559580" y="18415363"/>
             <a:ext cx="2926080" cy="603504"/>
           </a:xfrm>
           <a:prstGeom prst="rect">
@@ -6900,7 +6995,7 @@
         </p:nvSpPr>
         <p:spPr>
           <a:xfrm>
-            <a:off x="3531380" y="18054620"/>
+            <a:off x="3531380" y="18415363"/>
             <a:ext cx="6899497" cy="603504"/>
           </a:xfrm>
           <a:prstGeom prst="rect">
@@ -6929,7 +7024,7 @@
                 </a:solidFill>
                 <a:latin typeface="Arial"/>
               </a:rPr>
-              <a:t>USFS Hazard Potential, 270 m</a:t>
+              <a:t>USFS Hazard Potential 270 m, max in 2.4 km</a:t>
             </a:r>
           </a:p>
         </p:txBody>
@@ -6942,7 +7037,7 @@
         </p:nvSpPr>
         <p:spPr>
           <a:xfrm>
-            <a:off x="422419" y="18786140"/>
+            <a:off x="422419" y="19146883"/>
             <a:ext cx="10191338" cy="676656"/>
           </a:xfrm>
           <a:prstGeom prst="rect">
@@ -6988,7 +7083,7 @@
         </p:nvSpPr>
         <p:spPr>
           <a:xfrm>
-            <a:off x="559580" y="18822716"/>
+            <a:off x="559580" y="19183459"/>
             <a:ext cx="2926080" cy="603504"/>
           </a:xfrm>
           <a:prstGeom prst="rect">
@@ -7030,7 +7125,7 @@
         </p:nvSpPr>
         <p:spPr>
           <a:xfrm>
-            <a:off x="3531380" y="18822716"/>
+            <a:off x="3531380" y="19183459"/>
             <a:ext cx="6899497" cy="603504"/>
           </a:xfrm>
           <a:prstGeom prst="rect">
@@ -7059,7 +7154,7 @@
                 </a:solidFill>
                 <a:latin typeface="Arial"/>
               </a:rPr>
-              <a:t>FEMA National Flood Hazard Layer</a:t>
+              <a:t>FEMA NFHL layer 28, SFHA flag</a:t>
             </a:r>
           </a:p>
         </p:txBody>
@@ -7072,7 +7167,7 @@
         </p:nvSpPr>
         <p:spPr>
           <a:xfrm>
-            <a:off x="422419" y="19554236"/>
+            <a:off x="422419" y="19914979"/>
             <a:ext cx="10191338" cy="676656"/>
           </a:xfrm>
           <a:prstGeom prst="rect">
@@ -7118,7 +7213,7 @@
         </p:nvSpPr>
         <p:spPr>
           <a:xfrm>
-            <a:off x="559580" y="19590812"/>
+            <a:off x="559580" y="19951555"/>
             <a:ext cx="2926080" cy="603504"/>
           </a:xfrm>
           <a:prstGeom prst="rect">
@@ -7160,7 +7255,7 @@
         </p:nvSpPr>
         <p:spPr>
           <a:xfrm>
-            <a:off x="3531380" y="19590812"/>
+            <a:off x="3531380" y="19951555"/>
             <a:ext cx="6899497" cy="603504"/>
           </a:xfrm>
           <a:prstGeom prst="rect">
@@ -7189,611 +7284,21 @@
                 </a:solidFill>
                 <a:latin typeface="Arial"/>
               </a:rPr>
-              <a:t>WRI Aqueduct 4.0</a:t>
-            </a:r>
-          </a:p>
-        </p:txBody>
-      </p:sp>
-      <p:sp>
-        <p:nvSpPr>
-          <p:cNvPr id="147" name="TextBox 146"/>
-          <p:cNvSpPr txBox="1"/>
-          <p:nvPr/>
-        </p:nvSpPr>
-        <p:spPr>
-          <a:xfrm>
-            <a:off x="376700" y="20413772"/>
-            <a:ext cx="10282778" cy="1826005"/>
-          </a:xfrm>
-          <a:prstGeom prst="rect">
-            <a:avLst/>
-          </a:prstGeom>
-          <a:noFill/>
-        </p:spPr>
-        <p:txBody>
-          <a:bodyPr wrap="square" anchor="t" tIns="36576" bIns="36576">
-            <a:spAutoFit/>
-          </a:bodyPr>
-          <a:lstStyle/>
-          <a:p>
-            <a:pPr algn="l">
-              <a:lnSpc>
-                <a:spcPct val="95000"/>
-              </a:lnSpc>
-              <a:spcAft>
-                <a:spcPts val="800"/>
-              </a:spcAft>
-            </a:pPr>
-            <a:r>
-              <a:rPr sz="2600" b="0">
-                <a:solidFill>
-                  <a:srgbClr val="000000"/>
-                </a:solidFill>
-                <a:latin typeface="Arial"/>
-              </a:rPr>
-              <a:t>Missing data is recorded as unknown, never as zero. A facility counts as exposed if it is within 2.4 km of land rated High or Very High for wildfire, inside a FEMA floodplain, or at peak ground acceleration of 0.30 g or more.</a:t>
-            </a:r>
-          </a:p>
-        </p:txBody>
-      </p:sp>
-      <p:sp>
-        <p:nvSpPr>
-          <p:cNvPr id="148" name="TextBox 147"/>
-          <p:cNvSpPr txBox="1"/>
-          <p:nvPr/>
-        </p:nvSpPr>
-        <p:spPr>
-          <a:xfrm>
-            <a:off x="11011693" y="5251774"/>
-            <a:ext cx="2626857" cy="896112"/>
-          </a:xfrm>
-          <a:prstGeom prst="rect">
-            <a:avLst/>
-          </a:prstGeom>
-          <a:noFill/>
-        </p:spPr>
-        <p:txBody>
-          <a:bodyPr wrap="square" anchor="t" tIns="36576" bIns="36576">
-            <a:spAutoFit/>
-          </a:bodyPr>
-          <a:lstStyle/>
-          <a:p>
-            <a:pPr algn="ctr">
-              <a:lnSpc>
-                <a:spcPct val="95000"/>
-              </a:lnSpc>
-              <a:spcAft>
-                <a:spcPts val="800"/>
-              </a:spcAft>
-            </a:pPr>
-            <a:r>
-              <a:rPr sz="4800" b="1">
-                <a:solidFill>
-                  <a:srgbClr val="006600"/>
-                </a:solidFill>
-                <a:latin typeface="Arial"/>
-              </a:rPr>
-              <a:t>2,696</a:t>
-            </a:r>
-          </a:p>
-        </p:txBody>
-      </p:sp>
-      <p:sp>
-        <p:nvSpPr>
-          <p:cNvPr id="149" name="TextBox 148"/>
-          <p:cNvSpPr txBox="1"/>
-          <p:nvPr/>
-        </p:nvSpPr>
-        <p:spPr>
-          <a:xfrm>
-            <a:off x="11011693" y="6093022"/>
-            <a:ext cx="2626857" cy="566928"/>
-          </a:xfrm>
-          <a:prstGeom prst="rect">
-            <a:avLst/>
-          </a:prstGeom>
-          <a:noFill/>
-        </p:spPr>
-        <p:txBody>
-          <a:bodyPr wrap="square" anchor="t" tIns="36576" bIns="36576">
-            <a:spAutoFit/>
-          </a:bodyPr>
-          <a:lstStyle/>
-          <a:p>
-            <a:pPr algn="ctr">
-              <a:lnSpc>
-                <a:spcPct val="95000"/>
-              </a:lnSpc>
-              <a:spcAft>
-                <a:spcPts val="800"/>
-              </a:spcAft>
-            </a:pPr>
-            <a:r>
-              <a:rPr sz="1900" b="0">
-                <a:solidFill>
-                  <a:srgbClr val="333333"/>
-                </a:solidFill>
-                <a:latin typeface="Arial"/>
-              </a:rPr>
-              <a:t>facilities mapped</a:t>
-            </a:r>
-          </a:p>
-        </p:txBody>
-      </p:sp>
-      <p:sp>
-        <p:nvSpPr>
-          <p:cNvPr id="150" name="TextBox 149"/>
-          <p:cNvSpPr txBox="1"/>
-          <p:nvPr/>
-        </p:nvSpPr>
-        <p:spPr>
-          <a:xfrm>
-            <a:off x="13711702" y="5251774"/>
-            <a:ext cx="2626857" cy="896112"/>
-          </a:xfrm>
-          <a:prstGeom prst="rect">
-            <a:avLst/>
-          </a:prstGeom>
-          <a:noFill/>
-        </p:spPr>
-        <p:txBody>
-          <a:bodyPr wrap="square" anchor="t" tIns="36576" bIns="36576">
-            <a:spAutoFit/>
-          </a:bodyPr>
-          <a:lstStyle/>
-          <a:p>
-            <a:pPr algn="ctr">
-              <a:lnSpc>
-                <a:spcPct val="95000"/>
-              </a:lnSpc>
-              <a:spcAft>
-                <a:spcPts val="800"/>
-              </a:spcAft>
-            </a:pPr>
-            <a:r>
-              <a:rPr sz="4800" b="1">
-                <a:solidFill>
-                  <a:srgbClr val="006600"/>
-                </a:solidFill>
-                <a:latin typeface="Arial"/>
-              </a:rPr>
-              <a:t>1,681</a:t>
-            </a:r>
-          </a:p>
-        </p:txBody>
-      </p:sp>
-      <p:sp>
-        <p:nvSpPr>
-          <p:cNvPr id="151" name="TextBox 150"/>
-          <p:cNvSpPr txBox="1"/>
-          <p:nvPr/>
-        </p:nvSpPr>
-        <p:spPr>
-          <a:xfrm>
-            <a:off x="13711702" y="6093022"/>
-            <a:ext cx="2626857" cy="566928"/>
-          </a:xfrm>
-          <a:prstGeom prst="rect">
-            <a:avLst/>
-          </a:prstGeom>
-          <a:noFill/>
-        </p:spPr>
-        <p:txBody>
-          <a:bodyPr wrap="square" anchor="t" tIns="36576" bIns="36576">
-            <a:spAutoFit/>
-          </a:bodyPr>
-          <a:lstStyle/>
-          <a:p>
-            <a:pPr algn="ctr">
-              <a:lnSpc>
-                <a:spcPct val="95000"/>
-              </a:lnSpc>
-              <a:spcAft>
-                <a:spcPts val="800"/>
-              </a:spcAft>
-            </a:pPr>
-            <a:r>
-              <a:rPr sz="1900" b="0">
-                <a:solidFill>
-                  <a:srgbClr val="333333"/>
-                </a:solidFill>
-                <a:latin typeface="Arial"/>
-              </a:rPr>
-              <a:t>on a building footprint</a:t>
-            </a:r>
-          </a:p>
-        </p:txBody>
-      </p:sp>
-      <p:sp>
-        <p:nvSpPr>
-          <p:cNvPr id="152" name="TextBox 151"/>
-          <p:cNvSpPr txBox="1"/>
-          <p:nvPr/>
-        </p:nvSpPr>
-        <p:spPr>
-          <a:xfrm>
-            <a:off x="16411711" y="5251774"/>
-            <a:ext cx="2626857" cy="896112"/>
-          </a:xfrm>
-          <a:prstGeom prst="rect">
-            <a:avLst/>
-          </a:prstGeom>
-          <a:noFill/>
-        </p:spPr>
-        <p:txBody>
-          <a:bodyPr wrap="square" anchor="t" tIns="36576" bIns="36576">
-            <a:spAutoFit/>
-          </a:bodyPr>
-          <a:lstStyle/>
-          <a:p>
-            <a:pPr algn="ctr">
-              <a:lnSpc>
-                <a:spcPct val="95000"/>
-              </a:lnSpc>
-              <a:spcAft>
-                <a:spcPts val="800"/>
-              </a:spcAft>
-            </a:pPr>
-            <a:r>
-              <a:rPr sz="4800" b="1">
-                <a:solidFill>
-                  <a:srgbClr val="006600"/>
-                </a:solidFill>
-                <a:latin typeface="Arial"/>
-              </a:rPr>
-              <a:t>35%</a:t>
-            </a:r>
-          </a:p>
-        </p:txBody>
-      </p:sp>
-      <p:sp>
-        <p:nvSpPr>
-          <p:cNvPr id="153" name="TextBox 152"/>
-          <p:cNvSpPr txBox="1"/>
-          <p:nvPr/>
-        </p:nvSpPr>
-        <p:spPr>
-          <a:xfrm>
-            <a:off x="16411711" y="6093022"/>
-            <a:ext cx="2626857" cy="566928"/>
-          </a:xfrm>
-          <a:prstGeom prst="rect">
-            <a:avLst/>
-          </a:prstGeom>
-          <a:noFill/>
-        </p:spPr>
-        <p:txBody>
-          <a:bodyPr wrap="square" anchor="t" tIns="36576" bIns="36576">
-            <a:spAutoFit/>
-          </a:bodyPr>
-          <a:lstStyle/>
-          <a:p>
-            <a:pPr algn="ctr">
-              <a:lnSpc>
-                <a:spcPct val="95000"/>
-              </a:lnSpc>
-              <a:spcAft>
-                <a:spcPts val="800"/>
-              </a:spcAft>
-            </a:pPr>
-            <a:r>
-              <a:rPr sz="1900" b="0">
-                <a:solidFill>
-                  <a:srgbClr val="333333"/>
-                </a:solidFill>
-                <a:latin typeface="Arial"/>
-              </a:rPr>
-              <a:t>face a mapped hazard</a:t>
-            </a:r>
-          </a:p>
-        </p:txBody>
-      </p:sp>
-      <p:sp>
-        <p:nvSpPr>
-          <p:cNvPr id="154" name="TextBox 153"/>
-          <p:cNvSpPr txBox="1"/>
-          <p:nvPr/>
-        </p:nvSpPr>
-        <p:spPr>
-          <a:xfrm>
-            <a:off x="19111720" y="5251774"/>
-            <a:ext cx="2626857" cy="896112"/>
-          </a:xfrm>
-          <a:prstGeom prst="rect">
-            <a:avLst/>
-          </a:prstGeom>
-          <a:noFill/>
-        </p:spPr>
-        <p:txBody>
-          <a:bodyPr wrap="square" anchor="t" tIns="36576" bIns="36576">
-            <a:spAutoFit/>
-          </a:bodyPr>
-          <a:lstStyle/>
-          <a:p>
-            <a:pPr algn="ctr">
-              <a:lnSpc>
-                <a:spcPct val="95000"/>
-              </a:lnSpc>
-              <a:spcAft>
-                <a:spcPts val="800"/>
-              </a:spcAft>
-            </a:pPr>
-            <a:r>
-              <a:rPr sz="4800" b="1">
-                <a:solidFill>
-                  <a:srgbClr val="006600"/>
-                </a:solidFill>
-                <a:latin typeface="Arial"/>
-              </a:rPr>
-              <a:t>0.7%</a:t>
-            </a:r>
-          </a:p>
-        </p:txBody>
-      </p:sp>
-      <p:sp>
-        <p:nvSpPr>
-          <p:cNvPr id="155" name="TextBox 154"/>
-          <p:cNvSpPr txBox="1"/>
-          <p:nvPr/>
-        </p:nvSpPr>
-        <p:spPr>
-          <a:xfrm>
-            <a:off x="19111720" y="6093022"/>
-            <a:ext cx="2626857" cy="566928"/>
-          </a:xfrm>
-          <a:prstGeom prst="rect">
-            <a:avLst/>
-          </a:prstGeom>
-          <a:noFill/>
-        </p:spPr>
-        <p:txBody>
-          <a:bodyPr wrap="square" anchor="t" tIns="36576" bIns="36576">
-            <a:spAutoFit/>
-          </a:bodyPr>
-          <a:lstStyle/>
-          <a:p>
-            <a:pPr algn="ctr">
-              <a:lnSpc>
-                <a:spcPct val="95000"/>
-              </a:lnSpc>
-              <a:spcAft>
-                <a:spcPts val="800"/>
-              </a:spcAft>
-            </a:pPr>
-            <a:r>
-              <a:rPr sz="1900" b="0">
-                <a:solidFill>
-                  <a:srgbClr val="333333"/>
-                </a:solidFill>
-                <a:latin typeface="Arial"/>
-              </a:rPr>
-              <a:t>of Virginia's 409</a:t>
-            </a:r>
-          </a:p>
-        </p:txBody>
-      </p:sp>
-      <p:pic>
-        <p:nvPicPr>
-          <p:cNvPr id="156" name="Picture 155" descr="fig1_map.png"/>
-          <p:cNvPicPr>
-            <a:picLocks noChangeAspect="1"/>
-          </p:cNvPicPr>
-          <p:nvPr/>
-        </p:nvPicPr>
-        <p:blipFill>
-          <a:blip r:embed="rId5"/>
-          <a:stretch>
-            <a:fillRect/>
-          </a:stretch>
-        </p:blipFill>
-        <p:spPr>
-          <a:xfrm>
-            <a:off x="10965973" y="8012309"/>
-            <a:ext cx="10781748" cy="4494943"/>
-          </a:xfrm>
-          <a:prstGeom prst="rect">
-            <a:avLst/>
-          </a:prstGeom>
-        </p:spPr>
-      </p:pic>
-      <p:sp>
-        <p:nvSpPr>
-          <p:cNvPr id="157" name="TextBox 156"/>
-          <p:cNvSpPr txBox="1"/>
-          <p:nvPr/>
-        </p:nvSpPr>
-        <p:spPr>
-          <a:xfrm>
-            <a:off x="10965973" y="12580404"/>
-            <a:ext cx="10781748" cy="993521"/>
-          </a:xfrm>
-          <a:prstGeom prst="rect">
-            <a:avLst/>
-          </a:prstGeom>
-          <a:noFill/>
-        </p:spPr>
-        <p:txBody>
-          <a:bodyPr wrap="square" anchor="t" tIns="36576" bIns="36576">
-            <a:spAutoFit/>
-          </a:bodyPr>
-          <a:lstStyle/>
-          <a:p>
-            <a:pPr algn="l">
-              <a:lnSpc>
-                <a:spcPct val="95000"/>
-              </a:lnSpc>
-              <a:spcAft>
-                <a:spcPts val="800"/>
-              </a:spcAft>
-            </a:pPr>
-            <a:r>
-              <a:rPr sz="2200" b="1">
-                <a:solidFill>
-                  <a:srgbClr val="000000"/>
-                </a:solidFill>
-                <a:latin typeface="Arial"/>
-              </a:rPr>
-              <a:t>Fig 1. Two thirds of US data centers face no mapped hazard. Exposure is regional, not universal.</a:t>
-            </a:r>
-          </a:p>
-        </p:txBody>
-      </p:sp>
-      <p:sp>
-        <p:nvSpPr>
-          <p:cNvPr id="158" name="TextBox 157"/>
-          <p:cNvSpPr txBox="1"/>
-          <p:nvPr/>
-        </p:nvSpPr>
-        <p:spPr>
-          <a:xfrm>
-            <a:off x="10965973" y="13665365"/>
-            <a:ext cx="10781748" cy="3883723"/>
-          </a:xfrm>
-          <a:prstGeom prst="rect">
-            <a:avLst/>
-          </a:prstGeom>
-          <a:noFill/>
-        </p:spPr>
-        <p:txBody>
-          <a:bodyPr wrap="square" anchor="t" tIns="36576" bIns="36576">
-            <a:spAutoFit/>
-          </a:bodyPr>
-          <a:lstStyle/>
-          <a:p>
-            <a:pPr algn="l">
-              <a:lnSpc>
-                <a:spcPct val="95000"/>
-              </a:lnSpc>
-              <a:spcAft>
-                <a:spcPts val="800"/>
-              </a:spcAft>
-            </a:pPr>
-            <a:r>
-              <a:rPr sz="2600" b="0">
-                <a:solidFill>
-                  <a:srgbClr val="000000"/>
-                </a:solidFill>
-                <a:latin typeface="Arial"/>
-              </a:rPr>
-              <a:t>Of 2,696 facilities, 1,742 face no mapped hazard and 205 face two or more. Among the 32 states holding 20 or more, 15 sit below 10% exposed and 10 sit above 60%. Only 7 lie in between, holding 12% of all facilities.</a:t>
-            </a:r>
-          </a:p>
-          <a:p>
-            <a:pPr algn="l">
-              <a:lnSpc>
-                <a:spcPct val="95000"/>
-              </a:lnSpc>
-              <a:spcAft>
-                <a:spcPts val="800"/>
-              </a:spcAft>
-            </a:pPr>
-            <a:r>
-              <a:rPr sz="2600" b="0">
-                <a:solidFill>
-                  <a:srgbClr val="000000"/>
-                </a:solidFill>
-                <a:latin typeface="Arial"/>
-              </a:rPr>
-              <a:t>Virginia, the largest concentration on Earth, is 0.7% exposed. California and New Jersey are 100%.</a:t>
-            </a:r>
-          </a:p>
-          <a:p>
-            <a:pPr algn="l">
-              <a:lnSpc>
-                <a:spcPct val="95000"/>
-              </a:lnSpc>
-              <a:spcAft>
-                <a:spcPts val="800"/>
-              </a:spcAft>
-            </a:pPr>
-            <a:r>
-              <a:rPr sz="2600" b="0">
-                <a:solidFill>
-                  <a:srgbClr val="000000"/>
-                </a:solidFill>
-                <a:latin typeface="Arial"/>
-              </a:rPr>
-              <a:t>Water stress is the exception that reaches Virginia: 31% of its facilities sit in high or extremely-high stress basins, against 0.7% for mapped hazards. Nationally 952 do.</a:t>
-            </a:r>
-          </a:p>
-        </p:txBody>
-      </p:sp>
-      <p:pic>
-        <p:nvPicPr>
-          <p:cNvPr id="159" name="Picture 158" descr="fig2_states.png"/>
-          <p:cNvPicPr>
-            <a:picLocks noChangeAspect="1"/>
-          </p:cNvPicPr>
-          <p:nvPr/>
-        </p:nvPicPr>
-        <p:blipFill>
-          <a:blip r:embed="rId6"/>
-          <a:stretch>
-            <a:fillRect/>
-          </a:stretch>
-        </p:blipFill>
-        <p:spPr>
-          <a:xfrm>
-            <a:off x="10965973" y="17640529"/>
-            <a:ext cx="10781748" cy="4947413"/>
-          </a:xfrm>
-          <a:prstGeom prst="rect">
-            <a:avLst/>
-          </a:prstGeom>
-        </p:spPr>
-      </p:pic>
-      <p:sp>
-        <p:nvSpPr>
-          <p:cNvPr id="160" name="TextBox 159"/>
-          <p:cNvSpPr txBox="1"/>
-          <p:nvPr/>
-        </p:nvSpPr>
-        <p:spPr>
-          <a:xfrm>
-            <a:off x="10965973" y="22642806"/>
-            <a:ext cx="10781748" cy="993521"/>
-          </a:xfrm>
-          <a:prstGeom prst="rect">
-            <a:avLst/>
-          </a:prstGeom>
-          <a:noFill/>
-        </p:spPr>
-        <p:txBody>
-          <a:bodyPr wrap="square" anchor="t" tIns="36576" bIns="36576">
-            <a:spAutoFit/>
-          </a:bodyPr>
-          <a:lstStyle/>
-          <a:p>
-            <a:pPr algn="l">
-              <a:lnSpc>
-                <a:spcPct val="95000"/>
-              </a:lnSpc>
-              <a:spcAft>
-                <a:spcPts val="800"/>
-              </a:spcAft>
-            </a:pPr>
-            <a:r>
-              <a:rPr sz="2200" b="1">
-                <a:solidFill>
-                  <a:srgbClr val="000000"/>
-                </a:solidFill>
-                <a:latin typeface="Arial"/>
-              </a:rPr>
-              <a:t>Fig 2. The least and most exposed states. The middle of the range is sparsely occupied, not empty.</a:t>
-            </a:r>
-          </a:p>
-        </p:txBody>
-      </p:sp>
-      <p:sp>
-        <p:nvSpPr>
-          <p:cNvPr id="161" name="Rectangle 160"/>
+              <a:t>WRI Aqueduct 4.0 (a resource limit, not a hazard)</a:t>
+            </a:r>
+          </a:p>
+        </p:txBody>
+      </p:sp>
+      <p:sp>
+        <p:nvSpPr>
+          <p:cNvPr id="147" name="Rectangle 146"/>
           <p:cNvSpPr/>
           <p:nvPr/>
         </p:nvSpPr>
         <p:spPr>
           <a:xfrm>
-            <a:off x="22090621" y="8236146"/>
-            <a:ext cx="10397100" cy="2182558"/>
+            <a:off x="422419" y="20683075"/>
+            <a:ext cx="10191338" cy="676656"/>
           </a:xfrm>
           <a:prstGeom prst="rect">
             <a:avLst/>
@@ -7832,23 +7337,699 @@
       </p:sp>
       <p:sp>
         <p:nvSpPr>
-          <p:cNvPr id="162" name="Rectangle 161"/>
+          <p:cNvPr id="148" name="TextBox 147"/>
+          <p:cNvSpPr txBox="1"/>
+          <p:nvPr/>
+        </p:nvSpPr>
+        <p:spPr>
+          <a:xfrm>
+            <a:off x="559580" y="20719651"/>
+            <a:ext cx="2926080" cy="603504"/>
+          </a:xfrm>
+          <a:prstGeom prst="rect">
+            <a:avLst/>
+          </a:prstGeom>
+          <a:noFill/>
+        </p:spPr>
+        <p:txBody>
+          <a:bodyPr wrap="square" anchor="ctr" tIns="36576" bIns="36576">
+            <a:spAutoFit/>
+          </a:bodyPr>
+          <a:lstStyle/>
+          <a:p>
+            <a:pPr algn="l">
+              <a:lnSpc>
+                <a:spcPct val="95000"/>
+              </a:lnSpc>
+              <a:spcAft>
+                <a:spcPts val="800"/>
+              </a:spcAft>
+            </a:pPr>
+            <a:r>
+              <a:rPr sz="2400" b="1">
+                <a:solidFill>
+                  <a:srgbClr val="000000"/>
+                </a:solidFill>
+                <a:latin typeface="Arial"/>
+              </a:rPr>
+              <a:t>Uncertainty</a:t>
+            </a:r>
+          </a:p>
+        </p:txBody>
+      </p:sp>
+      <p:sp>
+        <p:nvSpPr>
+          <p:cNvPr id="149" name="TextBox 148"/>
+          <p:cNvSpPr txBox="1"/>
+          <p:nvPr/>
+        </p:nvSpPr>
+        <p:spPr>
+          <a:xfrm>
+            <a:off x="3531380" y="20719651"/>
+            <a:ext cx="6899497" cy="603504"/>
+          </a:xfrm>
+          <a:prstGeom prst="rect">
+            <a:avLst/>
+          </a:prstGeom>
+          <a:noFill/>
+        </p:spPr>
+        <p:txBody>
+          <a:bodyPr wrap="square" anchor="ctr" tIns="36576" bIns="36576">
+            <a:spAutoFit/>
+          </a:bodyPr>
+          <a:lstStyle/>
+          <a:p>
+            <a:pPr algn="l">
+              <a:lnSpc>
+                <a:spcPct val="95000"/>
+              </a:lnSpc>
+              <a:spcAft>
+                <a:spcPts val="800"/>
+              </a:spcAft>
+            </a:pPr>
+            <a:r>
+              <a:rPr sz="2200" b="0">
+                <a:solidFill>
+                  <a:srgbClr val="333333"/>
+                </a:solidFill>
+                <a:latin typeface="Arial"/>
+              </a:rPr>
+              <a:t>500 draws, sigma 10-500 m by coordinate tier</a:t>
+            </a:r>
+          </a:p>
+        </p:txBody>
+      </p:sp>
+      <p:sp>
+        <p:nvSpPr>
+          <p:cNvPr id="150" name="TextBox 149"/>
+          <p:cNvSpPr txBox="1"/>
+          <p:nvPr/>
+        </p:nvSpPr>
+        <p:spPr>
+          <a:xfrm>
+            <a:off x="376700" y="21542611"/>
+            <a:ext cx="10282778" cy="2186749"/>
+          </a:xfrm>
+          <a:prstGeom prst="rect">
+            <a:avLst/>
+          </a:prstGeom>
+          <a:noFill/>
+        </p:spPr>
+        <p:txBody>
+          <a:bodyPr wrap="square" anchor="t" tIns="36576" bIns="36576">
+            <a:spAutoFit/>
+          </a:bodyPr>
+          <a:lstStyle/>
+          <a:p>
+            <a:pPr algn="l">
+              <a:lnSpc>
+                <a:spcPct val="95000"/>
+              </a:lnSpc>
+              <a:spcAft>
+                <a:spcPts val="800"/>
+              </a:spcAft>
+            </a:pPr>
+            <a:r>
+              <a:rPr sz="2600" b="0">
+                <a:solidFill>
+                  <a:srgbClr val="000000"/>
+                </a:solidFill>
+                <a:latin typeface="Arial"/>
+              </a:rPr>
+              <a:t>A facility counts as exposed if it lies within 2.4 km of land rated High or Very High for wildfire, inside a FEMA Special Flood Hazard Area, or at peak ground acceleration of 0.30 g or above (2% chance in 50 years). Where a hazard layer has no value we record it as unknown rather than counting the site as safe.</a:t>
+            </a:r>
+          </a:p>
+        </p:txBody>
+      </p:sp>
+      <p:sp>
+        <p:nvSpPr>
+          <p:cNvPr id="151" name="TextBox 150"/>
+          <p:cNvSpPr txBox="1"/>
+          <p:nvPr/>
+        </p:nvSpPr>
+        <p:spPr>
+          <a:xfrm>
+            <a:off x="11011693" y="5251774"/>
+            <a:ext cx="2626857" cy="896112"/>
+          </a:xfrm>
+          <a:prstGeom prst="rect">
+            <a:avLst/>
+          </a:prstGeom>
+          <a:noFill/>
+        </p:spPr>
+        <p:txBody>
+          <a:bodyPr wrap="square" anchor="t" tIns="36576" bIns="36576">
+            <a:spAutoFit/>
+          </a:bodyPr>
+          <a:lstStyle/>
+          <a:p>
+            <a:pPr algn="ctr">
+              <a:lnSpc>
+                <a:spcPct val="95000"/>
+              </a:lnSpc>
+              <a:spcAft>
+                <a:spcPts val="800"/>
+              </a:spcAft>
+            </a:pPr>
+            <a:r>
+              <a:rPr sz="4800" b="1">
+                <a:solidFill>
+                  <a:srgbClr val="006600"/>
+                </a:solidFill>
+                <a:latin typeface="Arial"/>
+              </a:rPr>
+              <a:t>65%</a:t>
+            </a:r>
+          </a:p>
+        </p:txBody>
+      </p:sp>
+      <p:sp>
+        <p:nvSpPr>
+          <p:cNvPr id="152" name="TextBox 151"/>
+          <p:cNvSpPr txBox="1"/>
+          <p:nvPr/>
+        </p:nvSpPr>
+        <p:spPr>
+          <a:xfrm>
+            <a:off x="11011693" y="6093022"/>
+            <a:ext cx="2626857" cy="786384"/>
+          </a:xfrm>
+          <a:prstGeom prst="rect">
+            <a:avLst/>
+          </a:prstGeom>
+          <a:noFill/>
+        </p:spPr>
+        <p:txBody>
+          <a:bodyPr wrap="square" anchor="t" tIns="36576" bIns="36576">
+            <a:spAutoFit/>
+          </a:bodyPr>
+          <a:lstStyle/>
+          <a:p>
+            <a:pPr algn="ctr">
+              <a:lnSpc>
+                <a:spcPct val="95000"/>
+              </a:lnSpc>
+              <a:spcAft>
+                <a:spcPts val="800"/>
+              </a:spcAft>
+            </a:pPr>
+            <a:r>
+              <a:rPr sz="2000" b="0">
+                <a:solidFill>
+                  <a:srgbClr val="333333"/>
+                </a:solidFill>
+                <a:latin typeface="Arial"/>
+              </a:rPr>
+              <a:t>face no mapped hazard</a:t>
+            </a:r>
+          </a:p>
+        </p:txBody>
+      </p:sp>
+      <p:sp>
+        <p:nvSpPr>
+          <p:cNvPr id="153" name="TextBox 152"/>
+          <p:cNvSpPr txBox="1"/>
+          <p:nvPr/>
+        </p:nvSpPr>
+        <p:spPr>
+          <a:xfrm>
+            <a:off x="13711702" y="5251774"/>
+            <a:ext cx="2626857" cy="896112"/>
+          </a:xfrm>
+          <a:prstGeom prst="rect">
+            <a:avLst/>
+          </a:prstGeom>
+          <a:noFill/>
+        </p:spPr>
+        <p:txBody>
+          <a:bodyPr wrap="square" anchor="t" tIns="36576" bIns="36576">
+            <a:spAutoFit/>
+          </a:bodyPr>
+          <a:lstStyle/>
+          <a:p>
+            <a:pPr algn="ctr">
+              <a:lnSpc>
+                <a:spcPct val="95000"/>
+              </a:lnSpc>
+              <a:spcAft>
+                <a:spcPts val="800"/>
+              </a:spcAft>
+            </a:pPr>
+            <a:r>
+              <a:rPr sz="4800" b="1">
+                <a:solidFill>
+                  <a:srgbClr val="006600"/>
+                </a:solidFill>
+                <a:latin typeface="Arial"/>
+              </a:rPr>
+              <a:t>15</a:t>
+            </a:r>
+          </a:p>
+        </p:txBody>
+      </p:sp>
+      <p:sp>
+        <p:nvSpPr>
+          <p:cNvPr id="154" name="TextBox 153"/>
+          <p:cNvSpPr txBox="1"/>
+          <p:nvPr/>
+        </p:nvSpPr>
+        <p:spPr>
+          <a:xfrm>
+            <a:off x="13711702" y="6093022"/>
+            <a:ext cx="2626857" cy="786384"/>
+          </a:xfrm>
+          <a:prstGeom prst="rect">
+            <a:avLst/>
+          </a:prstGeom>
+          <a:noFill/>
+        </p:spPr>
+        <p:txBody>
+          <a:bodyPr wrap="square" anchor="t" tIns="36576" bIns="36576">
+            <a:spAutoFit/>
+          </a:bodyPr>
+          <a:lstStyle/>
+          <a:p>
+            <a:pPr algn="ctr">
+              <a:lnSpc>
+                <a:spcPct val="95000"/>
+              </a:lnSpc>
+              <a:spcAft>
+                <a:spcPts val="800"/>
+              </a:spcAft>
+            </a:pPr>
+            <a:r>
+              <a:rPr sz="2000" b="0">
+                <a:solidFill>
+                  <a:srgbClr val="333333"/>
+                </a:solidFill>
+                <a:latin typeface="Arial"/>
+              </a:rPr>
+              <a:t>states below 10% exposed</a:t>
+            </a:r>
+          </a:p>
+        </p:txBody>
+      </p:sp>
+      <p:sp>
+        <p:nvSpPr>
+          <p:cNvPr id="155" name="TextBox 154"/>
+          <p:cNvSpPr txBox="1"/>
+          <p:nvPr/>
+        </p:nvSpPr>
+        <p:spPr>
+          <a:xfrm>
+            <a:off x="16411711" y="5251774"/>
+            <a:ext cx="2626857" cy="896112"/>
+          </a:xfrm>
+          <a:prstGeom prst="rect">
+            <a:avLst/>
+          </a:prstGeom>
+          <a:noFill/>
+        </p:spPr>
+        <p:txBody>
+          <a:bodyPr wrap="square" anchor="t" tIns="36576" bIns="36576">
+            <a:spAutoFit/>
+          </a:bodyPr>
+          <a:lstStyle/>
+          <a:p>
+            <a:pPr algn="ctr">
+              <a:lnSpc>
+                <a:spcPct val="95000"/>
+              </a:lnSpc>
+              <a:spcAft>
+                <a:spcPts val="800"/>
+              </a:spcAft>
+            </a:pPr>
+            <a:r>
+              <a:rPr sz="4800" b="1">
+                <a:solidFill>
+                  <a:srgbClr val="006600"/>
+                </a:solidFill>
+                <a:latin typeface="Arial"/>
+              </a:rPr>
+              <a:t>10</a:t>
+            </a:r>
+          </a:p>
+        </p:txBody>
+      </p:sp>
+      <p:sp>
+        <p:nvSpPr>
+          <p:cNvPr id="156" name="TextBox 155"/>
+          <p:cNvSpPr txBox="1"/>
+          <p:nvPr/>
+        </p:nvSpPr>
+        <p:spPr>
+          <a:xfrm>
+            <a:off x="16411711" y="6093022"/>
+            <a:ext cx="2626857" cy="786384"/>
+          </a:xfrm>
+          <a:prstGeom prst="rect">
+            <a:avLst/>
+          </a:prstGeom>
+          <a:noFill/>
+        </p:spPr>
+        <p:txBody>
+          <a:bodyPr wrap="square" anchor="t" tIns="36576" bIns="36576">
+            <a:spAutoFit/>
+          </a:bodyPr>
+          <a:lstStyle/>
+          <a:p>
+            <a:pPr algn="ctr">
+              <a:lnSpc>
+                <a:spcPct val="95000"/>
+              </a:lnSpc>
+              <a:spcAft>
+                <a:spcPts val="800"/>
+              </a:spcAft>
+            </a:pPr>
+            <a:r>
+              <a:rPr sz="2000" b="0">
+                <a:solidFill>
+                  <a:srgbClr val="333333"/>
+                </a:solidFill>
+                <a:latin typeface="Arial"/>
+              </a:rPr>
+              <a:t>states above 60%</a:t>
+            </a:r>
+          </a:p>
+        </p:txBody>
+      </p:sp>
+      <p:sp>
+        <p:nvSpPr>
+          <p:cNvPr id="157" name="TextBox 156"/>
+          <p:cNvSpPr txBox="1"/>
+          <p:nvPr/>
+        </p:nvSpPr>
+        <p:spPr>
+          <a:xfrm>
+            <a:off x="19111720" y="5251774"/>
+            <a:ext cx="2626857" cy="896112"/>
+          </a:xfrm>
+          <a:prstGeom prst="rect">
+            <a:avLst/>
+          </a:prstGeom>
+          <a:noFill/>
+        </p:spPr>
+        <p:txBody>
+          <a:bodyPr wrap="square" anchor="t" tIns="36576" bIns="36576">
+            <a:spAutoFit/>
+          </a:bodyPr>
+          <a:lstStyle/>
+          <a:p>
+            <a:pPr algn="ctr">
+              <a:lnSpc>
+                <a:spcPct val="95000"/>
+              </a:lnSpc>
+              <a:spcAft>
+                <a:spcPts val="800"/>
+              </a:spcAft>
+            </a:pPr>
+            <a:r>
+              <a:rPr sz="4800" b="1">
+                <a:solidFill>
+                  <a:srgbClr val="006600"/>
+                </a:solidFill>
+                <a:latin typeface="Arial"/>
+              </a:rPr>
+              <a:t>2,696</a:t>
+            </a:r>
+          </a:p>
+        </p:txBody>
+      </p:sp>
+      <p:sp>
+        <p:nvSpPr>
+          <p:cNvPr id="158" name="TextBox 157"/>
+          <p:cNvSpPr txBox="1"/>
+          <p:nvPr/>
+        </p:nvSpPr>
+        <p:spPr>
+          <a:xfrm>
+            <a:off x="19111720" y="6093022"/>
+            <a:ext cx="2626857" cy="786384"/>
+          </a:xfrm>
+          <a:prstGeom prst="rect">
+            <a:avLst/>
+          </a:prstGeom>
+          <a:noFill/>
+        </p:spPr>
+        <p:txBody>
+          <a:bodyPr wrap="square" anchor="t" tIns="36576" bIns="36576">
+            <a:spAutoFit/>
+          </a:bodyPr>
+          <a:lstStyle/>
+          <a:p>
+            <a:pPr algn="ctr">
+              <a:lnSpc>
+                <a:spcPct val="95000"/>
+              </a:lnSpc>
+              <a:spcAft>
+                <a:spcPts val="800"/>
+              </a:spcAft>
+            </a:pPr>
+            <a:r>
+              <a:rPr sz="2000" b="0">
+                <a:solidFill>
+                  <a:srgbClr val="333333"/>
+                </a:solidFill>
+                <a:latin typeface="Arial"/>
+              </a:rPr>
+              <a:t>facilities mapped</a:t>
+            </a:r>
+          </a:p>
+        </p:txBody>
+      </p:sp>
+      <p:pic>
+        <p:nvPicPr>
+          <p:cNvPr id="159" name="Picture 158" descr="fig1_map.png"/>
+          <p:cNvPicPr>
+            <a:picLocks noChangeAspect="1"/>
+          </p:cNvPicPr>
+          <p:nvPr/>
+        </p:nvPicPr>
+        <p:blipFill>
+          <a:blip r:embed="rId5"/>
+          <a:stretch>
+            <a:fillRect/>
+          </a:stretch>
+        </p:blipFill>
+        <p:spPr>
+          <a:xfrm>
+            <a:off x="10965973" y="8231765"/>
+            <a:ext cx="10781748" cy="5086182"/>
+          </a:xfrm>
+          <a:prstGeom prst="rect">
+            <a:avLst/>
+          </a:prstGeom>
+        </p:spPr>
+      </p:pic>
+      <p:sp>
+        <p:nvSpPr>
+          <p:cNvPr id="160" name="TextBox 159"/>
+          <p:cNvSpPr txBox="1"/>
+          <p:nvPr/>
+        </p:nvSpPr>
+        <p:spPr>
+          <a:xfrm>
+            <a:off x="10965973" y="13391100"/>
+            <a:ext cx="10781748" cy="993521"/>
+          </a:xfrm>
+          <a:prstGeom prst="rect">
+            <a:avLst/>
+          </a:prstGeom>
+          <a:noFill/>
+        </p:spPr>
+        <p:txBody>
+          <a:bodyPr wrap="square" anchor="t" tIns="36576" bIns="36576">
+            <a:spAutoFit/>
+          </a:bodyPr>
+          <a:lstStyle/>
+          <a:p>
+            <a:pPr algn="l">
+              <a:lnSpc>
+                <a:spcPct val="95000"/>
+              </a:lnSpc>
+              <a:spcAft>
+                <a:spcPts val="800"/>
+              </a:spcAft>
+            </a:pPr>
+            <a:r>
+              <a:rPr sz="2200" b="1">
+                <a:solidFill>
+                  <a:srgbClr val="000000"/>
+                </a:solidFill>
+                <a:latin typeface="Arial"/>
+              </a:rPr>
+              <a:t>Fig 1. Two thirds of US data centers face no mapped hazard. The exposed ones cluster in the West and the Northeast.</a:t>
+            </a:r>
+          </a:p>
+        </p:txBody>
+      </p:sp>
+      <p:sp>
+        <p:nvSpPr>
+          <p:cNvPr id="161" name="TextBox 160"/>
+          <p:cNvSpPr txBox="1"/>
+          <p:nvPr/>
+        </p:nvSpPr>
+        <p:spPr>
+          <a:xfrm>
+            <a:off x="10965973" y="14476061"/>
+            <a:ext cx="10781748" cy="3522979"/>
+          </a:xfrm>
+          <a:prstGeom prst="rect">
+            <a:avLst/>
+          </a:prstGeom>
+          <a:noFill/>
+        </p:spPr>
+        <p:txBody>
+          <a:bodyPr wrap="square" anchor="t" tIns="36576" bIns="36576">
+            <a:spAutoFit/>
+          </a:bodyPr>
+          <a:lstStyle/>
+          <a:p>
+            <a:pPr algn="l">
+              <a:lnSpc>
+                <a:spcPct val="95000"/>
+              </a:lnSpc>
+              <a:spcAft>
+                <a:spcPts val="800"/>
+              </a:spcAft>
+            </a:pPr>
+            <a:r>
+              <a:rPr sz="2600" b="0">
+                <a:solidFill>
+                  <a:srgbClr val="000000"/>
+                </a:solidFill>
+                <a:latin typeface="Arial"/>
+              </a:rPr>
+              <a:t>Which hazard dominates changes by region. New Jersey reaches 100% entirely through wildfire and 0% through earthquake. California is 96% earthquake. Nationally wildfire drives 646 facilities, earthquake 448, flood only 71.</a:t>
+            </a:r>
+          </a:p>
+          <a:p>
+            <a:pPr algn="l">
+              <a:lnSpc>
+                <a:spcPct val="95000"/>
+              </a:lnSpc>
+              <a:spcAft>
+                <a:spcPts val="800"/>
+              </a:spcAft>
+            </a:pPr>
+            <a:r>
+              <a:rPr sz="2600" b="0">
+                <a:solidFill>
+                  <a:srgbClr val="000000"/>
+                </a:solidFill>
+                <a:latin typeface="Arial"/>
+              </a:rPr>
+              <a:t>Water stress is the one hazard that reaches Virginia. 31% of its facilities sit in high-stress basins, against 0.7% for mapped hazards.</a:t>
+            </a:r>
+          </a:p>
+          <a:p>
+            <a:pPr algn="l">
+              <a:lnSpc>
+                <a:spcPct val="95000"/>
+              </a:lnSpc>
+              <a:spcAft>
+                <a:spcPts val="800"/>
+              </a:spcAft>
+            </a:pPr>
+            <a:r>
+              <a:rPr sz="2600" b="0">
+                <a:solidFill>
+                  <a:srgbClr val="000000"/>
+                </a:solidFill>
+                <a:latin typeface="Arial"/>
+              </a:rPr>
+              <a:t>At a 5 km wildfire buffer the national count rises to 953, more than one third of the fleet.</a:t>
+            </a:r>
+          </a:p>
+        </p:txBody>
+      </p:sp>
+      <p:pic>
+        <p:nvPicPr>
+          <p:cNvPr id="162" name="Picture 161" descr="fig2_states.png"/>
+          <p:cNvPicPr>
+            <a:picLocks noChangeAspect="1"/>
+          </p:cNvPicPr>
+          <p:nvPr/>
+        </p:nvPicPr>
+        <p:blipFill>
+          <a:blip r:embed="rId6"/>
+          <a:stretch>
+            <a:fillRect/>
+          </a:stretch>
+        </p:blipFill>
+        <p:spPr>
+          <a:xfrm>
+            <a:off x="10965973" y="18090481"/>
+            <a:ext cx="10781748" cy="4238557"/>
+          </a:xfrm>
+          <a:prstGeom prst="rect">
+            <a:avLst/>
+          </a:prstGeom>
+        </p:spPr>
+      </p:pic>
+      <p:sp>
+        <p:nvSpPr>
+          <p:cNvPr id="163" name="TextBox 162"/>
+          <p:cNvSpPr txBox="1"/>
+          <p:nvPr/>
+        </p:nvSpPr>
+        <p:spPr>
+          <a:xfrm>
+            <a:off x="10965973" y="22383902"/>
+            <a:ext cx="10781748" cy="993521"/>
+          </a:xfrm>
+          <a:prstGeom prst="rect">
+            <a:avLst/>
+          </a:prstGeom>
+          <a:noFill/>
+        </p:spPr>
+        <p:txBody>
+          <a:bodyPr wrap="square" anchor="t" tIns="36576" bIns="36576">
+            <a:spAutoFit/>
+          </a:bodyPr>
+          <a:lstStyle/>
+          <a:p>
+            <a:pPr algn="l">
+              <a:lnSpc>
+                <a:spcPct val="95000"/>
+              </a:lnSpc>
+              <a:spcAft>
+                <a:spcPts val="800"/>
+              </a:spcAft>
+            </a:pPr>
+            <a:r>
+              <a:rPr sz="2200" b="1">
+                <a:solidFill>
+                  <a:srgbClr val="000000"/>
+                </a:solidFill>
+                <a:latin typeface="Arial"/>
+              </a:rPr>
+              <a:t>Fig 2. Every state with 20 or more facilities. Most sit near 0% or near 100%, and colour shows which hazard drives each one.</a:t>
+            </a:r>
+          </a:p>
+        </p:txBody>
+      </p:sp>
+      <p:sp>
+        <p:nvSpPr>
+          <p:cNvPr id="164" name="Rectangle 163"/>
           <p:cNvSpPr/>
           <p:nvPr/>
         </p:nvSpPr>
         <p:spPr>
           <a:xfrm>
-            <a:off x="22090621" y="8236146"/>
-            <a:ext cx="128016" cy="2182558"/>
+            <a:off x="22090621" y="8363146"/>
+            <a:ext cx="10397100" cy="2390679"/>
           </a:xfrm>
           <a:prstGeom prst="rect">
             <a:avLst/>
           </a:prstGeom>
           <a:solidFill>
-            <a:srgbClr val="FFCC00"/>
+            <a:srgbClr val="EFEFEF"/>
           </a:solidFill>
-          <a:ln>
-            <a:noFill/>
+          <a:ln w="12700">
+            <a:solidFill>
+              <a:srgbClr val="A5A5A5"/>
+            </a:solidFill>
           </a:ln>
           <a:effectLst/>
         </p:spPr>
@@ -7876,14 +8057,58 @@
       </p:sp>
       <p:sp>
         <p:nvSpPr>
-          <p:cNvPr id="163" name="TextBox 162"/>
+          <p:cNvPr id="165" name="Rectangle 164"/>
+          <p:cNvSpPr/>
+          <p:nvPr/>
+        </p:nvSpPr>
+        <p:spPr>
+          <a:xfrm>
+            <a:off x="22090621" y="8363146"/>
+            <a:ext cx="128016" cy="2390679"/>
+          </a:xfrm>
+          <a:prstGeom prst="rect">
+            <a:avLst/>
+          </a:prstGeom>
+          <a:solidFill>
+            <a:srgbClr val="FFCC00"/>
+          </a:solidFill>
+          <a:ln>
+            <a:noFill/>
+          </a:ln>
+          <a:effectLst/>
+        </p:spPr>
+        <p:style>
+          <a:lnRef idx="1">
+            <a:schemeClr val="accent1"/>
+          </a:lnRef>
+          <a:fillRef idx="3">
+            <a:schemeClr val="accent1"/>
+          </a:fillRef>
+          <a:effectRef idx="2">
+            <a:schemeClr val="accent1"/>
+          </a:effectRef>
+          <a:fontRef idx="minor">
+            <a:schemeClr val="lt1"/>
+          </a:fontRef>
+        </p:style>
+        <p:txBody>
+          <a:bodyPr rtlCol="0" anchor="ctr"/>
+          <a:lstStyle/>
+          <a:p>
+            <a:pPr algn="ctr"/>
+          </a:p>
+        </p:txBody>
+      </p:sp>
+      <p:sp>
+        <p:nvSpPr>
+          <p:cNvPr id="166" name="TextBox 165"/>
           <p:cNvSpPr txBox="1"/>
           <p:nvPr/>
         </p:nvSpPr>
         <p:spPr>
           <a:xfrm>
-            <a:off x="22328365" y="8309298"/>
-            <a:ext cx="9985620" cy="2036254"/>
+            <a:off x="22328365" y="8436298"/>
+            <a:ext cx="9985620" cy="2244375"/>
           </a:xfrm>
           <a:prstGeom prst="rect">
             <a:avLst/>
@@ -7905,13 +8130,13 @@
               </a:spcAft>
             </a:pPr>
             <a:r>
-              <a:rPr sz="2200" b="1">
+              <a:rPr sz="2500" b="1">
                 <a:solidFill>
                   <a:srgbClr val="000000"/>
                 </a:solidFill>
                 <a:latin typeface="Arial"/>
               </a:rPr>
-              <a:t>Two things we expected and did not find</a:t>
+              <a:t>Two checks that came back negative</a:t>
             </a:r>
           </a:p>
           <a:p>
@@ -7924,20 +8149,20 @@
               </a:spcAft>
             </a:pPr>
             <a:r>
-              <a:rPr sz="2100" b="0">
+              <a:rPr sz="2400" b="0">
                 <a:solidFill>
                   <a:srgbClr val="000000"/>
                 </a:solidFill>
                 <a:latin typeface="Arial"/>
               </a:rPr>
-              <a:t>Measuring hazard across the whole building footprint rather than at one point changed the answer for only 8.9% of facilities. Building height showed no association with exposure once state was controlled, a median difference of 0.0 across 23 states.</a:t>
+              <a:t>Measuring hazard across the whole footprint rather than at one point changed the answer for 29 of the 326 facilities where the two could be compared. Building height showed no association with exposure once state was held constant.</a:t>
             </a:r>
           </a:p>
         </p:txBody>
       </p:sp>
       <p:pic>
         <p:nvPicPr>
-          <p:cNvPr id="164" name="Picture 163" descr="fig3_confidence.png"/>
+          <p:cNvPr id="167" name="Picture 166" descr="fig3_confidence.png"/>
           <p:cNvPicPr>
             <a:picLocks noChangeAspect="1"/>
           </p:cNvPicPr>
@@ -7951,8 +8176,8 @@
         </p:blipFill>
         <p:spPr>
           <a:xfrm>
-            <a:off x="22090621" y="10546721"/>
-            <a:ext cx="10397100" cy="3904836"/>
+            <a:off x="22090621" y="10881842"/>
+            <a:ext cx="10397100" cy="3717481"/>
           </a:xfrm>
           <a:prstGeom prst="rect">
             <a:avLst/>
@@ -7961,14 +8186,14 @@
       </p:pic>
       <p:sp>
         <p:nvSpPr>
-          <p:cNvPr id="165" name="TextBox 164"/>
+          <p:cNvPr id="168" name="TextBox 167"/>
           <p:cNvSpPr txBox="1"/>
           <p:nvPr/>
         </p:nvSpPr>
         <p:spPr>
           <a:xfrm>
-            <a:off x="22090621" y="14488133"/>
-            <a:ext cx="10397100" cy="965771"/>
+            <a:off x="22090621" y="14635900"/>
+            <a:ext cx="10397100" cy="688276"/>
           </a:xfrm>
           <a:prstGeom prst="rect">
             <a:avLst/>
@@ -7990,13 +8215,13 @@
               </a:spcAft>
             </a:pPr>
             <a:r>
-              <a:rPr sz="2100" b="1">
+              <a:rPr sz="2200" b="1">
                 <a:solidFill>
                   <a:srgbClr val="000000"/>
                 </a:solidFill>
                 <a:latin typeface="Arial"/>
               </a:rPr>
-              <a:t>Fig 3. Coordinate quality was measured, not assumed. Results stay stable under realistic positional error.</a:t>
+              <a:t>Fig 3. We re-ran the analysis with simulated location error.</a:t>
             </a:r>
           </a:p>
         </p:txBody>

--- a/figures/Oughton_Avilash_Angirekula_2026ASSIP_Poster.pptx
+++ b/figures/Oughton_Avilash_Angirekula_2026ASSIP_Poster.pptx
@@ -8004,7 +8004,7 @@
                 </a:solidFill>
                 <a:latin typeface="Arial"/>
               </a:rPr>
-              <a:t>Fig 2. Every state with 20 or more facilities. Most sit near 0% or near 100%, and colour shows which hazard drives each one.</a:t>
+              <a:t>Fig 2. Every state with 20 or more facilities. 25 of 32 sit below 10% or above 60%, and colour shows which hazard drives each one.</a:t>
             </a:r>
           </a:p>
         </p:txBody>

--- a/figures/Oughton_Avilash_Angirekula_2026ASSIP_Poster.pptx
+++ b/figures/Oughton_Avilash_Angirekula_2026ASSIP_Poster.pptx
@@ -5275,7 +5275,7 @@
                 </a:solidFill>
                 <a:latin typeface="Arial"/>
               </a:rPr>
-              <a:t>•  AI and cloud computing have concentrated US computing capacity into a few hundred sites.</a:t>
+              <a:t>•  AI and cloud demand has concentrated US computing into a few dozen metro clusters that face earthquakes, wildfire and flooding.</a:t>
             </a:r>
             <a:endParaRPr sz="2600" dirty="0">
               <a:latin typeface="Palatino"/>
@@ -5300,7 +5300,7 @@
                 </a:solidFill>
                 <a:latin typeface="Arial"/>
               </a:rPr>
-              <a:t>•  Those sites face earthquakes, wildfire and flooding, but no open dataset records where they physically stand.</a:t>
+              <a:t>•  Existing sources are proprietary, or give city-level coordinates never checked against a building.</a:t>
             </a:r>
           </a:p>
           <a:p>
@@ -5319,7 +5319,7 @@
                 </a:solidFill>
                 <a:latin typeface="Arial"/>
               </a:rPr>
-              <a:t>•  Existing sources are proprietary, aggregated above the building level, or unverified.</a:t>
+              <a:t>•  We built an open, building-level inventory of the contiguous US, with positional uncertainty carried through the hazard sampling.</a:t>
             </a:r>
           </a:p>
           <a:p>
@@ -5338,7 +5338,7 @@
                 </a:solidFill>
                 <a:latin typeface="Arial"/>
               </a:rPr>
-              <a:t>•  We measured exposure: whether a facility sits in a hazard zone. We did not model damage, so nothing here is a loss estimate.</a:t>
+              <a:t>•  We measured exposure, meaning whether a site lies in a hazard zone. We did not model damage, so nothing here is a loss estimate.</a:t>
             </a:r>
           </a:p>
         </p:txBody>
@@ -5988,7 +5988,7 @@
         <p:spPr>
           <a:xfrm>
             <a:off x="376700" y="15205502"/>
-            <a:ext cx="10282778" cy="2313749"/>
+            <a:ext cx="10282778" cy="3035236"/>
           </a:xfrm>
           <a:prstGeom prst="rect">
             <a:avLst/>
@@ -6023,7 +6023,7 @@
                 </a:solidFill>
                 <a:latin typeface="Arial"/>
               </a:rPr>
-              <a:t>We merged OpenStreetMap, PeeringDB and Wikidata into one row per site. Records within 60 m with matching fuzzy names are unioned, campus siblings are kept apart, and every merge is logged.</a:t>
+              <a:t>We merged OpenStreetMap, PeeringDB and Wikidata into one row per site across the contiguous US, logging all 194 merges with their evidence.</a:t>
             </a:r>
           </a:p>
           <a:p>
@@ -6042,7 +6042,7 @@
                 </a:solidFill>
                 <a:latin typeface="Arial"/>
               </a:rPr>
-              <a:t>We then graded each coordinate against FEMA USA Structures building footprints and sampled hazards in an equal-area projection:</a:t>
+              <a:t>Every coordinate was checked against FEMA USA Structures footprints. 1,681 fall inside a building, 993 match the nearest, 22 have no match. Wildfire buffers use an equal-area projection, the rest are point queries:</a:t>
             </a:r>
           </a:p>
         </p:txBody>
@@ -6097,7 +6097,7 @@
                 </a:solidFill>
                 <a:latin typeface="Arial"/>
               </a:rPr>
-              <a:t>Where a facility sits predicts its hazard exposure far better than anything about the facility itself.</a:t>
+              <a:t>Exposure is set by geography. Virginia's 409 sites are 0.7% exposed. California's 223 are 100%.</a:t>
             </a:r>
           </a:p>
         </p:txBody>
@@ -6179,7 +6179,7 @@
         <p:spPr>
           <a:xfrm>
             <a:off x="22090621" y="5251774"/>
-            <a:ext cx="10397100" cy="2928493"/>
+            <a:ext cx="10397100" cy="3289236"/>
           </a:xfrm>
           <a:prstGeom prst="rect">
             <a:avLst/>
@@ -6214,7 +6214,7 @@
                 </a:solidFill>
                 <a:latin typeface="Arial"/>
               </a:rPr>
-              <a:t>•  The national 35% figure describes no real state.</a:t>
+              <a:t>•  A national average hides the pattern. Only 7 of the 32 states with 20 or more sites fall between 10% and 60% exposed.</a:t>
             </a:r>
           </a:p>
           <a:p>
@@ -6233,7 +6233,7 @@
                 </a:solidFill>
                 <a:latin typeface="Arial"/>
               </a:rPr>
-              <a:t>•  Most sit in low-exposure regions, but we did not test why. Power price and fiber routes are likelier drivers than hazard avoidance.</a:t>
+              <a:t>•  Most sites sit in low-exposure regions, but we cannot say whether hazard influenced siting.</a:t>
             </a:r>
           </a:p>
           <a:p>
@@ -6252,7 +6252,7 @@
                 </a:solidFill>
                 <a:latin typeface="Arial"/>
               </a:rPr>
-              <a:t>•  Two states can both read 100% and face different hazards, so a combined index must keep them separate.</a:t>
+              <a:t>•  New Jersey and California are both 100% exposed for opposite reasons, so a national index must report hazards separately.</a:t>
             </a:r>
           </a:p>
           <a:p>
@@ -6550,8 +6550,8 @@
         </p:nvSpPr>
         <p:spPr>
           <a:xfrm>
-            <a:off x="376700" y="9139498"/>
-            <a:ext cx="10282778" cy="4979892"/>
+            <a:off x="376700" y="9247889"/>
+            <a:ext cx="10282778" cy="4506023"/>
           </a:xfrm>
           <a:prstGeom prst="rect">
             <a:avLst/>
@@ -6596,8 +6596,8 @@
         </p:nvSpPr>
         <p:spPr>
           <a:xfrm>
-            <a:off x="376700" y="9139498"/>
-            <a:ext cx="128016" cy="4979892"/>
+            <a:off x="376700" y="9247889"/>
+            <a:ext cx="128016" cy="4506023"/>
           </a:xfrm>
           <a:prstGeom prst="rect">
             <a:avLst/>
@@ -6640,8 +6640,8 @@
         </p:nvSpPr>
         <p:spPr>
           <a:xfrm>
-            <a:off x="614444" y="9212650"/>
-            <a:ext cx="9871298" cy="4833588"/>
+            <a:off x="614444" y="9321041"/>
+            <a:ext cx="9871298" cy="4359719"/>
           </a:xfrm>
           <a:prstGeom prst="rect">
             <a:avLst/>
@@ -6669,7 +6669,7 @@
                 </a:solidFill>
                 <a:latin typeface="Arial"/>
               </a:rPr>
-              <a:t>Bounds on these results</a:t>
+              <a:t>Limitations</a:t>
             </a:r>
           </a:p>
           <a:p>
@@ -6688,7 +6688,7 @@
                 </a:solidFill>
                 <a:latin typeface="Arial"/>
               </a:rPr>
-              <a:t>•  Coverage is incomplete. Open sources list 2,696 US facilities where commercial directories list several thousand, and mapping density varies by state.</a:t>
+              <a:t>•  Coverage is uneven. OpenStreetMap supplies 83% of Virginia's records but 48% of California's, so state contrasts partly reflect who mapped them.</a:t>
             </a:r>
           </a:p>
           <a:p>
@@ -6707,7 +6707,7 @@
                 </a:solidFill>
                 <a:latin typeface="Arial"/>
               </a:rPr>
-              <a:t>•  Hail and wind reports rise with observer density (Spearman 0.39 and 0.34 within state), so we excluded both.</a:t>
+              <a:t>•  Hail and wind reports rise with population density (Spearman 0.39 and 0.34 within state), so we excluded both.</a:t>
             </a:r>
           </a:p>
           <a:p>
@@ -6726,7 +6726,7 @@
                 </a:solidFill>
                 <a:latin typeface="Arial"/>
               </a:rPr>
-              <a:t>•  Power capacity is unrecorded, so we count facilities, never megawatts.</a:t>
+              <a:t>•  No open source lists power capacity, so a small suite counts the same as a large campus.</a:t>
             </a:r>
           </a:p>
           <a:p>
@@ -6745,26 +6745,7 @@
                 </a:solidFill>
                 <a:latin typeface="Arial"/>
               </a:rPr>
-              <a:t>•  48 facilities shown as facing no hazard sit outside FEMA's mapped extent, so 35% is a floor.</a:t>
-            </a:r>
-          </a:p>
-          <a:p>
-            <a:pPr algn="l" marL="320040" indent="-320040">
-              <a:lnSpc>
-                <a:spcPct val="95000"/>
-              </a:lnSpc>
-              <a:spcAft>
-                <a:spcPts val="800"/>
-              </a:spcAft>
-            </a:pPr>
-            <a:r>
-              <a:rPr sz="2400" b="0">
-                <a:solidFill>
-                  <a:srgbClr val="000000"/>
-                </a:solidFill>
-                <a:latin typeface="Arial"/>
-              </a:rPr>
-              <a:t>•  Across 500 relocations, 1,681 sites never changed wildfire class.</a:t>
+              <a:t>•  40 sites shown as clear sit outside FEMA's mapped extent and 8 outside the wildfire raster, so 35% is a floor.</a:t>
             </a:r>
           </a:p>
         </p:txBody>
@@ -6777,8 +6758,8 @@
         </p:nvSpPr>
         <p:spPr>
           <a:xfrm>
-            <a:off x="422419" y="17610691"/>
-            <a:ext cx="10191338" cy="676656"/>
+            <a:off x="422419" y="18332178"/>
+            <a:ext cx="10191338" cy="621792"/>
           </a:xfrm>
           <a:prstGeom prst="rect">
             <a:avLst/>
@@ -6823,8 +6804,8 @@
         </p:nvSpPr>
         <p:spPr>
           <a:xfrm>
-            <a:off x="559580" y="17647267"/>
-            <a:ext cx="2926080" cy="603504"/>
+            <a:off x="559580" y="18350466"/>
+            <a:ext cx="2926080" cy="585216"/>
           </a:xfrm>
           <a:prstGeom prst="rect">
             <a:avLst/>
@@ -6865,8 +6846,8 @@
         </p:nvSpPr>
         <p:spPr>
           <a:xfrm>
-            <a:off x="3531380" y="17647267"/>
-            <a:ext cx="6899497" cy="603504"/>
+            <a:off x="3531380" y="18350466"/>
+            <a:ext cx="6899497" cy="585216"/>
           </a:xfrm>
           <a:prstGeom prst="rect">
             <a:avLst/>
@@ -6907,8 +6888,8 @@
         </p:nvSpPr>
         <p:spPr>
           <a:xfrm>
-            <a:off x="422419" y="18378787"/>
-            <a:ext cx="10191338" cy="676656"/>
+            <a:off x="422419" y="19036266"/>
+            <a:ext cx="10191338" cy="621792"/>
           </a:xfrm>
           <a:prstGeom prst="rect">
             <a:avLst/>
@@ -6953,8 +6934,8 @@
         </p:nvSpPr>
         <p:spPr>
           <a:xfrm>
-            <a:off x="559580" y="18415363"/>
-            <a:ext cx="2926080" cy="603504"/>
+            <a:off x="559580" y="19054554"/>
+            <a:ext cx="2926080" cy="585216"/>
           </a:xfrm>
           <a:prstGeom prst="rect">
             <a:avLst/>
@@ -6995,8 +6976,8 @@
         </p:nvSpPr>
         <p:spPr>
           <a:xfrm>
-            <a:off x="3531380" y="18415363"/>
-            <a:ext cx="6899497" cy="603504"/>
+            <a:off x="3531380" y="19054554"/>
+            <a:ext cx="6899497" cy="585216"/>
           </a:xfrm>
           <a:prstGeom prst="rect">
             <a:avLst/>
@@ -7037,8 +7018,8 @@
         </p:nvSpPr>
         <p:spPr>
           <a:xfrm>
-            <a:off x="422419" y="19146883"/>
-            <a:ext cx="10191338" cy="676656"/>
+            <a:off x="422419" y="19740354"/>
+            <a:ext cx="10191338" cy="621792"/>
           </a:xfrm>
           <a:prstGeom prst="rect">
             <a:avLst/>
@@ -7083,8 +7064,8 @@
         </p:nvSpPr>
         <p:spPr>
           <a:xfrm>
-            <a:off x="559580" y="19183459"/>
-            <a:ext cx="2926080" cy="603504"/>
+            <a:off x="559580" y="19758642"/>
+            <a:ext cx="2926080" cy="585216"/>
           </a:xfrm>
           <a:prstGeom prst="rect">
             <a:avLst/>
@@ -7125,8 +7106,8 @@
         </p:nvSpPr>
         <p:spPr>
           <a:xfrm>
-            <a:off x="3531380" y="19183459"/>
-            <a:ext cx="6899497" cy="603504"/>
+            <a:off x="3531380" y="19758642"/>
+            <a:ext cx="6899497" cy="585216"/>
           </a:xfrm>
           <a:prstGeom prst="rect">
             <a:avLst/>
@@ -7167,8 +7148,8 @@
         </p:nvSpPr>
         <p:spPr>
           <a:xfrm>
-            <a:off x="422419" y="19914979"/>
-            <a:ext cx="10191338" cy="676656"/>
+            <a:off x="422419" y="20444442"/>
+            <a:ext cx="10191338" cy="621792"/>
           </a:xfrm>
           <a:prstGeom prst="rect">
             <a:avLst/>
@@ -7213,8 +7194,8 @@
         </p:nvSpPr>
         <p:spPr>
           <a:xfrm>
-            <a:off x="559580" y="19951555"/>
-            <a:ext cx="2926080" cy="603504"/>
+            <a:off x="559580" y="20462730"/>
+            <a:ext cx="2926080" cy="585216"/>
           </a:xfrm>
           <a:prstGeom prst="rect">
             <a:avLst/>
@@ -7255,8 +7236,8 @@
         </p:nvSpPr>
         <p:spPr>
           <a:xfrm>
-            <a:off x="3531380" y="19951555"/>
-            <a:ext cx="6899497" cy="603504"/>
+            <a:off x="3531380" y="20462730"/>
+            <a:ext cx="6899497" cy="585216"/>
           </a:xfrm>
           <a:prstGeom prst="rect">
             <a:avLst/>
@@ -7284,7 +7265,7 @@
                 </a:solidFill>
                 <a:latin typeface="Arial"/>
               </a:rPr>
-              <a:t>WRI Aqueduct 4.0 (a resource limit, not a hazard)</a:t>
+              <a:t>WRI Aqueduct 4.0 (a supply limit, reported apart)</a:t>
             </a:r>
           </a:p>
         </p:txBody>
@@ -7297,8 +7278,8 @@
         </p:nvSpPr>
         <p:spPr>
           <a:xfrm>
-            <a:off x="422419" y="20683075"/>
-            <a:ext cx="10191338" cy="676656"/>
+            <a:off x="422419" y="21148530"/>
+            <a:ext cx="10191338" cy="621792"/>
           </a:xfrm>
           <a:prstGeom prst="rect">
             <a:avLst/>
@@ -7343,8 +7324,8 @@
         </p:nvSpPr>
         <p:spPr>
           <a:xfrm>
-            <a:off x="559580" y="20719651"/>
-            <a:ext cx="2926080" cy="603504"/>
+            <a:off x="559580" y="21166818"/>
+            <a:ext cx="2926080" cy="585216"/>
           </a:xfrm>
           <a:prstGeom prst="rect">
             <a:avLst/>
@@ -7385,8 +7366,8 @@
         </p:nvSpPr>
         <p:spPr>
           <a:xfrm>
-            <a:off x="3531380" y="20719651"/>
-            <a:ext cx="6899497" cy="603504"/>
+            <a:off x="3531380" y="21166818"/>
+            <a:ext cx="6899497" cy="585216"/>
           </a:xfrm>
           <a:prstGeom prst="rect">
             <a:avLst/>
@@ -7414,7 +7395,7 @@
                 </a:solidFill>
                 <a:latin typeface="Arial"/>
               </a:rPr>
-              <a:t>500 draws, sigma 10-500 m by coordinate tier</a:t>
+              <a:t>500 relocations per site, 10-500 m by precision</a:t>
             </a:r>
           </a:p>
         </p:txBody>
@@ -7427,7 +7408,7 @@
         </p:nvSpPr>
         <p:spPr>
           <a:xfrm>
-            <a:off x="376700" y="21542611"/>
+            <a:off x="376700" y="21944058"/>
             <a:ext cx="10282778" cy="2186749"/>
           </a:xfrm>
           <a:prstGeom prst="rect">
@@ -7456,7 +7437,7 @@
                 </a:solidFill>
                 <a:latin typeface="Arial"/>
               </a:rPr>
-              <a:t>A facility counts as exposed if it lies within 2.4 km of land rated High or Very High for wildfire, inside a FEMA Special Flood Hazard Area, or at peak ground acceleration of 0.30 g or above (2% chance in 50 years). Where a hazard layer has no value we record it as unknown rather than counting the site as safe.</a:t>
+              <a:t>A site counts as exposed if it lies within 2.4 km of land rated High or Very High for wildfire, inside a FEMA Special Flood Hazard Area, or at MCE_G peak ground acceleration of 0.30 g or above. Where a layer has no value there, the site is recorded as unknown, not as safe.</a:t>
             </a:r>
           </a:p>
         </p:txBody>
@@ -7498,7 +7479,7 @@
                 </a:solidFill>
                 <a:latin typeface="Arial"/>
               </a:rPr>
-              <a:t>65%</a:t>
+              <a:t>2,696</a:t>
             </a:r>
           </a:p>
         </p:txBody>
@@ -7540,7 +7521,7 @@
                 </a:solidFill>
                 <a:latin typeface="Arial"/>
               </a:rPr>
-              <a:t>face no mapped hazard</a:t>
+              <a:t>facilities mapped</a:t>
             </a:r>
           </a:p>
         </p:txBody>
@@ -7582,7 +7563,7 @@
                 </a:solidFill>
                 <a:latin typeface="Arial"/>
               </a:rPr>
-              <a:t>15</a:t>
+              <a:t>35%</a:t>
             </a:r>
           </a:p>
         </p:txBody>
@@ -7624,7 +7605,7 @@
                 </a:solidFill>
                 <a:latin typeface="Arial"/>
               </a:rPr>
-              <a:t>states below 10% exposed</a:t>
+              <a:t>face a mapped hazard</a:t>
             </a:r>
           </a:p>
         </p:txBody>
@@ -7666,7 +7647,7 @@
                 </a:solidFill>
                 <a:latin typeface="Arial"/>
               </a:rPr>
-              <a:t>10</a:t>
+              <a:t>0.7%</a:t>
             </a:r>
           </a:p>
         </p:txBody>
@@ -7708,7 +7689,7 @@
                 </a:solidFill>
                 <a:latin typeface="Arial"/>
               </a:rPr>
-              <a:t>states above 60%</a:t>
+              <a:t>of Virginia's 409</a:t>
             </a:r>
           </a:p>
         </p:txBody>
@@ -7750,7 +7731,7 @@
                 </a:solidFill>
                 <a:latin typeface="Arial"/>
               </a:rPr>
-              <a:t>2,696</a:t>
+              <a:t>100%</a:t>
             </a:r>
           </a:p>
         </p:txBody>
@@ -7792,7 +7773,7 @@
                 </a:solidFill>
                 <a:latin typeface="Arial"/>
               </a:rPr>
-              <a:t>facilities mapped</a:t>
+              <a:t>of California's 223</a:t>
             </a:r>
           </a:p>
         </p:txBody>
@@ -7858,7 +7839,7 @@
                 </a:solidFill>
                 <a:latin typeface="Arial"/>
               </a:rPr>
-              <a:t>Fig 1. Two thirds of US data centers face no mapped hazard. The exposed ones cluster in the West and the Northeast.</a:t>
+              <a:t>Fig 1. One third of US data centers face a mapped hazard. Sites facing two or more (orange) concentrate in California and the Northeast.</a:t>
             </a:r>
           </a:p>
         </p:txBody>
@@ -7872,7 +7853,7 @@
         <p:spPr>
           <a:xfrm>
             <a:off x="10965973" y="14476061"/>
-            <a:ext cx="10781748" cy="3522979"/>
+            <a:ext cx="10781748" cy="4010723"/>
           </a:xfrm>
           <a:prstGeom prst="rect">
             <a:avLst/>
@@ -7900,7 +7881,7 @@
                 </a:solidFill>
                 <a:latin typeface="Arial"/>
               </a:rPr>
-              <a:t>Which hazard dominates changes by region. New Jersey reaches 100% entirely through wildfire and 0% through earthquake. California is 96% earthquake. Nationally wildfire drives 646 facilities, earthquake 448, flood only 71.</a:t>
+              <a:t>Which hazard dominates depends on the region. New Jersey reaches 100% through wildfire alone (the Pine Barrens rate High or Very High) and 0% through earthquake. California is 96% earthquake.</a:t>
             </a:r>
           </a:p>
           <a:p>
@@ -7919,7 +7900,7 @@
                 </a:solidFill>
                 <a:latin typeface="Arial"/>
               </a:rPr>
-              <a:t>Water stress is the one hazard that reaches Virginia. 31% of its facilities sit in high-stress basins, against 0.7% for mapped hazards.</a:t>
+              <a:t>Nationally 646 sites are exposed to wildfire, 448 to earthquake and 71 to flood. 205 face more than one, so these overlap.</a:t>
             </a:r>
           </a:p>
           <a:p>
@@ -7938,7 +7919,26 @@
                 </a:solidFill>
                 <a:latin typeface="Arial"/>
               </a:rPr>
-              <a:t>At a 5 km wildfire buffer the national count rises to 953, more than one third of the fleet.</a:t>
+              <a:t>Virginia avoids the mapped hazards but not water. 31% of its 409 sites lie in high water-stress basins, against 0.7% for the three hazards.</a:t>
+            </a:r>
+          </a:p>
+          <a:p>
+            <a:pPr algn="l">
+              <a:lnSpc>
+                <a:spcPct val="95000"/>
+              </a:lnSpc>
+              <a:spcAft>
+                <a:spcPts val="800"/>
+              </a:spcAft>
+            </a:pPr>
+            <a:r>
+              <a:rPr sz="2600" b="0">
+                <a:solidFill>
+                  <a:srgbClr val="000000"/>
+                </a:solidFill>
+                <a:latin typeface="Arial"/>
+              </a:rPr>
+              <a:t>Widening the wildfire buffer from 2.4 km to 5 km takes that count from 646 to 953, so the threshold moves the answer by half.</a:t>
             </a:r>
           </a:p>
         </p:txBody>
@@ -7959,7 +7959,7 @@
         </p:blipFill>
         <p:spPr>
           <a:xfrm>
-            <a:off x="10965973" y="18090481"/>
+            <a:off x="10965973" y="18578224"/>
             <a:ext cx="10781748" cy="4238557"/>
           </a:xfrm>
           <a:prstGeom prst="rect">
@@ -7975,7 +7975,7 @@
         </p:nvSpPr>
         <p:spPr>
           <a:xfrm>
-            <a:off x="10965973" y="22383902"/>
+            <a:off x="10965973" y="22871645"/>
             <a:ext cx="10781748" cy="993521"/>
           </a:xfrm>
           <a:prstGeom prst="rect">
@@ -8017,7 +8017,7 @@
         </p:nvSpPr>
         <p:spPr>
           <a:xfrm>
-            <a:off x="22090621" y="8363146"/>
+            <a:off x="22090621" y="8723890"/>
             <a:ext cx="10397100" cy="2390679"/>
           </a:xfrm>
           <a:prstGeom prst="rect">
@@ -8063,7 +8063,7 @@
         </p:nvSpPr>
         <p:spPr>
           <a:xfrm>
-            <a:off x="22090621" y="8363146"/>
+            <a:off x="22090621" y="8723890"/>
             <a:ext cx="128016" cy="2390679"/>
           </a:xfrm>
           <a:prstGeom prst="rect">
@@ -8107,7 +8107,7 @@
         </p:nvSpPr>
         <p:spPr>
           <a:xfrm>
-            <a:off x="22328365" y="8436298"/>
+            <a:off x="22328365" y="8797042"/>
             <a:ext cx="9985620" cy="2244375"/>
           </a:xfrm>
           <a:prstGeom prst="rect">
@@ -8155,7 +8155,7 @@
                 </a:solidFill>
                 <a:latin typeface="Arial"/>
               </a:rPr>
-              <a:t>Measuring hazard across the whole footprint rather than at one point changed the answer for 29 of the 326 facilities where the two could be compared. Building height showed no association with exposure once state was held constant.</a:t>
+              <a:t>Sampling hazard across a building's whole footprint instead of its centre changed the answer for 29 of the 326 sites where both could be compared. Building height showed no association with exposure once state was held constant.</a:t>
             </a:r>
           </a:p>
         </p:txBody>
@@ -8176,8 +8176,8 @@
         </p:blipFill>
         <p:spPr>
           <a:xfrm>
-            <a:off x="22090621" y="10881842"/>
-            <a:ext cx="10397100" cy="3717481"/>
+            <a:off x="22090621" y="11242586"/>
+            <a:ext cx="10397100" cy="3460706"/>
           </a:xfrm>
           <a:prstGeom prst="rect">
             <a:avLst/>
@@ -8192,7 +8192,7 @@
         </p:nvSpPr>
         <p:spPr>
           <a:xfrm>
-            <a:off x="22090621" y="14635900"/>
+            <a:off x="22090621" y="14739868"/>
             <a:ext cx="10397100" cy="688276"/>
           </a:xfrm>
           <a:prstGeom prst="rect">

--- a/figures/Oughton_Avilash_Angirekula_2026ASSIP_Poster.pptx
+++ b/figures/Oughton_Avilash_Angirekula_2026ASSIP_Poster.pptx
@@ -5240,7 +5240,7 @@
         <p:spPr>
           <a:xfrm>
             <a:off x="376700" y="5251774"/>
-            <a:ext cx="10282778" cy="3649979"/>
+            <a:ext cx="10282778" cy="4010723"/>
           </a:xfrm>
           <a:prstGeom prst="rect">
             <a:avLst/>
@@ -6550,7 +6550,7 @@
         </p:nvSpPr>
         <p:spPr>
           <a:xfrm>
-            <a:off x="376700" y="9247889"/>
+            <a:off x="376700" y="9500241"/>
             <a:ext cx="10282778" cy="4506023"/>
           </a:xfrm>
           <a:prstGeom prst="rect">
@@ -6596,7 +6596,7 @@
         </p:nvSpPr>
         <p:spPr>
           <a:xfrm>
-            <a:off x="376700" y="9247889"/>
+            <a:off x="376700" y="9500241"/>
             <a:ext cx="128016" cy="4506023"/>
           </a:xfrm>
           <a:prstGeom prst="rect">
@@ -6640,7 +6640,7 @@
         </p:nvSpPr>
         <p:spPr>
           <a:xfrm>
-            <a:off x="614444" y="9321041"/>
+            <a:off x="614444" y="9573393"/>
             <a:ext cx="9871298" cy="4359719"/>
           </a:xfrm>
           <a:prstGeom prst="rect">

--- a/figures/Oughton_Avilash_Angirekula_2026ASSIP_Poster.pptx
+++ b/figures/Oughton_Avilash_Angirekula_2026ASSIP_Poster.pptx
@@ -6447,7 +6447,7 @@
         <p:spPr>
           <a:xfrm>
             <a:off x="22061036" y="21636297"/>
-            <a:ext cx="10480664" cy="1620012"/>
+            <a:ext cx="10480664" cy="1215517"/>
           </a:xfrm>
           <a:prstGeom prst="rect">
             <a:avLst/>
@@ -6490,25 +6490,6 @@
               <a:cs typeface="Arial" panose="020B0604020202020204" pitchFamily="34" charset="0"/>
               <a:sym typeface="Palatino"/>
             </a:endParaRPr>
-          </a:p>
-          <a:p>
-            <a:pPr algn="l">
-              <a:lnSpc>
-                <a:spcPct val="95000"/>
-              </a:lnSpc>
-              <a:spcAft>
-                <a:spcPts val="1000"/>
-              </a:spcAft>
-            </a:pPr>
-            <a:r>
-              <a:rPr sz="2000" b="0">
-                <a:solidFill>
-                  <a:srgbClr val="333333"/>
-                </a:solidFill>
-                <a:latin typeface="Arial"/>
-              </a:rPr>
-              <a:t>Data and code: github.com/aviangirekula/datacenter-dataset</a:t>
-            </a:r>
           </a:p>
         </p:txBody>
       </p:sp>

--- a/figures/Oughton_Avilash_Angirekula_2026ASSIP_Poster.pptx
+++ b/figures/Oughton_Avilash_Angirekula_2026ASSIP_Poster.pptx
@@ -5988,7 +5988,7 @@
         <p:spPr>
           <a:xfrm>
             <a:off x="376700" y="15205502"/>
-            <a:ext cx="10282778" cy="3035236"/>
+            <a:ext cx="10282778" cy="3883723"/>
           </a:xfrm>
           <a:prstGeom prst="rect">
             <a:avLst/>
@@ -6042,7 +6042,26 @@
                 </a:solidFill>
                 <a:latin typeface="Arial"/>
               </a:rPr>
-              <a:t>Every coordinate was checked against FEMA USA Structures footprints. 1,681 fall inside a building, 993 match the nearest, 22 have no match. Wildfire buffers use an equal-area projection, the rest are point queries:</a:t>
+              <a:t>Every coordinate was checked against FEMA USA Structures footprints. 1,681 fall inside a building, 993 match the nearest, 22 have no match, and we reviewed 1,150 against satellite imagery by hand.</a:t>
+            </a:r>
+          </a:p>
+          <a:p>
+            <a:pPr algn="l">
+              <a:lnSpc>
+                <a:spcPct val="95000"/>
+              </a:lnSpc>
+              <a:spcAft>
+                <a:spcPts val="1000"/>
+              </a:spcAft>
+            </a:pPr>
+            <a:r>
+              <a:rPr sz="2600" b="0">
+                <a:solidFill>
+                  <a:srgbClr val="000000"/>
+                </a:solidFill>
+                <a:latin typeface="Arial"/>
+              </a:rPr>
+              <a:t>Our first seismic layer failed validation (22 of 150 test sites within 10%, median bias +32%), so we replaced it with per-facility queries:</a:t>
             </a:r>
           </a:p>
         </p:txBody>
@@ -6532,7 +6551,7 @@
         <p:spPr>
           <a:xfrm>
             <a:off x="376700" y="9500241"/>
-            <a:ext cx="10282778" cy="4506023"/>
+            <a:ext cx="10282778" cy="4852892"/>
           </a:xfrm>
           <a:prstGeom prst="rect">
             <a:avLst/>
@@ -6578,7 +6597,7 @@
         <p:spPr>
           <a:xfrm>
             <a:off x="376700" y="9500241"/>
-            <a:ext cx="128016" cy="4506023"/>
+            <a:ext cx="128016" cy="4852892"/>
           </a:xfrm>
           <a:prstGeom prst="rect">
             <a:avLst/>
@@ -6622,7 +6641,7 @@
         <p:spPr>
           <a:xfrm>
             <a:off x="614444" y="9573393"/>
-            <a:ext cx="9871298" cy="4359719"/>
+            <a:ext cx="9871298" cy="4706588"/>
           </a:xfrm>
           <a:prstGeom prst="rect">
             <a:avLst/>
@@ -6669,7 +6688,7 @@
                 </a:solidFill>
                 <a:latin typeface="Arial"/>
               </a:rPr>
-              <a:t>•  Coverage is uneven. OpenStreetMap supplies 83% of Virginia's records but 48% of California's, so state contrasts partly reflect who mapped them.</a:t>
+              <a:t>•  Coverage is uneven. OpenStreetMap supplies 83% of Virginia's records against 48% of California's, so state contrasts partly reflect who mapped them.</a:t>
             </a:r>
           </a:p>
           <a:p>
@@ -6688,7 +6707,7 @@
                 </a:solidFill>
                 <a:latin typeface="Arial"/>
               </a:rPr>
-              <a:t>•  Hail and wind reports rise with population density (Spearman 0.39 and 0.34 within state), so we excluded both.</a:t>
+              <a:t>•  Hail and wind reports rise with population density (Spearman 0.39 and 0.34), so we excluded both. Lightning, tornado and cyclone rates are computed but not folded in.</a:t>
             </a:r>
           </a:p>
           <a:p>
@@ -6739,8 +6758,8 @@
         </p:nvSpPr>
         <p:spPr>
           <a:xfrm>
-            <a:off x="422419" y="18332178"/>
-            <a:ext cx="10191338" cy="621792"/>
+            <a:off x="422419" y="19180665"/>
+            <a:ext cx="10191338" cy="585216"/>
           </a:xfrm>
           <a:prstGeom prst="rect">
             <a:avLst/>
@@ -6785,8 +6804,8 @@
         </p:nvSpPr>
         <p:spPr>
           <a:xfrm>
-            <a:off x="559580" y="18350466"/>
-            <a:ext cx="2926080" cy="585216"/>
+            <a:off x="559580" y="19189809"/>
+            <a:ext cx="2926080" cy="566928"/>
           </a:xfrm>
           <a:prstGeom prst="rect">
             <a:avLst/>
@@ -6808,7 +6827,7 @@
               </a:spcAft>
             </a:pPr>
             <a:r>
-              <a:rPr sz="2400" b="1">
+              <a:rPr sz="2300" b="1">
                 <a:solidFill>
                   <a:srgbClr val="000000"/>
                 </a:solidFill>
@@ -6827,8 +6846,8 @@
         </p:nvSpPr>
         <p:spPr>
           <a:xfrm>
-            <a:off x="3531380" y="18350466"/>
-            <a:ext cx="6899497" cy="585216"/>
+            <a:off x="3531380" y="19189809"/>
+            <a:ext cx="6899497" cy="566928"/>
           </a:xfrm>
           <a:prstGeom prst="rect">
             <a:avLst/>
@@ -6850,7 +6869,7 @@
               </a:spcAft>
             </a:pPr>
             <a:r>
-              <a:rPr sz="2200" b="0">
+              <a:rPr sz="2100" b="0">
                 <a:solidFill>
                   <a:srgbClr val="333333"/>
                 </a:solidFill>
@@ -6869,8 +6888,8 @@
         </p:nvSpPr>
         <p:spPr>
           <a:xfrm>
-            <a:off x="422419" y="19036266"/>
-            <a:ext cx="10191338" cy="621792"/>
+            <a:off x="422419" y="19839033"/>
+            <a:ext cx="10191338" cy="585216"/>
           </a:xfrm>
           <a:prstGeom prst="rect">
             <a:avLst/>
@@ -6915,8 +6934,8 @@
         </p:nvSpPr>
         <p:spPr>
           <a:xfrm>
-            <a:off x="559580" y="19054554"/>
-            <a:ext cx="2926080" cy="585216"/>
+            <a:off x="559580" y="19848177"/>
+            <a:ext cx="2926080" cy="566928"/>
           </a:xfrm>
           <a:prstGeom prst="rect">
             <a:avLst/>
@@ -6938,7 +6957,7 @@
               </a:spcAft>
             </a:pPr>
             <a:r>
-              <a:rPr sz="2400" b="1">
+              <a:rPr sz="2300" b="1">
                 <a:solidFill>
                   <a:srgbClr val="000000"/>
                 </a:solidFill>
@@ -6957,8 +6976,8 @@
         </p:nvSpPr>
         <p:spPr>
           <a:xfrm>
-            <a:off x="3531380" y="19054554"/>
-            <a:ext cx="6899497" cy="585216"/>
+            <a:off x="3531380" y="19848177"/>
+            <a:ext cx="6899497" cy="566928"/>
           </a:xfrm>
           <a:prstGeom prst="rect">
             <a:avLst/>
@@ -6980,7 +6999,7 @@
               </a:spcAft>
             </a:pPr>
             <a:r>
-              <a:rPr sz="2200" b="0">
+              <a:rPr sz="2100" b="0">
                 <a:solidFill>
                   <a:srgbClr val="333333"/>
                 </a:solidFill>
@@ -6999,8 +7018,8 @@
         </p:nvSpPr>
         <p:spPr>
           <a:xfrm>
-            <a:off x="422419" y="19740354"/>
-            <a:ext cx="10191338" cy="621792"/>
+            <a:off x="422419" y="20497401"/>
+            <a:ext cx="10191338" cy="585216"/>
           </a:xfrm>
           <a:prstGeom prst="rect">
             <a:avLst/>
@@ -7045,8 +7064,8 @@
         </p:nvSpPr>
         <p:spPr>
           <a:xfrm>
-            <a:off x="559580" y="19758642"/>
-            <a:ext cx="2926080" cy="585216"/>
+            <a:off x="559580" y="20506545"/>
+            <a:ext cx="2926080" cy="566928"/>
           </a:xfrm>
           <a:prstGeom prst="rect">
             <a:avLst/>
@@ -7068,7 +7087,7 @@
               </a:spcAft>
             </a:pPr>
             <a:r>
-              <a:rPr sz="2400" b="1">
+              <a:rPr sz="2300" b="1">
                 <a:solidFill>
                   <a:srgbClr val="000000"/>
                 </a:solidFill>
@@ -7087,8 +7106,8 @@
         </p:nvSpPr>
         <p:spPr>
           <a:xfrm>
-            <a:off x="3531380" y="19758642"/>
-            <a:ext cx="6899497" cy="585216"/>
+            <a:off x="3531380" y="20506545"/>
+            <a:ext cx="6899497" cy="566928"/>
           </a:xfrm>
           <a:prstGeom prst="rect">
             <a:avLst/>
@@ -7110,7 +7129,7 @@
               </a:spcAft>
             </a:pPr>
             <a:r>
-              <a:rPr sz="2200" b="0">
+              <a:rPr sz="2100" b="0">
                 <a:solidFill>
                   <a:srgbClr val="333333"/>
                 </a:solidFill>
@@ -7129,8 +7148,8 @@
         </p:nvSpPr>
         <p:spPr>
           <a:xfrm>
-            <a:off x="422419" y="20444442"/>
-            <a:ext cx="10191338" cy="621792"/>
+            <a:off x="422419" y="21155769"/>
+            <a:ext cx="10191338" cy="585216"/>
           </a:xfrm>
           <a:prstGeom prst="rect">
             <a:avLst/>
@@ -7175,8 +7194,8 @@
         </p:nvSpPr>
         <p:spPr>
           <a:xfrm>
-            <a:off x="559580" y="20462730"/>
-            <a:ext cx="2926080" cy="585216"/>
+            <a:off x="559580" y="21164913"/>
+            <a:ext cx="2926080" cy="566928"/>
           </a:xfrm>
           <a:prstGeom prst="rect">
             <a:avLst/>
@@ -7198,7 +7217,7 @@
               </a:spcAft>
             </a:pPr>
             <a:r>
-              <a:rPr sz="2400" b="1">
+              <a:rPr sz="2300" b="1">
                 <a:solidFill>
                   <a:srgbClr val="000000"/>
                 </a:solidFill>
@@ -7217,8 +7236,8 @@
         </p:nvSpPr>
         <p:spPr>
           <a:xfrm>
-            <a:off x="3531380" y="20462730"/>
-            <a:ext cx="6899497" cy="585216"/>
+            <a:off x="3531380" y="21164913"/>
+            <a:ext cx="6899497" cy="566928"/>
           </a:xfrm>
           <a:prstGeom prst="rect">
             <a:avLst/>
@@ -7240,7 +7259,7 @@
               </a:spcAft>
             </a:pPr>
             <a:r>
-              <a:rPr sz="2200" b="0">
+              <a:rPr sz="2100" b="0">
                 <a:solidFill>
                   <a:srgbClr val="333333"/>
                 </a:solidFill>
@@ -7259,8 +7278,8 @@
         </p:nvSpPr>
         <p:spPr>
           <a:xfrm>
-            <a:off x="422419" y="21148530"/>
-            <a:ext cx="10191338" cy="621792"/>
+            <a:off x="422419" y="21814137"/>
+            <a:ext cx="10191338" cy="585216"/>
           </a:xfrm>
           <a:prstGeom prst="rect">
             <a:avLst/>
@@ -7305,8 +7324,8 @@
         </p:nvSpPr>
         <p:spPr>
           <a:xfrm>
-            <a:off x="559580" y="21166818"/>
-            <a:ext cx="2926080" cy="585216"/>
+            <a:off x="559580" y="21823281"/>
+            <a:ext cx="2926080" cy="566928"/>
           </a:xfrm>
           <a:prstGeom prst="rect">
             <a:avLst/>
@@ -7328,7 +7347,7 @@
               </a:spcAft>
             </a:pPr>
             <a:r>
-              <a:rPr sz="2400" b="1">
+              <a:rPr sz="2300" b="1">
                 <a:solidFill>
                   <a:srgbClr val="000000"/>
                 </a:solidFill>
@@ -7347,8 +7366,8 @@
         </p:nvSpPr>
         <p:spPr>
           <a:xfrm>
-            <a:off x="3531380" y="21166818"/>
-            <a:ext cx="6899497" cy="585216"/>
+            <a:off x="3531380" y="21823281"/>
+            <a:ext cx="6899497" cy="566928"/>
           </a:xfrm>
           <a:prstGeom prst="rect">
             <a:avLst/>
@@ -7370,7 +7389,7 @@
               </a:spcAft>
             </a:pPr>
             <a:r>
-              <a:rPr sz="2200" b="0">
+              <a:rPr sz="2100" b="0">
                 <a:solidFill>
                   <a:srgbClr val="333333"/>
                 </a:solidFill>
@@ -7389,8 +7408,8 @@
         </p:nvSpPr>
         <p:spPr>
           <a:xfrm>
-            <a:off x="376700" y="21944058"/>
-            <a:ext cx="10282778" cy="2186749"/>
+            <a:off x="376700" y="22563945"/>
+            <a:ext cx="10282778" cy="1826005"/>
           </a:xfrm>
           <a:prstGeom prst="rect">
             <a:avLst/>
@@ -7418,7 +7437,7 @@
                 </a:solidFill>
                 <a:latin typeface="Arial"/>
               </a:rPr>
-              <a:t>A site counts as exposed if it lies within 2.4 km of land rated High or Very High for wildfire, inside a FEMA Special Flood Hazard Area, or at MCE_G peak ground acceleration of 0.30 g or above. Where a layer has no value there, the site is recorded as unknown, not as safe.</a:t>
+              <a:t>A site counts as exposed if it lies within 2.4 km of land rated High or Very High for wildfire, inside a FEMA Special Flood Hazard Area, or at MCE_G peak ground acceleration of 0.30 g or above. A missing value is recorded as unknown, not safe.</a:t>
             </a:r>
           </a:p>
         </p:txBody>

--- a/figures/Oughton_Avilash_Angirekula_2026ASSIP_Poster.pptx
+++ b/figures/Oughton_Avilash_Angirekula_2026ASSIP_Poster.pptx
@@ -5240,7 +5240,7 @@
         <p:spPr>
           <a:xfrm>
             <a:off x="376700" y="5251774"/>
-            <a:ext cx="10282778" cy="4010723"/>
+            <a:ext cx="10282778" cy="4371466"/>
           </a:xfrm>
           <a:prstGeom prst="rect">
             <a:avLst/>
@@ -5319,7 +5319,7 @@
                 </a:solidFill>
                 <a:latin typeface="Arial"/>
               </a:rPr>
-              <a:t>•  We built an open, building-level inventory of the contiguous US, with positional uncertainty carried through the hazard sampling.</a:t>
+              <a:t>•  We built a free, public, building-level inventory of the contiguous US, and tested how much the answer moves when a coordinate is wrong.</a:t>
             </a:r>
           </a:p>
           <a:p>
@@ -6023,7 +6023,7 @@
                 </a:solidFill>
                 <a:latin typeface="Arial"/>
               </a:rPr>
-              <a:t>We merged OpenStreetMap, PeeringDB and Wikidata into one row per site across the contiguous US, logging all 194 merges with their evidence.</a:t>
+              <a:t>We merged OpenStreetMap, PeeringDB and Wikidata into one record per site across the contiguous US, matching on name and distance, with written evidence kept for all 194 merges.</a:t>
             </a:r>
           </a:p>
           <a:p>
@@ -6042,7 +6042,7 @@
                 </a:solidFill>
                 <a:latin typeface="Arial"/>
               </a:rPr>
-              <a:t>Every coordinate was checked against FEMA USA Structures footprints. 1,681 fall inside a building, 993 match the nearest, 22 have no match, and we reviewed 1,150 against satellite imagery by hand.</a:t>
+              <a:t>Against FEMA USA Structures footprints, 1,681 coordinates fall inside a building, 993 match the nearest and 22 have no match. A second non-OSM source confirmed 1,546, and we re-checked the 1,150 least certain with an AI-assisted pipeline we then reviewed.</a:t>
             </a:r>
           </a:p>
           <a:p>
@@ -6061,7 +6061,7 @@
                 </a:solidFill>
                 <a:latin typeface="Arial"/>
               </a:rPr>
-              <a:t>Our first seismic layer failed validation (22 of 150 test sites within 10%, median bias +32%), so we replaced it with per-facility queries:</a:t>
+              <a:t>Our first seismic layer failed validation against USGS reference values (22 of 150 sites within 10%), so we replaced it:</a:t>
             </a:r>
           </a:p>
         </p:txBody>
@@ -6116,7 +6116,7 @@
                 </a:solidFill>
                 <a:latin typeface="Arial"/>
               </a:rPr>
-              <a:t>Exposure is set by geography. Virginia's 409 sites are 0.7% exposed. California's 223 are 100%.</a:t>
+              <a:t>The hazard map and the water map barely overlap. Counting water stress takes the fleet from 35% to 56% constrained.</a:t>
             </a:r>
           </a:p>
         </p:txBody>
@@ -6233,7 +6233,7 @@
                 </a:solidFill>
                 <a:latin typeface="Arial"/>
               </a:rPr>
-              <a:t>•  A national average hides the pattern. Only 7 of the 32 states with 20 or more sites fall between 10% and 60% exposed.</a:t>
+              <a:t>•  The 35% headline is the least useful number here. Only 7 of 32 states with 20 or more sites fall between 10% and 60% exposed.</a:t>
             </a:r>
           </a:p>
           <a:p>
@@ -6252,7 +6252,7 @@
                 </a:solidFill>
                 <a:latin typeface="Arial"/>
               </a:rPr>
-              <a:t>•  Most sites sit in low-exposure regions, but we cannot say whether hazard influenced siting.</a:t>
+              <a:t>•  Water stress is not a natural hazard, but it constrains the same buildings, and it is high where the hazard map says clear.</a:t>
             </a:r>
           </a:p>
           <a:p>
@@ -6271,7 +6271,7 @@
                 </a:solidFill>
                 <a:latin typeface="Arial"/>
               </a:rPr>
-              <a:t>•  New Jersey and California are both 100% exposed for opposite reasons, so a national index must report hazards separately.</a:t>
+              <a:t>•  New Jersey and California are both 100% exposed for opposite reasons, so one national score would hide what a site faces.</a:t>
             </a:r>
           </a:p>
           <a:p>
@@ -6290,7 +6290,7 @@
                 </a:solidFill>
                 <a:latin typeface="Arial"/>
               </a:rPr>
-              <a:t>•  Next: fragility curves to turn exposure into estimated loss.</a:t>
+              <a:t>•  Next: fragility curves, to turn exposure into loss.</a:t>
             </a:r>
           </a:p>
         </p:txBody>
@@ -6370,7 +6370,7 @@
                 </a:solidFill>
                 <a:latin typeface="Arial"/>
               </a:rPr>
-              <a:t>Petersen, M.D. et al. (2023) 2023 US National Seismic Hazard Model. USGS. doi:10.5066/P9GNPCOD</a:t>
+              <a:t>USGS (2026) ASCE 7-22 Seismic Design Maps web service. earthquake.usgs.gov/ws/designmaps</a:t>
             </a:r>
           </a:p>
           <a:p>
@@ -6550,8 +6550,8 @@
         </p:nvSpPr>
         <p:spPr>
           <a:xfrm>
-            <a:off x="376700" y="9500241"/>
-            <a:ext cx="10282778" cy="4852892"/>
+            <a:off x="376700" y="9860984"/>
+            <a:ext cx="10282778" cy="4547647"/>
           </a:xfrm>
           <a:prstGeom prst="rect">
             <a:avLst/>
@@ -6596,8 +6596,8 @@
         </p:nvSpPr>
         <p:spPr>
           <a:xfrm>
-            <a:off x="376700" y="9500241"/>
-            <a:ext cx="128016" cy="4852892"/>
+            <a:off x="376700" y="9860984"/>
+            <a:ext cx="128016" cy="4547647"/>
           </a:xfrm>
           <a:prstGeom prst="rect">
             <a:avLst/>
@@ -6640,8 +6640,8 @@
         </p:nvSpPr>
         <p:spPr>
           <a:xfrm>
-            <a:off x="614444" y="9573393"/>
-            <a:ext cx="9871298" cy="4706588"/>
+            <a:off x="614444" y="9934136"/>
+            <a:ext cx="9871298" cy="4401343"/>
           </a:xfrm>
           <a:prstGeom prst="rect">
             <a:avLst/>
@@ -6663,7 +6663,7 @@
               </a:spcAft>
             </a:pPr>
             <a:r>
-              <a:rPr sz="2500" b="1">
+              <a:rPr sz="2300" b="1">
                 <a:solidFill>
                   <a:srgbClr val="000000"/>
                 </a:solidFill>
@@ -6673,7 +6673,7 @@
             </a:r>
           </a:p>
           <a:p>
-            <a:pPr algn="l" marL="320040" indent="-320040">
+            <a:pPr algn="l" marL="293370" indent="-293370">
               <a:lnSpc>
                 <a:spcPct val="95000"/>
               </a:lnSpc>
@@ -6682,17 +6682,17 @@
               </a:spcAft>
             </a:pPr>
             <a:r>
-              <a:rPr sz="2400" b="0">
+              <a:rPr sz="2200" b="0">
                 <a:solidFill>
                   <a:srgbClr val="000000"/>
                 </a:solidFill>
                 <a:latin typeface="Arial"/>
               </a:rPr>
-              <a:t>•  Coverage is uneven. OpenStreetMap supplies 83% of Virginia's records against 48% of California's, so state contrasts partly reflect who mapped them.</a:t>
-            </a:r>
-          </a:p>
-          <a:p>
-            <a:pPr algn="l" marL="320040" indent="-320040">
+              <a:t>•  Coverage is uneven. 83% of our Virginia sites come from OpenStreetMap against 48% of our California ones, so part of the gap between states reflects who did the mapping.</a:t>
+            </a:r>
+          </a:p>
+          <a:p>
+            <a:pPr algn="l" marL="293370" indent="-293370">
               <a:lnSpc>
                 <a:spcPct val="95000"/>
               </a:lnSpc>
@@ -6701,17 +6701,17 @@
               </a:spcAft>
             </a:pPr>
             <a:r>
-              <a:rPr sz="2400" b="0">
+              <a:rPr sz="2200" b="0">
                 <a:solidFill>
                   <a:srgbClr val="000000"/>
                 </a:solidFill>
                 <a:latin typeface="Arial"/>
               </a:rPr>
-              <a:t>•  Hail and wind reports rise with population density (Spearman 0.39 and 0.34), so we excluded both. Lightning, tornado and cyclone rates are computed but not folded in.</a:t>
-            </a:r>
-          </a:p>
-          <a:p>
-            <a:pPr algn="l" marL="320040" indent="-320040">
+              <a:t>•  Hail and wind come from eyewitness reports, so within a state their rates track how built-up the surroundings are (rank correlation 0.39 and 0.34). We left both out, along with lightning, tornado and hurricane.</a:t>
+            </a:r>
+          </a:p>
+          <a:p>
+            <a:pPr algn="l" marL="293370" indent="-293370">
               <a:lnSpc>
                 <a:spcPct val="95000"/>
               </a:lnSpc>
@@ -6720,17 +6720,17 @@
               </a:spcAft>
             </a:pPr>
             <a:r>
-              <a:rPr sz="2400" b="0">
+              <a:rPr sz="2200" b="0">
                 <a:solidFill>
                   <a:srgbClr val="000000"/>
                 </a:solidFill>
                 <a:latin typeface="Arial"/>
               </a:rPr>
-              <a:t>•  No open source lists power capacity, so a small suite counts the same as a large campus.</a:t>
-            </a:r>
-          </a:p>
-          <a:p>
-            <a:pPr algn="l" marL="320040" indent="-320040">
+              <a:t>•  No public source lists power capacity, so a single server room counts the same as a 100 MW campus.</a:t>
+            </a:r>
+          </a:p>
+          <a:p>
+            <a:pPr algn="l" marL="293370" indent="-293370">
               <a:lnSpc>
                 <a:spcPct val="95000"/>
               </a:lnSpc>
@@ -6739,7 +6739,7 @@
               </a:spcAft>
             </a:pPr>
             <a:r>
-              <a:rPr sz="2400" b="0">
+              <a:rPr sz="2200" b="0">
                 <a:solidFill>
                   <a:srgbClr val="000000"/>
                 </a:solidFill>
@@ -6875,7 +6875,7 @@
                 </a:solidFill>
                 <a:latin typeface="Arial"/>
               </a:rPr>
-              <a:t>USGS ASCE 7-22, MCE_G PGA, site class BC</a:t>
+              <a:t>USGS ASCE 7-22 shaking, 2% chance in 50 yr</a:t>
             </a:r>
           </a:p>
         </p:txBody>
@@ -6888,7 +6888,7 @@
         </p:nvSpPr>
         <p:spPr>
           <a:xfrm>
-            <a:off x="422419" y="19839033"/>
+            <a:off x="422419" y="19811601"/>
             <a:ext cx="10191338" cy="585216"/>
           </a:xfrm>
           <a:prstGeom prst="rect">
@@ -6934,7 +6934,7 @@
         </p:nvSpPr>
         <p:spPr>
           <a:xfrm>
-            <a:off x="559580" y="19848177"/>
+            <a:off x="559580" y="19820745"/>
             <a:ext cx="2926080" cy="566928"/>
           </a:xfrm>
           <a:prstGeom prst="rect">
@@ -6976,7 +6976,7 @@
         </p:nvSpPr>
         <p:spPr>
           <a:xfrm>
-            <a:off x="3531380" y="19848177"/>
+            <a:off x="3531380" y="19820745"/>
             <a:ext cx="6899497" cy="566928"/>
           </a:xfrm>
           <a:prstGeom prst="rect">
@@ -7018,7 +7018,7 @@
         </p:nvSpPr>
         <p:spPr>
           <a:xfrm>
-            <a:off x="422419" y="20497401"/>
+            <a:off x="422419" y="20442537"/>
             <a:ext cx="10191338" cy="585216"/>
           </a:xfrm>
           <a:prstGeom prst="rect">
@@ -7064,7 +7064,7 @@
         </p:nvSpPr>
         <p:spPr>
           <a:xfrm>
-            <a:off x="559580" y="20506545"/>
+            <a:off x="559580" y="20451681"/>
             <a:ext cx="2926080" cy="566928"/>
           </a:xfrm>
           <a:prstGeom prst="rect">
@@ -7106,7 +7106,7 @@
         </p:nvSpPr>
         <p:spPr>
           <a:xfrm>
-            <a:off x="3531380" y="20506545"/>
+            <a:off x="3531380" y="20451681"/>
             <a:ext cx="6899497" cy="566928"/>
           </a:xfrm>
           <a:prstGeom prst="rect">
@@ -7148,7 +7148,7 @@
         </p:nvSpPr>
         <p:spPr>
           <a:xfrm>
-            <a:off x="422419" y="21155769"/>
+            <a:off x="422419" y="21073473"/>
             <a:ext cx="10191338" cy="585216"/>
           </a:xfrm>
           <a:prstGeom prst="rect">
@@ -7194,7 +7194,7 @@
         </p:nvSpPr>
         <p:spPr>
           <a:xfrm>
-            <a:off x="559580" y="21164913"/>
+            <a:off x="559580" y="21082617"/>
             <a:ext cx="2926080" cy="566928"/>
           </a:xfrm>
           <a:prstGeom prst="rect">
@@ -7236,7 +7236,7 @@
         </p:nvSpPr>
         <p:spPr>
           <a:xfrm>
-            <a:off x="3531380" y="21164913"/>
+            <a:off x="3531380" y="21082617"/>
             <a:ext cx="6899497" cy="566928"/>
           </a:xfrm>
           <a:prstGeom prst="rect">
@@ -7278,7 +7278,7 @@
         </p:nvSpPr>
         <p:spPr>
           <a:xfrm>
-            <a:off x="422419" y="21814137"/>
+            <a:off x="422419" y="21704409"/>
             <a:ext cx="10191338" cy="585216"/>
           </a:xfrm>
           <a:prstGeom prst="rect">
@@ -7324,7 +7324,7 @@
         </p:nvSpPr>
         <p:spPr>
           <a:xfrm>
-            <a:off x="559580" y="21823281"/>
+            <a:off x="559580" y="21713553"/>
             <a:ext cx="2926080" cy="566928"/>
           </a:xfrm>
           <a:prstGeom prst="rect">
@@ -7366,7 +7366,7 @@
         </p:nvSpPr>
         <p:spPr>
           <a:xfrm>
-            <a:off x="3531380" y="21823281"/>
+            <a:off x="3531380" y="21713553"/>
             <a:ext cx="6899497" cy="566928"/>
           </a:xfrm>
           <a:prstGeom prst="rect">
@@ -7408,7 +7408,7 @@
         </p:nvSpPr>
         <p:spPr>
           <a:xfrm>
-            <a:off x="376700" y="22563945"/>
+            <a:off x="376700" y="22426785"/>
             <a:ext cx="10282778" cy="1826005"/>
           </a:xfrm>
           <a:prstGeom prst="rect">
@@ -7437,7 +7437,7 @@
                 </a:solidFill>
                 <a:latin typeface="Arial"/>
               </a:rPr>
-              <a:t>A site counts as exposed if it lies within 2.4 km of land rated High or Very High for wildfire, inside a FEMA Special Flood Hazard Area, or at MCE_G peak ground acceleration of 0.30 g or above. A missing value is recorded as unknown, not safe.</a:t>
+              <a:t>A site counts as exposed if it lies within 2.4 km of land rated High or Very High for wildfire, inside a FEMA Special Flood Hazard Area, or at peak ground acceleration of 0.30 g or above. The 2.4 km radius is the 1.5 mile ember-cast distance.</a:t>
             </a:r>
           </a:p>
         </p:txBody>
@@ -7521,7 +7521,7 @@
                 </a:solidFill>
                 <a:latin typeface="Arial"/>
               </a:rPr>
-              <a:t>facilities mapped</a:t>
+              <a:t>facilities located</a:t>
             </a:r>
           </a:p>
         </p:txBody>
@@ -7563,7 +7563,7 @@
                 </a:solidFill>
                 <a:latin typeface="Arial"/>
               </a:rPr>
-              <a:t>35%</a:t>
+              <a:t>954</a:t>
             </a:r>
           </a:p>
         </p:txBody>
@@ -7647,7 +7647,7 @@
                 </a:solidFill>
                 <a:latin typeface="Arial"/>
               </a:rPr>
-              <a:t>0.7%</a:t>
+              <a:t>952</a:t>
             </a:r>
           </a:p>
         </p:txBody>
@@ -7689,7 +7689,7 @@
                 </a:solidFill>
                 <a:latin typeface="Arial"/>
               </a:rPr>
-              <a:t>of Virginia's 409</a:t>
+              <a:t>in a high water-stress basin</a:t>
             </a:r>
           </a:p>
         </p:txBody>
@@ -7731,7 +7731,7 @@
                 </a:solidFill>
                 <a:latin typeface="Arial"/>
               </a:rPr>
-              <a:t>100%</a:t>
+              <a:t>563</a:t>
             </a:r>
           </a:p>
         </p:txBody>
@@ -7773,7 +7773,7 @@
                 </a:solidFill>
                 <a:latin typeface="Arial"/>
               </a:rPr>
-              <a:t>of California's 223</a:t>
+              <a:t>water-stressed only</a:t>
             </a:r>
           </a:p>
         </p:txBody>
@@ -7811,7 +7811,7 @@
         <p:spPr>
           <a:xfrm>
             <a:off x="10965973" y="13391100"/>
-            <a:ext cx="10781748" cy="993521"/>
+            <a:ext cx="10781748" cy="1298765"/>
           </a:xfrm>
           <a:prstGeom prst="rect">
             <a:avLst/>
@@ -7839,7 +7839,7 @@
                 </a:solidFill>
                 <a:latin typeface="Arial"/>
               </a:rPr>
-              <a:t>Fig 1. One third of US data centers face a mapped hazard. Sites facing two or more (orange) concentrate in California and the Northeast.</a:t>
+              <a:t>Fig 1. One third of US data centers face a mapped hazard. Of the 205 facing two or more (orange), California holds 119, with smaller clusters in Utah, Nevada and New Jersey.</a:t>
             </a:r>
           </a:p>
         </p:txBody>
@@ -7852,8 +7852,8 @@
         </p:nvSpPr>
         <p:spPr>
           <a:xfrm>
-            <a:off x="10965973" y="14476061"/>
-            <a:ext cx="10781748" cy="4010723"/>
+            <a:off x="10965973" y="14781305"/>
+            <a:ext cx="10781748" cy="4605210"/>
           </a:xfrm>
           <a:prstGeom prst="rect">
             <a:avLst/>
@@ -7881,7 +7881,7 @@
                 </a:solidFill>
                 <a:latin typeface="Arial"/>
               </a:rPr>
-              <a:t>Which hazard dominates depends on the region. New Jersey reaches 100% through wildfire alone (the Pine Barrens rate High or Very High) and 0% through earthquake. California is 96% earthquake.</a:t>
+              <a:t>952 sites lie in a high or extremely-high water-stress basin, almost exactly the 954 facing a mapped hazard, but only 389 are the same sites. Water stress lands hardest where the hazard map says clear: Virginia is 0.7% hazard-exposed and 31% water-stressed, Illinois 2.7% and 95%.</a:t>
             </a:r>
           </a:p>
           <a:p>
@@ -7900,7 +7900,7 @@
                 </a:solidFill>
                 <a:latin typeface="Arial"/>
               </a:rPr>
-              <a:t>Nationally 646 sites are exposed to wildfire, 448 to earthquake and 71 to flood. 205 face more than one, so these overlap.</a:t>
+              <a:t>Which hazard dominates depends on the region. New Jersey reaches 100% through wildfire alone and 0% through earthquake, California 96% earthquake. Nationally 646 sites are exposed to wildfire, 448 to earthquake and 71 to flood, and 205 face more than one.</a:t>
             </a:r>
           </a:p>
           <a:p>
@@ -7919,26 +7919,7 @@
                 </a:solidFill>
                 <a:latin typeface="Arial"/>
               </a:rPr>
-              <a:t>Virginia avoids the mapped hazards but not water. 31% of its 409 sites lie in high water-stress basins, against 0.7% for the three hazards.</a:t>
-            </a:r>
-          </a:p>
-          <a:p>
-            <a:pPr algn="l">
-              <a:lnSpc>
-                <a:spcPct val="95000"/>
-              </a:lnSpc>
-              <a:spcAft>
-                <a:spcPts val="800"/>
-              </a:spcAft>
-            </a:pPr>
-            <a:r>
-              <a:rPr sz="2600" b="0">
-                <a:solidFill>
-                  <a:srgbClr val="000000"/>
-                </a:solidFill>
-                <a:latin typeface="Arial"/>
-              </a:rPr>
-              <a:t>Widening the wildfire buffer from 2.4 km to 5 km takes that count from 646 to 953, so the threshold moves the answer by half.</a:t>
+              <a:t>Widening the wildfire buffer to 5 km takes that count from 646 to 953, a 48% jump.</a:t>
             </a:r>
           </a:p>
         </p:txBody>
@@ -7959,8 +7940,8 @@
         </p:blipFill>
         <p:spPr>
           <a:xfrm>
-            <a:off x="10965973" y="18578224"/>
-            <a:ext cx="10781748" cy="4238557"/>
+            <a:off x="10965973" y="19477956"/>
+            <a:ext cx="10781748" cy="4075236"/>
           </a:xfrm>
           <a:prstGeom prst="rect">
             <a:avLst/>
@@ -7975,8 +7956,8 @@
         </p:nvSpPr>
         <p:spPr>
           <a:xfrm>
-            <a:off x="10965973" y="22871645"/>
-            <a:ext cx="10781748" cy="993521"/>
+            <a:off x="10965973" y="23608056"/>
+            <a:ext cx="10781748" cy="688276"/>
           </a:xfrm>
           <a:prstGeom prst="rect">
             <a:avLst/>
@@ -8004,7 +7985,7 @@
                 </a:solidFill>
                 <a:latin typeface="Arial"/>
               </a:rPr>
-              <a:t>Fig 2. Every state with 20 or more facilities. 25 of 32 sit below 10% or above 60%, and colour shows which hazard drives each one.</a:t>
+              <a:t>Fig 2. All 32 states with 20 or more sites, coloured by dominant hazard.</a:t>
             </a:r>
           </a:p>
         </p:txBody>
@@ -8136,7 +8117,7 @@
                 </a:solidFill>
                 <a:latin typeface="Arial"/>
               </a:rPr>
-              <a:t>Two checks that came back negative</a:t>
+              <a:t>Two checks on our choices</a:t>
             </a:r>
           </a:p>
           <a:p>
@@ -8155,7 +8136,7 @@
                 </a:solidFill>
                 <a:latin typeface="Arial"/>
               </a:rPr>
-              <a:t>Sampling hazard across a building's whole footprint instead of its centre changed the answer for 29 of the 326 sites where both could be compared. Building height showed no association with exposure once state was held constant.</a:t>
+              <a:t>Sampling across a building's whole footprint instead of its centre changed the answer for 29 of the 326 sites where both could be compared. Taller buildings looked more exposed nationally, but that vanished within states, so it was geography and not height.</a:t>
             </a:r>
           </a:p>
         </p:txBody>
@@ -8177,7 +8158,7 @@
         <p:spPr>
           <a:xfrm>
             <a:off x="22090621" y="11242586"/>
-            <a:ext cx="10397100" cy="3460706"/>
+            <a:ext cx="10397100" cy="3301903"/>
           </a:xfrm>
           <a:prstGeom prst="rect">
             <a:avLst/>
@@ -8192,8 +8173,8 @@
         </p:nvSpPr>
         <p:spPr>
           <a:xfrm>
-            <a:off x="22090621" y="14739868"/>
-            <a:ext cx="10397100" cy="688276"/>
+            <a:off x="22090621" y="14581065"/>
+            <a:ext cx="10397100" cy="993521"/>
           </a:xfrm>
           <a:prstGeom prst="rect">
             <a:avLst/>
@@ -8221,7 +8202,7 @@
                 </a:solidFill>
                 <a:latin typeface="Arial"/>
               </a:rPr>
-              <a:t>Fig 3. We re-ran the analysis with simulated location error.</a:t>
+              <a:t>Fig 3. Moving each coordinate 500 times flips the wildfire class for at most 9% of sites placed within 100 m.</a:t>
             </a:r>
           </a:p>
         </p:txBody>

--- a/figures/Oughton_Avilash_Angirekula_2026ASSIP_Poster.pptx
+++ b/figures/Oughton_Avilash_Angirekula_2026ASSIP_Poster.pptx
@@ -7409,7 +7409,7 @@
         <p:spPr>
           <a:xfrm>
             <a:off x="376700" y="22426785"/>
-            <a:ext cx="10282778" cy="1826005"/>
+            <a:ext cx="10282778" cy="2186749"/>
           </a:xfrm>
           <a:prstGeom prst="rect">
             <a:avLst/>
@@ -7437,7 +7437,7 @@
                 </a:solidFill>
                 <a:latin typeface="Arial"/>
               </a:rPr>
-              <a:t>A site counts as exposed if it lies within 2.4 km of land rated High or Very High for wildfire, inside a FEMA Special Flood Hazard Area, or at peak ground acceleration of 0.30 g or above. The 2.4 km radius is the 1.5 mile ember-cast distance.</a:t>
+              <a:t>A site counts as exposed if it lies within 2.4 km of land rated High or Very High for wildfire, inside a FEMA Special Flood Hazard Area, or at peak ground acceleration of 0.30 g or above. Wildfire is buffered because 2,284 sites sit on land the wildfire map classes as developed, so the pixel under the building says nothing.</a:t>
             </a:r>
           </a:p>
         </p:txBody>
@@ -7853,7 +7853,7 @@
         <p:spPr>
           <a:xfrm>
             <a:off x="10965973" y="14781305"/>
-            <a:ext cx="10781748" cy="4605210"/>
+            <a:ext cx="10781748" cy="4244467"/>
           </a:xfrm>
           <a:prstGeom prst="rect">
             <a:avLst/>
@@ -7919,7 +7919,7 @@
                 </a:solidFill>
                 <a:latin typeface="Arial"/>
               </a:rPr>
-              <a:t>Widening the wildfire buffer to 5 km takes that count from 646 to 953, a 48% jump.</a:t>
+              <a:t>Widening the buffer to 5 km takes that count to 953, a 48% jump.</a:t>
             </a:r>
           </a:p>
         </p:txBody>
@@ -7940,7 +7940,7 @@
         </p:blipFill>
         <p:spPr>
           <a:xfrm>
-            <a:off x="10965973" y="19477956"/>
+            <a:off x="10965973" y="19117212"/>
             <a:ext cx="10781748" cy="4075236"/>
           </a:xfrm>
           <a:prstGeom prst="rect">
@@ -7956,7 +7956,7 @@
         </p:nvSpPr>
         <p:spPr>
           <a:xfrm>
-            <a:off x="10965973" y="23608056"/>
+            <a:off x="10965973" y="23247313"/>
             <a:ext cx="10781748" cy="688276"/>
           </a:xfrm>
           <a:prstGeom prst="rect">

--- a/figures/Oughton_Avilash_Angirekula_2026ASSIP_Poster.pptx
+++ b/figures/Oughton_Avilash_Angirekula_2026ASSIP_Poster.pptx
@@ -6081,7 +6081,7 @@
         <p:spPr>
           <a:xfrm>
             <a:off x="10965973" y="6952558"/>
-            <a:ext cx="10781748" cy="1187767"/>
+            <a:ext cx="10781748" cy="1590135"/>
           </a:xfrm>
           <a:prstGeom prst="rect">
             <a:avLst/>
@@ -6116,7 +6116,7 @@
                 </a:solidFill>
                 <a:latin typeface="Arial"/>
               </a:rPr>
-              <a:t>The hazard map and the water map barely overlap. Counting water stress takes the fleet from 35% to 56% constrained.</a:t>
+              <a:t>Hazard and water stress pick out largely different buildings. Counting both raises the share under a physical constraint from 35% to 56%.</a:t>
             </a:r>
           </a:p>
         </p:txBody>
@@ -6198,7 +6198,7 @@
         <p:spPr>
           <a:xfrm>
             <a:off x="22090621" y="5251774"/>
-            <a:ext cx="10397100" cy="3289236"/>
+            <a:ext cx="10397100" cy="3649979"/>
           </a:xfrm>
           <a:prstGeom prst="rect">
             <a:avLst/>
@@ -6233,7 +6233,7 @@
                 </a:solidFill>
                 <a:latin typeface="Arial"/>
               </a:rPr>
-              <a:t>•  The 35% headline is the least useful number here. Only 7 of 32 states with 20 or more sites fall between 10% and 60% exposed.</a:t>
+              <a:t>•  A single national rate is close to meaningless. Only 7 of 32 states with 20 or more sites fall between 10% and 60% exposed.</a:t>
             </a:r>
           </a:p>
           <a:p>
@@ -6252,7 +6252,7 @@
                 </a:solidFill>
                 <a:latin typeface="Arial"/>
               </a:rPr>
-              <a:t>•  Water stress is not a natural hazard, but it constrains the same buildings, and it is high where the hazard map says clear.</a:t>
+              <a:t>•  We did not measure any site's water use, but the basins under the largest clusters are already over-drawn, and a hazard screen misses them.</a:t>
             </a:r>
           </a:p>
           <a:p>
@@ -6271,7 +6271,7 @@
                 </a:solidFill>
                 <a:latin typeface="Arial"/>
               </a:rPr>
-              <a:t>•  New Jersey and California are both 100% exposed for opposite reasons, so one national score would hide what a site faces.</a:t>
+              <a:t>•  New Jersey and California are both 100% exposed for opposite reasons, so one score hides what a site faces.</a:t>
             </a:r>
           </a:p>
           <a:p>
@@ -6551,7 +6551,7 @@
         <p:spPr>
           <a:xfrm>
             <a:off x="376700" y="9860984"/>
-            <a:ext cx="10282778" cy="4547647"/>
+            <a:ext cx="10282778" cy="4421943"/>
           </a:xfrm>
           <a:prstGeom prst="rect">
             <a:avLst/>
@@ -6597,7 +6597,7 @@
         <p:spPr>
           <a:xfrm>
             <a:off x="376700" y="9860984"/>
-            <a:ext cx="128016" cy="4547647"/>
+            <a:ext cx="128016" cy="4421943"/>
           </a:xfrm>
           <a:prstGeom prst="rect">
             <a:avLst/>
@@ -6641,7 +6641,7 @@
         <p:spPr>
           <a:xfrm>
             <a:off x="614444" y="9934136"/>
-            <a:ext cx="9871298" cy="4401343"/>
+            <a:ext cx="9871298" cy="4275639"/>
           </a:xfrm>
           <a:prstGeom prst="rect">
             <a:avLst/>
@@ -6707,7 +6707,7 @@
                 </a:solidFill>
                 <a:latin typeface="Arial"/>
               </a:rPr>
-              <a:t>•  Hail and wind come from eyewitness reports, so within a state their rates track how built-up the surroundings are (rank correlation 0.39 and 0.34). We left both out, along with lightning, tornado and hurricane.</a:t>
+              <a:t>•  Hail and wind come from eyewitness reports, so within a state their rates track the number of other sites within 40 km (Spearman 0.39 and 0.34). We left both out, along with lightning, tornado and hurricane.</a:t>
             </a:r>
           </a:p>
           <a:p>
@@ -6726,7 +6726,7 @@
                 </a:solidFill>
                 <a:latin typeface="Arial"/>
               </a:rPr>
-              <a:t>•  No public source lists power capacity, so a single server room counts the same as a 100 MW campus.</a:t>
+              <a:t>•  No public source lists power capacity, so a server room counts the same as a 100 MW campus.</a:t>
             </a:r>
           </a:p>
           <a:p>
@@ -6759,7 +6759,7 @@
         <p:spPr>
           <a:xfrm>
             <a:off x="422419" y="19180665"/>
-            <a:ext cx="10191338" cy="585216"/>
+            <a:ext cx="10191338" cy="548640"/>
           </a:xfrm>
           <a:prstGeom prst="rect">
             <a:avLst/>
@@ -6804,8 +6804,8 @@
         </p:nvSpPr>
         <p:spPr>
           <a:xfrm>
-            <a:off x="559580" y="19189809"/>
-            <a:ext cx="2926080" cy="566928"/>
+            <a:off x="559580" y="19180665"/>
+            <a:ext cx="2926080" cy="548640"/>
           </a:xfrm>
           <a:prstGeom prst="rect">
             <a:avLst/>
@@ -6827,7 +6827,7 @@
               </a:spcAft>
             </a:pPr>
             <a:r>
-              <a:rPr sz="2300" b="1">
+              <a:rPr sz="2200" b="1">
                 <a:solidFill>
                   <a:srgbClr val="000000"/>
                 </a:solidFill>
@@ -6846,8 +6846,8 @@
         </p:nvSpPr>
         <p:spPr>
           <a:xfrm>
-            <a:off x="3531380" y="19189809"/>
-            <a:ext cx="6899497" cy="566928"/>
+            <a:off x="3531380" y="19180665"/>
+            <a:ext cx="6899497" cy="548640"/>
           </a:xfrm>
           <a:prstGeom prst="rect">
             <a:avLst/>
@@ -6888,8 +6888,8 @@
         </p:nvSpPr>
         <p:spPr>
           <a:xfrm>
-            <a:off x="422419" y="19811601"/>
-            <a:ext cx="10191338" cy="585216"/>
+            <a:off x="422419" y="19729305"/>
+            <a:ext cx="10191338" cy="548640"/>
           </a:xfrm>
           <a:prstGeom prst="rect">
             <a:avLst/>
@@ -6934,8 +6934,8 @@
         </p:nvSpPr>
         <p:spPr>
           <a:xfrm>
-            <a:off x="559580" y="19820745"/>
-            <a:ext cx="2926080" cy="566928"/>
+            <a:off x="559580" y="19729305"/>
+            <a:ext cx="2926080" cy="548640"/>
           </a:xfrm>
           <a:prstGeom prst="rect">
             <a:avLst/>
@@ -6957,7 +6957,7 @@
               </a:spcAft>
             </a:pPr>
             <a:r>
-              <a:rPr sz="2300" b="1">
+              <a:rPr sz="2200" b="1">
                 <a:solidFill>
                   <a:srgbClr val="000000"/>
                 </a:solidFill>
@@ -6976,8 +6976,8 @@
         </p:nvSpPr>
         <p:spPr>
           <a:xfrm>
-            <a:off x="3531380" y="19820745"/>
-            <a:ext cx="6899497" cy="566928"/>
+            <a:off x="3531380" y="19729305"/>
+            <a:ext cx="6899497" cy="548640"/>
           </a:xfrm>
           <a:prstGeom prst="rect">
             <a:avLst/>
@@ -7018,8 +7018,8 @@
         </p:nvSpPr>
         <p:spPr>
           <a:xfrm>
-            <a:off x="422419" y="20442537"/>
-            <a:ext cx="10191338" cy="585216"/>
+            <a:off x="422419" y="20277945"/>
+            <a:ext cx="10191338" cy="548640"/>
           </a:xfrm>
           <a:prstGeom prst="rect">
             <a:avLst/>
@@ -7064,8 +7064,8 @@
         </p:nvSpPr>
         <p:spPr>
           <a:xfrm>
-            <a:off x="559580" y="20451681"/>
-            <a:ext cx="2926080" cy="566928"/>
+            <a:off x="559580" y="20277945"/>
+            <a:ext cx="2926080" cy="548640"/>
           </a:xfrm>
           <a:prstGeom prst="rect">
             <a:avLst/>
@@ -7087,7 +7087,7 @@
               </a:spcAft>
             </a:pPr>
             <a:r>
-              <a:rPr sz="2300" b="1">
+              <a:rPr sz="2200" b="1">
                 <a:solidFill>
                   <a:srgbClr val="000000"/>
                 </a:solidFill>
@@ -7106,8 +7106,8 @@
         </p:nvSpPr>
         <p:spPr>
           <a:xfrm>
-            <a:off x="3531380" y="20451681"/>
-            <a:ext cx="6899497" cy="566928"/>
+            <a:off x="3531380" y="20277945"/>
+            <a:ext cx="6899497" cy="548640"/>
           </a:xfrm>
           <a:prstGeom prst="rect">
             <a:avLst/>
@@ -7135,7 +7135,7 @@
                 </a:solidFill>
                 <a:latin typeface="Arial"/>
               </a:rPr>
-              <a:t>FEMA NFHL layer 28, SFHA flag</a:t>
+              <a:t>FEMA flood layer, 1-in-100-year floodplain</a:t>
             </a:r>
           </a:p>
         </p:txBody>
@@ -7148,8 +7148,8 @@
         </p:nvSpPr>
         <p:spPr>
           <a:xfrm>
-            <a:off x="422419" y="21073473"/>
-            <a:ext cx="10191338" cy="585216"/>
+            <a:off x="422419" y="20826585"/>
+            <a:ext cx="10191338" cy="548640"/>
           </a:xfrm>
           <a:prstGeom prst="rect">
             <a:avLst/>
@@ -7194,8 +7194,8 @@
         </p:nvSpPr>
         <p:spPr>
           <a:xfrm>
-            <a:off x="559580" y="21082617"/>
-            <a:ext cx="2926080" cy="566928"/>
+            <a:off x="559580" y="20826585"/>
+            <a:ext cx="2926080" cy="548640"/>
           </a:xfrm>
           <a:prstGeom prst="rect">
             <a:avLst/>
@@ -7217,7 +7217,7 @@
               </a:spcAft>
             </a:pPr>
             <a:r>
-              <a:rPr sz="2300" b="1">
+              <a:rPr sz="2200" b="1">
                 <a:solidFill>
                   <a:srgbClr val="000000"/>
                 </a:solidFill>
@@ -7236,8 +7236,8 @@
         </p:nvSpPr>
         <p:spPr>
           <a:xfrm>
-            <a:off x="3531380" y="21082617"/>
-            <a:ext cx="6899497" cy="566928"/>
+            <a:off x="3531380" y="20826585"/>
+            <a:ext cx="6899497" cy="548640"/>
           </a:xfrm>
           <a:prstGeom prst="rect">
             <a:avLst/>
@@ -7265,7 +7265,7 @@
                 </a:solidFill>
                 <a:latin typeface="Arial"/>
               </a:rPr>
-              <a:t>WRI Aqueduct 4.0 (a supply limit, reported apart)</a:t>
+              <a:t>WRI Aqueduct 4.0, river-basin scale</a:t>
             </a:r>
           </a:p>
         </p:txBody>
@@ -7278,8 +7278,8 @@
         </p:nvSpPr>
         <p:spPr>
           <a:xfrm>
-            <a:off x="422419" y="21704409"/>
-            <a:ext cx="10191338" cy="585216"/>
+            <a:off x="422419" y="21375225"/>
+            <a:ext cx="10191338" cy="548640"/>
           </a:xfrm>
           <a:prstGeom prst="rect">
             <a:avLst/>
@@ -7324,8 +7324,8 @@
         </p:nvSpPr>
         <p:spPr>
           <a:xfrm>
-            <a:off x="559580" y="21713553"/>
-            <a:ext cx="2926080" cy="566928"/>
+            <a:off x="559580" y="21375225"/>
+            <a:ext cx="2926080" cy="548640"/>
           </a:xfrm>
           <a:prstGeom prst="rect">
             <a:avLst/>
@@ -7347,7 +7347,7 @@
               </a:spcAft>
             </a:pPr>
             <a:r>
-              <a:rPr sz="2300" b="1">
+              <a:rPr sz="2200" b="1">
                 <a:solidFill>
                   <a:srgbClr val="000000"/>
                 </a:solidFill>
@@ -7366,8 +7366,8 @@
         </p:nvSpPr>
         <p:spPr>
           <a:xfrm>
-            <a:off x="3531380" y="21713553"/>
-            <a:ext cx="6899497" cy="566928"/>
+            <a:off x="3531380" y="21375225"/>
+            <a:ext cx="6899497" cy="548640"/>
           </a:xfrm>
           <a:prstGeom prst="rect">
             <a:avLst/>
@@ -7408,7 +7408,7 @@
         </p:nvSpPr>
         <p:spPr>
           <a:xfrm>
-            <a:off x="376700" y="22426785"/>
+            <a:off x="376700" y="22015305"/>
             <a:ext cx="10282778" cy="2186749"/>
           </a:xfrm>
           <a:prstGeom prst="rect">
@@ -7437,7 +7437,7 @@
                 </a:solidFill>
                 <a:latin typeface="Arial"/>
               </a:rPr>
-              <a:t>A site counts as exposed if it lies within 2.4 km of land rated High or Very High for wildfire, inside a FEMA Special Flood Hazard Area, or at peak ground acceleration of 0.30 g or above. Wildfire is buffered because 2,284 sites sit on land the wildfire map classes as developed, so the pixel under the building says nothing.</a:t>
+              <a:t>A site counts as exposed if it lies within 2.4 km of land rated High or Very High for wildfire, inside a FEMA Special Flood Hazard Area, or at peak ground acceleration of 0.30 g or above. Wildfire is buffered because 2,284 sites sit on non-burnable land, where the pixel under the building says nothing.</a:t>
             </a:r>
           </a:p>
         </p:txBody>
@@ -7794,8 +7794,8 @@
         </p:blipFill>
         <p:spPr>
           <a:xfrm>
-            <a:off x="10965973" y="8231765"/>
-            <a:ext cx="10781748" cy="5086182"/>
+            <a:off x="10965973" y="8634133"/>
+            <a:ext cx="10781748" cy="4932334"/>
           </a:xfrm>
           <a:prstGeom prst="rect">
             <a:avLst/>
@@ -7810,7 +7810,7 @@
         </p:nvSpPr>
         <p:spPr>
           <a:xfrm>
-            <a:off x="10965973" y="13391100"/>
+            <a:off x="10965973" y="13639618"/>
             <a:ext cx="10781748" cy="1298765"/>
           </a:xfrm>
           <a:prstGeom prst="rect">
@@ -7852,8 +7852,8 @@
         </p:nvSpPr>
         <p:spPr>
           <a:xfrm>
-            <a:off x="10965973" y="14781305"/>
-            <a:ext cx="10781748" cy="4244467"/>
+            <a:off x="10965973" y="15029824"/>
+            <a:ext cx="10781748" cy="4965953"/>
           </a:xfrm>
           <a:prstGeom prst="rect">
             <a:avLst/>
@@ -7881,7 +7881,7 @@
                 </a:solidFill>
                 <a:latin typeface="Arial"/>
               </a:rPr>
-              <a:t>952 sites lie in a high or extremely-high water-stress basin, almost exactly the 954 facing a mapped hazard, but only 389 are the same sites. Water stress lands hardest where the hazard map says clear: Virginia is 0.7% hazard-exposed and 31% water-stressed, Illinois 2.7% and 95%.</a:t>
+              <a:t>952 sites lie in a high or extremely-high water-stress basin, almost exactly the 954 facing a mapped hazard, but only 389 are the same sites. Some of the largest clusters are stressed while their hazard maps read clear: Virginia is 0.7% hazard-exposed and 31% water-stressed, Illinois 2.7% and 95%.</a:t>
             </a:r>
           </a:p>
           <a:p>
@@ -7900,7 +7900,7 @@
                 </a:solidFill>
                 <a:latin typeface="Arial"/>
               </a:rPr>
-              <a:t>Which hazard dominates depends on the region. New Jersey reaches 100% through wildfire alone and 0% through earthquake, California 96% earthquake. Nationally 646 sites are exposed to wildfire, 448 to earthquake and 71 to flood, and 205 face more than one.</a:t>
+              <a:t>Which hazard dominates depends on the region. New Jersey reaches 100% through wildfire alone and 0% through earthquake, California 96% earthquake. Nationally 646 sites are exposed to wildfire, 448 to earthquake and 71 to flood.</a:t>
             </a:r>
           </a:p>
           <a:p>
@@ -7919,7 +7919,7 @@
                 </a:solidFill>
                 <a:latin typeface="Arial"/>
               </a:rPr>
-              <a:t>Widening the buffer to 5 km takes that count to 953, a 48% jump.</a:t>
+              <a:t>Widening the wildfire buffer from 2.4 km to 5 km takes the wildfire count from 646 to 953, so that result is a statement about the buffer as much as about the site.</a:t>
             </a:r>
           </a:p>
         </p:txBody>
@@ -7940,8 +7940,8 @@
         </p:blipFill>
         <p:spPr>
           <a:xfrm>
-            <a:off x="10965973" y="19117212"/>
-            <a:ext cx="10781748" cy="4075236"/>
+            <a:off x="10965973" y="20087218"/>
+            <a:ext cx="10781748" cy="3410141"/>
           </a:xfrm>
           <a:prstGeom prst="rect">
             <a:avLst/>
@@ -7956,7 +7956,7 @@
         </p:nvSpPr>
         <p:spPr>
           <a:xfrm>
-            <a:off x="10965973" y="23247313"/>
+            <a:off x="10965973" y="23552223"/>
             <a:ext cx="10781748" cy="688276"/>
           </a:xfrm>
           <a:prstGeom prst="rect">
@@ -7998,8 +7998,8 @@
         </p:nvSpPr>
         <p:spPr>
           <a:xfrm>
-            <a:off x="22090621" y="8723890"/>
-            <a:ext cx="10397100" cy="2390679"/>
+            <a:off x="22090621" y="9084634"/>
+            <a:ext cx="10397100" cy="2043811"/>
           </a:xfrm>
           <a:prstGeom prst="rect">
             <a:avLst/>
@@ -8044,8 +8044,8 @@
         </p:nvSpPr>
         <p:spPr>
           <a:xfrm>
-            <a:off x="22090621" y="8723890"/>
-            <a:ext cx="128016" cy="2390679"/>
+            <a:off x="22090621" y="9084634"/>
+            <a:ext cx="128016" cy="2043811"/>
           </a:xfrm>
           <a:prstGeom prst="rect">
             <a:avLst/>
@@ -8088,8 +8088,8 @@
         </p:nvSpPr>
         <p:spPr>
           <a:xfrm>
-            <a:off x="22328365" y="8797042"/>
-            <a:ext cx="9985620" cy="2244375"/>
+            <a:off x="22328365" y="9157786"/>
+            <a:ext cx="9985620" cy="1897507"/>
           </a:xfrm>
           <a:prstGeom prst="rect">
             <a:avLst/>
@@ -8117,7 +8117,7 @@
                 </a:solidFill>
                 <a:latin typeface="Arial"/>
               </a:rPr>
-              <a:t>Two checks on our choices</a:t>
+              <a:t>Two robustness checks</a:t>
             </a:r>
           </a:p>
           <a:p>
@@ -8136,7 +8136,7 @@
                 </a:solidFill>
                 <a:latin typeface="Arial"/>
               </a:rPr>
-              <a:t>Sampling across a building's whole footprint instead of its centre changed the answer for 29 of the 326 sites where both could be compared. Taller buildings looked more exposed nationally, but that vanished within states, so it was geography and not height.</a:t>
+              <a:t>Sampling across a whole footprint instead of its centre changed the answer for 29 of 326 comparable sites. Taller buildings looked more exposed nationally, but that vanished within states.</a:t>
             </a:r>
           </a:p>
         </p:txBody>
@@ -8157,8 +8157,8 @@
         </p:blipFill>
         <p:spPr>
           <a:xfrm>
-            <a:off x="22090621" y="11242586"/>
-            <a:ext cx="10397100" cy="3301903"/>
+            <a:off x="22090621" y="11256461"/>
+            <a:ext cx="10397100" cy="3227243"/>
           </a:xfrm>
           <a:prstGeom prst="rect">
             <a:avLst/>
@@ -8173,8 +8173,8 @@
         </p:nvSpPr>
         <p:spPr>
           <a:xfrm>
-            <a:off x="22090621" y="14581065"/>
-            <a:ext cx="10397100" cy="993521"/>
+            <a:off x="22090621" y="14520279"/>
+            <a:ext cx="10397100" cy="688276"/>
           </a:xfrm>
           <a:prstGeom prst="rect">
             <a:avLst/>
@@ -8202,7 +8202,7 @@
                 </a:solidFill>
                 <a:latin typeface="Arial"/>
               </a:rPr>
-              <a:t>Fig 3. Moving each coordinate 500 times flips the wildfire class for at most 9% of sites placed within 100 m.</a:t>
+              <a:t>Fig 3. Wildfire class under coordinate error.</a:t>
             </a:r>
           </a:p>
         </p:txBody>

--- a/figures/Oughton_Avilash_Angirekula_2026ASSIP_Poster.pptx
+++ b/figures/Oughton_Avilash_Angirekula_2026ASSIP_Poster.pptx
@@ -7941,7 +7941,7 @@
         <p:spPr>
           <a:xfrm>
             <a:off x="10965973" y="20087218"/>
-            <a:ext cx="10781748" cy="3410141"/>
+            <a:ext cx="10781748" cy="3471997"/>
           </a:xfrm>
           <a:prstGeom prst="rect">
             <a:avLst/>
@@ -7956,7 +7956,7 @@
         </p:nvSpPr>
         <p:spPr>
           <a:xfrm>
-            <a:off x="10965973" y="23552223"/>
+            <a:off x="10965973" y="23614079"/>
             <a:ext cx="10781748" cy="688276"/>
           </a:xfrm>
           <a:prstGeom prst="rect">

--- a/figures/Oughton_Avilash_Angirekula_2026ASSIP_Poster.pptx
+++ b/figures/Oughton_Avilash_Angirekula_2026ASSIP_Poster.pptx
@@ -7941,7 +7941,7 @@
         <p:spPr>
           <a:xfrm>
             <a:off x="10965973" y="20087218"/>
-            <a:ext cx="10781748" cy="3471997"/>
+            <a:ext cx="10781748" cy="3673701"/>
           </a:xfrm>
           <a:prstGeom prst="rect">
             <a:avLst/>
@@ -7956,7 +7956,7 @@
         </p:nvSpPr>
         <p:spPr>
           <a:xfrm>
-            <a:off x="10965973" y="23614079"/>
+            <a:off x="10965973" y="23815783"/>
             <a:ext cx="10781748" cy="688276"/>
           </a:xfrm>
           <a:prstGeom prst="rect">

--- a/figures/Oughton_Avilash_Angirekula_2026ASSIP_Poster.pptx
+++ b/figures/Oughton_Avilash_Angirekula_2026ASSIP_Poster.pptx
@@ -7941,7 +7941,7 @@
         <p:spPr>
           <a:xfrm>
             <a:off x="10965973" y="20087218"/>
-            <a:ext cx="10781748" cy="3673701"/>
+            <a:ext cx="10781748" cy="3372490"/>
           </a:xfrm>
           <a:prstGeom prst="rect">
             <a:avLst/>
@@ -7956,7 +7956,7 @@
         </p:nvSpPr>
         <p:spPr>
           <a:xfrm>
-            <a:off x="10965973" y="23815783"/>
+            <a:off x="10965973" y="23514572"/>
             <a:ext cx="10781748" cy="688276"/>
           </a:xfrm>
           <a:prstGeom prst="rect">
@@ -7985,7 +7985,7 @@
                 </a:solidFill>
                 <a:latin typeface="Arial"/>
               </a:rPr>
-              <a:t>Fig 2. All 32 states with 20 or more sites, coloured by dominant hazard.</a:t>
+              <a:t>Fig 2. The fleet piles up at both ends. Colour shows which hazard drives each state.</a:t>
             </a:r>
           </a:p>
         </p:txBody>
